--- a/documents/Weekly Reports/Weekly Report Template.pptx
+++ b/documents/Weekly Reports/Weekly Report Template.pptx
@@ -5,46 +5,51 @@
     <p:sldMasterId id="2147483732" r:id="rId1"/>
   </p:sldMasterIdLst>
   <p:notesMasterIdLst>
-    <p:notesMasterId r:id="rId8"/>
+    <p:notesMasterId r:id="rId13"/>
   </p:notesMasterIdLst>
   <p:sldIdLst>
     <p:sldId id="256" r:id="rId2"/>
     <p:sldId id="270" r:id="rId3"/>
     <p:sldId id="260" r:id="rId4"/>
-    <p:sldId id="283" r:id="rId5"/>
-    <p:sldId id="288" r:id="rId6"/>
-    <p:sldId id="282" r:id="rId7"/>
+    <p:sldId id="289" r:id="rId5"/>
+    <p:sldId id="290" r:id="rId6"/>
+    <p:sldId id="291" r:id="rId7"/>
+    <p:sldId id="292" r:id="rId8"/>
+    <p:sldId id="293" r:id="rId9"/>
+    <p:sldId id="288" r:id="rId10"/>
+    <p:sldId id="294" r:id="rId11"/>
+    <p:sldId id="282" r:id="rId12"/>
   </p:sldIdLst>
   <p:sldSz cx="18288000" cy="10287000"/>
   <p:notesSz cx="6858000" cy="9144000"/>
   <p:embeddedFontLst>
     <p:embeddedFont>
       <p:font typeface="Adobe Clean UX" panose="020B0503020404020204" pitchFamily="34" charset="0"/>
-      <p:regular r:id="rId9"/>
+      <p:regular r:id="rId14"/>
     </p:embeddedFont>
     <p:embeddedFont>
       <p:font typeface="Gotham Bold" panose="02000603030000020004" pitchFamily="2" charset="77"/>
-      <p:bold r:id="rId10"/>
-      <p:italic r:id="rId11"/>
-      <p:boldItalic r:id="rId12"/>
+      <p:bold r:id="rId15"/>
+      <p:italic r:id="rId16"/>
+      <p:boldItalic r:id="rId17"/>
     </p:embeddedFont>
     <p:embeddedFont>
       <p:font typeface="League Spartan" pitchFamily="2" charset="77"/>
-      <p:regular r:id="rId13"/>
-      <p:bold r:id="rId14"/>
+      <p:regular r:id="rId18"/>
+      <p:bold r:id="rId19"/>
     </p:embeddedFont>
     <p:embeddedFont>
       <p:font typeface="League Spartan ExtraBold" pitchFamily="2" charset="77"/>
-      <p:bold r:id="rId15"/>
+      <p:bold r:id="rId20"/>
     </p:embeddedFont>
     <p:embeddedFont>
       <p:font typeface="League Spartan Light" pitchFamily="2" charset="77"/>
-      <p:regular r:id="rId16"/>
+      <p:regular r:id="rId21"/>
     </p:embeddedFont>
     <p:embeddedFont>
       <p:font typeface="League Spartan SemiBold" pitchFamily="2" charset="77"/>
-      <p:regular r:id="rId17"/>
-      <p:bold r:id="rId18"/>
+      <p:regular r:id="rId22"/>
+      <p:bold r:id="rId23"/>
     </p:embeddedFont>
   </p:embeddedFontLst>
   <p:defaultTextStyle>
@@ -245,7 +250,7 @@
           </a:lstStyle>
           <a:p>
             <a:fld id="{DE7CCEA0-1AFA-644C-B5E3-C2177A2E98DD}" type="datetimeFigureOut">
-              <a:t>1/4/26</a:t>
+              <a:t>23/4/26</a:t>
             </a:fld>
             <a:endParaRPr lang="en-VN"/>
           </a:p>
@@ -595,6 +600,221 @@
 </p:notes>
 </file>
 
+<file path=ppt/notesSlides/notesSlide10.xml><?xml version="1.0" encoding="utf-8"?>
+<p:notes xmlns:a="http://schemas.openxmlformats.org/drawingml/2006/main" xmlns:r="http://schemas.openxmlformats.org/officeDocument/2006/relationships" xmlns:p="http://schemas.openxmlformats.org/presentationml/2006/main">
+  <p:cSld>
+    <p:spTree>
+      <p:nvGrpSpPr>
+        <p:cNvPr id="1" name="">
+          <a:extLst>
+            <a:ext uri="{FF2B5EF4-FFF2-40B4-BE49-F238E27FC236}">
+              <a16:creationId xmlns:a16="http://schemas.microsoft.com/office/drawing/2014/main" id="{BA15AD79-25B2-F96B-0FFF-C2FFAEE447EB}"/>
+            </a:ext>
+          </a:extLst>
+        </p:cNvPr>
+        <p:cNvGrpSpPr/>
+        <p:nvPr/>
+      </p:nvGrpSpPr>
+      <p:grpSpPr>
+        <a:xfrm>
+          <a:off x="0" y="0"/>
+          <a:ext cx="0" cy="0"/>
+          <a:chOff x="0" y="0"/>
+          <a:chExt cx="0" cy="0"/>
+        </a:xfrm>
+      </p:grpSpPr>
+      <p:sp>
+        <p:nvSpPr>
+          <p:cNvPr id="2" name="Slide Image Placeholder 1">
+            <a:extLst>
+              <a:ext uri="{FF2B5EF4-FFF2-40B4-BE49-F238E27FC236}">
+                <a16:creationId xmlns:a16="http://schemas.microsoft.com/office/drawing/2014/main" id="{737180E6-FDE3-CB9C-059A-2644ED7F3C90}"/>
+              </a:ext>
+            </a:extLst>
+          </p:cNvPr>
+          <p:cNvSpPr>
+            <a:spLocks noGrp="1" noRot="1" noChangeAspect="1"/>
+          </p:cNvSpPr>
+          <p:nvPr>
+            <p:ph type="sldImg"/>
+          </p:nvPr>
+        </p:nvSpPr>
+        <p:spPr/>
+      </p:sp>
+      <p:sp>
+        <p:nvSpPr>
+          <p:cNvPr id="3" name="Notes Placeholder 2">
+            <a:extLst>
+              <a:ext uri="{FF2B5EF4-FFF2-40B4-BE49-F238E27FC236}">
+                <a16:creationId xmlns:a16="http://schemas.microsoft.com/office/drawing/2014/main" id="{9335F59B-BDA9-B0F7-6947-99CACA17028F}"/>
+              </a:ext>
+            </a:extLst>
+          </p:cNvPr>
+          <p:cNvSpPr>
+            <a:spLocks noGrp="1"/>
+          </p:cNvSpPr>
+          <p:nvPr>
+            <p:ph type="body" idx="1"/>
+          </p:nvPr>
+        </p:nvSpPr>
+        <p:spPr/>
+        <p:txBody>
+          <a:bodyPr/>
+          <a:lstStyle/>
+          <a:p>
+            <a:endParaRPr lang="en-VN"/>
+          </a:p>
+        </p:txBody>
+      </p:sp>
+      <p:sp>
+        <p:nvSpPr>
+          <p:cNvPr id="4" name="Slide Number Placeholder 3">
+            <a:extLst>
+              <a:ext uri="{FF2B5EF4-FFF2-40B4-BE49-F238E27FC236}">
+                <a16:creationId xmlns:a16="http://schemas.microsoft.com/office/drawing/2014/main" id="{70F1DC1F-3658-C5B0-CFCF-C09ECFB3F34A}"/>
+              </a:ext>
+            </a:extLst>
+          </p:cNvPr>
+          <p:cNvSpPr>
+            <a:spLocks noGrp="1"/>
+          </p:cNvSpPr>
+          <p:nvPr>
+            <p:ph type="sldNum" sz="quarter" idx="5"/>
+          </p:nvPr>
+        </p:nvSpPr>
+        <p:spPr/>
+        <p:txBody>
+          <a:bodyPr/>
+          <a:lstStyle/>
+          <a:p>
+            <a:fld id="{C8B4E8EC-94C0-9245-8D1B-1E799525FF0E}" type="slidenum">
+              <a:rPr lang="en-VN"/>
+              <a:t>10</a:t>
+            </a:fld>
+            <a:endParaRPr lang="en-VN"/>
+          </a:p>
+        </p:txBody>
+      </p:sp>
+    </p:spTree>
+    <p:extLst>
+      <p:ext uri="{BB962C8B-B14F-4D97-AF65-F5344CB8AC3E}">
+        <p14:creationId xmlns:p14="http://schemas.microsoft.com/office/powerpoint/2010/main" val="410198056"/>
+      </p:ext>
+    </p:extLst>
+  </p:cSld>
+  <p:clrMapOvr>
+    <a:masterClrMapping/>
+  </p:clrMapOvr>
+</p:notes>
+</file>
+
+<file path=ppt/notesSlides/notesSlide11.xml><?xml version="1.0" encoding="utf-8"?>
+<p:notes xmlns:a="http://schemas.openxmlformats.org/drawingml/2006/main" xmlns:r="http://schemas.openxmlformats.org/officeDocument/2006/relationships" xmlns:p="http://schemas.openxmlformats.org/presentationml/2006/main">
+  <p:cSld>
+    <p:spTree>
+      <p:nvGrpSpPr>
+        <p:cNvPr id="1" name="">
+          <a:extLst>
+            <a:ext uri="{FF2B5EF4-FFF2-40B4-BE49-F238E27FC236}">
+              <a16:creationId xmlns:a16="http://schemas.microsoft.com/office/drawing/2014/main" id="{3E609CD1-4931-5AC7-6083-29F44AD3A2FF}"/>
+            </a:ext>
+          </a:extLst>
+        </p:cNvPr>
+        <p:cNvGrpSpPr/>
+        <p:nvPr/>
+      </p:nvGrpSpPr>
+      <p:grpSpPr>
+        <a:xfrm>
+          <a:off x="0" y="0"/>
+          <a:ext cx="0" cy="0"/>
+          <a:chOff x="0" y="0"/>
+          <a:chExt cx="0" cy="0"/>
+        </a:xfrm>
+      </p:grpSpPr>
+      <p:sp>
+        <p:nvSpPr>
+          <p:cNvPr id="2" name="Slide Image Placeholder 1">
+            <a:extLst>
+              <a:ext uri="{FF2B5EF4-FFF2-40B4-BE49-F238E27FC236}">
+                <a16:creationId xmlns:a16="http://schemas.microsoft.com/office/drawing/2014/main" id="{939CEAAF-7677-56DF-4A94-00D6B327D040}"/>
+              </a:ext>
+            </a:extLst>
+          </p:cNvPr>
+          <p:cNvSpPr>
+            <a:spLocks noGrp="1" noRot="1" noChangeAspect="1"/>
+          </p:cNvSpPr>
+          <p:nvPr>
+            <p:ph type="sldImg"/>
+          </p:nvPr>
+        </p:nvSpPr>
+        <p:spPr/>
+      </p:sp>
+      <p:sp>
+        <p:nvSpPr>
+          <p:cNvPr id="3" name="Notes Placeholder 2">
+            <a:extLst>
+              <a:ext uri="{FF2B5EF4-FFF2-40B4-BE49-F238E27FC236}">
+                <a16:creationId xmlns:a16="http://schemas.microsoft.com/office/drawing/2014/main" id="{51639B22-67BF-DCFD-28AF-484494C8E021}"/>
+              </a:ext>
+            </a:extLst>
+          </p:cNvPr>
+          <p:cNvSpPr>
+            <a:spLocks noGrp="1"/>
+          </p:cNvSpPr>
+          <p:nvPr>
+            <p:ph type="body" idx="1"/>
+          </p:nvPr>
+        </p:nvSpPr>
+        <p:spPr/>
+        <p:txBody>
+          <a:bodyPr/>
+          <a:lstStyle/>
+          <a:p>
+            <a:endParaRPr lang="en-VN"/>
+          </a:p>
+        </p:txBody>
+      </p:sp>
+      <p:sp>
+        <p:nvSpPr>
+          <p:cNvPr id="4" name="Slide Number Placeholder 3">
+            <a:extLst>
+              <a:ext uri="{FF2B5EF4-FFF2-40B4-BE49-F238E27FC236}">
+                <a16:creationId xmlns:a16="http://schemas.microsoft.com/office/drawing/2014/main" id="{E43A6980-4013-07C5-5E89-1AE9F4282448}"/>
+              </a:ext>
+            </a:extLst>
+          </p:cNvPr>
+          <p:cNvSpPr>
+            <a:spLocks noGrp="1"/>
+          </p:cNvSpPr>
+          <p:nvPr>
+            <p:ph type="sldNum" sz="quarter" idx="5"/>
+          </p:nvPr>
+        </p:nvSpPr>
+        <p:spPr/>
+        <p:txBody>
+          <a:bodyPr/>
+          <a:lstStyle/>
+          <a:p>
+            <a:fld id="{C8B4E8EC-94C0-9245-8D1B-1E799525FF0E}" type="slidenum">
+              <a:t>11</a:t>
+            </a:fld>
+            <a:endParaRPr lang="en-VN"/>
+          </a:p>
+        </p:txBody>
+      </p:sp>
+    </p:spTree>
+    <p:extLst>
+      <p:ext uri="{BB962C8B-B14F-4D97-AF65-F5344CB8AC3E}">
+        <p14:creationId xmlns:p14="http://schemas.microsoft.com/office/powerpoint/2010/main" val="2096384657"/>
+      </p:ext>
+    </p:extLst>
+  </p:cSld>
+  <p:clrMapOvr>
+    <a:masterClrMapping/>
+  </p:clrMapOvr>
+</p:notes>
+</file>
+
 <file path=ppt/notesSlides/notesSlide2.xml><?xml version="1.0" encoding="utf-8"?>
 <p:notes xmlns:a="http://schemas.openxmlformats.org/drawingml/2006/main" xmlns:r="http://schemas.openxmlformats.org/officeDocument/2006/relationships" xmlns:p="http://schemas.openxmlformats.org/presentationml/2006/main">
   <p:cSld>
@@ -771,7 +991,7 @@
         <p:cNvPr id="1" name="">
           <a:extLst>
             <a:ext uri="{FF2B5EF4-FFF2-40B4-BE49-F238E27FC236}">
-              <a16:creationId xmlns:a16="http://schemas.microsoft.com/office/drawing/2014/main" id="{B5C2634D-BF01-FD78-C2EC-5BA9B785904B}"/>
+              <a16:creationId xmlns:a16="http://schemas.microsoft.com/office/drawing/2014/main" id="{6A7CA5B0-B836-3215-CA13-38780A865092}"/>
             </a:ext>
           </a:extLst>
         </p:cNvPr>
@@ -791,7 +1011,7 @@
           <p:cNvPr id="2" name="Slide Image Placeholder 1">
             <a:extLst>
               <a:ext uri="{FF2B5EF4-FFF2-40B4-BE49-F238E27FC236}">
-                <a16:creationId xmlns:a16="http://schemas.microsoft.com/office/drawing/2014/main" id="{EC5B15C0-5F4C-14AB-F3C5-F04BD1A5900C}"/>
+                <a16:creationId xmlns:a16="http://schemas.microsoft.com/office/drawing/2014/main" id="{2AEEB26B-FF20-01C2-1A8B-1931E907EF0A}"/>
               </a:ext>
             </a:extLst>
           </p:cNvPr>
@@ -809,7 +1029,7 @@
           <p:cNvPr id="3" name="Notes Placeholder 2">
             <a:extLst>
               <a:ext uri="{FF2B5EF4-FFF2-40B4-BE49-F238E27FC236}">
-                <a16:creationId xmlns:a16="http://schemas.microsoft.com/office/drawing/2014/main" id="{B966E3BC-4235-DA66-3C02-E5457134972A}"/>
+                <a16:creationId xmlns:a16="http://schemas.microsoft.com/office/drawing/2014/main" id="{431AF966-C639-F9E1-CD0F-81BF3507CCFF}"/>
               </a:ext>
             </a:extLst>
           </p:cNvPr>
@@ -834,7 +1054,7 @@
           <p:cNvPr id="4" name="Slide Number Placeholder 3">
             <a:extLst>
               <a:ext uri="{FF2B5EF4-FFF2-40B4-BE49-F238E27FC236}">
-                <a16:creationId xmlns:a16="http://schemas.microsoft.com/office/drawing/2014/main" id="{175735A8-48F2-0D34-2882-117F7C496412}"/>
+                <a16:creationId xmlns:a16="http://schemas.microsoft.com/office/drawing/2014/main" id="{436ACE1E-C503-BE0F-AA6C-5E450622B245}"/>
               </a:ext>
             </a:extLst>
           </p:cNvPr>
@@ -852,7 +1072,7 @@
           <a:p>
             <a:fld id="{C8B4E8EC-94C0-9245-8D1B-1E799525FF0E}" type="slidenum">
               <a:rPr lang="en-VN"/>
-              <a:t>5</a:t>
+              <a:t>4</a:t>
             </a:fld>
             <a:endParaRPr lang="en-VN"/>
           </a:p>
@@ -861,7 +1081,7 @@
     </p:spTree>
     <p:extLst>
       <p:ext uri="{BB962C8B-B14F-4D97-AF65-F5344CB8AC3E}">
-        <p14:creationId xmlns:p14="http://schemas.microsoft.com/office/powerpoint/2010/main" val="1205774197"/>
+        <p14:creationId xmlns:p14="http://schemas.microsoft.com/office/powerpoint/2010/main" val="3532333385"/>
       </p:ext>
     </p:extLst>
   </p:cSld>
@@ -879,7 +1099,7 @@
         <p:cNvPr id="1" name="">
           <a:extLst>
             <a:ext uri="{FF2B5EF4-FFF2-40B4-BE49-F238E27FC236}">
-              <a16:creationId xmlns:a16="http://schemas.microsoft.com/office/drawing/2014/main" id="{3E609CD1-4931-5AC7-6083-29F44AD3A2FF}"/>
+              <a16:creationId xmlns:a16="http://schemas.microsoft.com/office/drawing/2014/main" id="{7F215F5E-3DF7-8A4F-F334-2E71A6A0F805}"/>
             </a:ext>
           </a:extLst>
         </p:cNvPr>
@@ -899,7 +1119,7 @@
           <p:cNvPr id="2" name="Slide Image Placeholder 1">
             <a:extLst>
               <a:ext uri="{FF2B5EF4-FFF2-40B4-BE49-F238E27FC236}">
-                <a16:creationId xmlns:a16="http://schemas.microsoft.com/office/drawing/2014/main" id="{939CEAAF-7677-56DF-4A94-00D6B327D040}"/>
+                <a16:creationId xmlns:a16="http://schemas.microsoft.com/office/drawing/2014/main" id="{148D2849-F379-5EE6-59E2-4C1CB8BD2D31}"/>
               </a:ext>
             </a:extLst>
           </p:cNvPr>
@@ -917,7 +1137,7 @@
           <p:cNvPr id="3" name="Notes Placeholder 2">
             <a:extLst>
               <a:ext uri="{FF2B5EF4-FFF2-40B4-BE49-F238E27FC236}">
-                <a16:creationId xmlns:a16="http://schemas.microsoft.com/office/drawing/2014/main" id="{51639B22-67BF-DCFD-28AF-484494C8E021}"/>
+                <a16:creationId xmlns:a16="http://schemas.microsoft.com/office/drawing/2014/main" id="{3801B640-FFB3-C9E2-C859-9C9DEF0ED453}"/>
               </a:ext>
             </a:extLst>
           </p:cNvPr>
@@ -942,7 +1162,7 @@
           <p:cNvPr id="4" name="Slide Number Placeholder 3">
             <a:extLst>
               <a:ext uri="{FF2B5EF4-FFF2-40B4-BE49-F238E27FC236}">
-                <a16:creationId xmlns:a16="http://schemas.microsoft.com/office/drawing/2014/main" id="{E43A6980-4013-07C5-5E89-1AE9F4282448}"/>
+                <a16:creationId xmlns:a16="http://schemas.microsoft.com/office/drawing/2014/main" id="{50EDC5A2-9F18-D21C-A60F-77E8A986AB20}"/>
               </a:ext>
             </a:extLst>
           </p:cNvPr>
@@ -959,6 +1179,115 @@
           <a:lstStyle/>
           <a:p>
             <a:fld id="{C8B4E8EC-94C0-9245-8D1B-1E799525FF0E}" type="slidenum">
+              <a:rPr lang="en-VN"/>
+              <a:t>5</a:t>
+            </a:fld>
+            <a:endParaRPr lang="en-VN"/>
+          </a:p>
+        </p:txBody>
+      </p:sp>
+    </p:spTree>
+    <p:extLst>
+      <p:ext uri="{BB962C8B-B14F-4D97-AF65-F5344CB8AC3E}">
+        <p14:creationId xmlns:p14="http://schemas.microsoft.com/office/powerpoint/2010/main" val="3890401924"/>
+      </p:ext>
+    </p:extLst>
+  </p:cSld>
+  <p:clrMapOvr>
+    <a:masterClrMapping/>
+  </p:clrMapOvr>
+</p:notes>
+</file>
+
+<file path=ppt/notesSlides/notesSlide6.xml><?xml version="1.0" encoding="utf-8"?>
+<p:notes xmlns:a="http://schemas.openxmlformats.org/drawingml/2006/main" xmlns:r="http://schemas.openxmlformats.org/officeDocument/2006/relationships" xmlns:p="http://schemas.openxmlformats.org/presentationml/2006/main">
+  <p:cSld>
+    <p:spTree>
+      <p:nvGrpSpPr>
+        <p:cNvPr id="1" name="">
+          <a:extLst>
+            <a:ext uri="{FF2B5EF4-FFF2-40B4-BE49-F238E27FC236}">
+              <a16:creationId xmlns:a16="http://schemas.microsoft.com/office/drawing/2014/main" id="{C3771964-54C9-3B5A-DB9A-82645A807C04}"/>
+            </a:ext>
+          </a:extLst>
+        </p:cNvPr>
+        <p:cNvGrpSpPr/>
+        <p:nvPr/>
+      </p:nvGrpSpPr>
+      <p:grpSpPr>
+        <a:xfrm>
+          <a:off x="0" y="0"/>
+          <a:ext cx="0" cy="0"/>
+          <a:chOff x="0" y="0"/>
+          <a:chExt cx="0" cy="0"/>
+        </a:xfrm>
+      </p:grpSpPr>
+      <p:sp>
+        <p:nvSpPr>
+          <p:cNvPr id="2" name="Slide Image Placeholder 1">
+            <a:extLst>
+              <a:ext uri="{FF2B5EF4-FFF2-40B4-BE49-F238E27FC236}">
+                <a16:creationId xmlns:a16="http://schemas.microsoft.com/office/drawing/2014/main" id="{9039AEEA-AA85-4B50-3279-EF9298B6559A}"/>
+              </a:ext>
+            </a:extLst>
+          </p:cNvPr>
+          <p:cNvSpPr>
+            <a:spLocks noGrp="1" noRot="1" noChangeAspect="1"/>
+          </p:cNvSpPr>
+          <p:nvPr>
+            <p:ph type="sldImg"/>
+          </p:nvPr>
+        </p:nvSpPr>
+        <p:spPr/>
+      </p:sp>
+      <p:sp>
+        <p:nvSpPr>
+          <p:cNvPr id="3" name="Notes Placeholder 2">
+            <a:extLst>
+              <a:ext uri="{FF2B5EF4-FFF2-40B4-BE49-F238E27FC236}">
+                <a16:creationId xmlns:a16="http://schemas.microsoft.com/office/drawing/2014/main" id="{AAD9C881-5EE1-B1FE-B027-C2D82804A746}"/>
+              </a:ext>
+            </a:extLst>
+          </p:cNvPr>
+          <p:cNvSpPr>
+            <a:spLocks noGrp="1"/>
+          </p:cNvSpPr>
+          <p:nvPr>
+            <p:ph type="body" idx="1"/>
+          </p:nvPr>
+        </p:nvSpPr>
+        <p:spPr/>
+        <p:txBody>
+          <a:bodyPr/>
+          <a:lstStyle/>
+          <a:p>
+            <a:endParaRPr lang="en-VN"/>
+          </a:p>
+        </p:txBody>
+      </p:sp>
+      <p:sp>
+        <p:nvSpPr>
+          <p:cNvPr id="4" name="Slide Number Placeholder 3">
+            <a:extLst>
+              <a:ext uri="{FF2B5EF4-FFF2-40B4-BE49-F238E27FC236}">
+                <a16:creationId xmlns:a16="http://schemas.microsoft.com/office/drawing/2014/main" id="{0873FB1B-8A23-9891-165B-12F633426CBC}"/>
+              </a:ext>
+            </a:extLst>
+          </p:cNvPr>
+          <p:cNvSpPr>
+            <a:spLocks noGrp="1"/>
+          </p:cNvSpPr>
+          <p:nvPr>
+            <p:ph type="sldNum" sz="quarter" idx="5"/>
+          </p:nvPr>
+        </p:nvSpPr>
+        <p:spPr/>
+        <p:txBody>
+          <a:bodyPr/>
+          <a:lstStyle/>
+          <a:p>
+            <a:fld id="{C8B4E8EC-94C0-9245-8D1B-1E799525FF0E}" type="slidenum">
+              <a:rPr lang="en-VN"/>
               <a:t>6</a:t>
             </a:fld>
             <a:endParaRPr lang="en-VN"/>
@@ -968,7 +1297,331 @@
     </p:spTree>
     <p:extLst>
       <p:ext uri="{BB962C8B-B14F-4D97-AF65-F5344CB8AC3E}">
-        <p14:creationId xmlns:p14="http://schemas.microsoft.com/office/powerpoint/2010/main" val="2096384657"/>
+        <p14:creationId xmlns:p14="http://schemas.microsoft.com/office/powerpoint/2010/main" val="2101220042"/>
+      </p:ext>
+    </p:extLst>
+  </p:cSld>
+  <p:clrMapOvr>
+    <a:masterClrMapping/>
+  </p:clrMapOvr>
+</p:notes>
+</file>
+
+<file path=ppt/notesSlides/notesSlide7.xml><?xml version="1.0" encoding="utf-8"?>
+<p:notes xmlns:a="http://schemas.openxmlformats.org/drawingml/2006/main" xmlns:r="http://schemas.openxmlformats.org/officeDocument/2006/relationships" xmlns:p="http://schemas.openxmlformats.org/presentationml/2006/main">
+  <p:cSld>
+    <p:spTree>
+      <p:nvGrpSpPr>
+        <p:cNvPr id="1" name="">
+          <a:extLst>
+            <a:ext uri="{FF2B5EF4-FFF2-40B4-BE49-F238E27FC236}">
+              <a16:creationId xmlns:a16="http://schemas.microsoft.com/office/drawing/2014/main" id="{1ACD9F50-0D9B-C1A8-6600-89386622F70A}"/>
+            </a:ext>
+          </a:extLst>
+        </p:cNvPr>
+        <p:cNvGrpSpPr/>
+        <p:nvPr/>
+      </p:nvGrpSpPr>
+      <p:grpSpPr>
+        <a:xfrm>
+          <a:off x="0" y="0"/>
+          <a:ext cx="0" cy="0"/>
+          <a:chOff x="0" y="0"/>
+          <a:chExt cx="0" cy="0"/>
+        </a:xfrm>
+      </p:grpSpPr>
+      <p:sp>
+        <p:nvSpPr>
+          <p:cNvPr id="2" name="Slide Image Placeholder 1">
+            <a:extLst>
+              <a:ext uri="{FF2B5EF4-FFF2-40B4-BE49-F238E27FC236}">
+                <a16:creationId xmlns:a16="http://schemas.microsoft.com/office/drawing/2014/main" id="{4AE95DA7-85E2-CD36-59AC-84406268FBA5}"/>
+              </a:ext>
+            </a:extLst>
+          </p:cNvPr>
+          <p:cNvSpPr>
+            <a:spLocks noGrp="1" noRot="1" noChangeAspect="1"/>
+          </p:cNvSpPr>
+          <p:nvPr>
+            <p:ph type="sldImg"/>
+          </p:nvPr>
+        </p:nvSpPr>
+        <p:spPr/>
+      </p:sp>
+      <p:sp>
+        <p:nvSpPr>
+          <p:cNvPr id="3" name="Notes Placeholder 2">
+            <a:extLst>
+              <a:ext uri="{FF2B5EF4-FFF2-40B4-BE49-F238E27FC236}">
+                <a16:creationId xmlns:a16="http://schemas.microsoft.com/office/drawing/2014/main" id="{3C4E0FEC-7FD6-DA6E-C3B4-6F24E04F4908}"/>
+              </a:ext>
+            </a:extLst>
+          </p:cNvPr>
+          <p:cNvSpPr>
+            <a:spLocks noGrp="1"/>
+          </p:cNvSpPr>
+          <p:nvPr>
+            <p:ph type="body" idx="1"/>
+          </p:nvPr>
+        </p:nvSpPr>
+        <p:spPr/>
+        <p:txBody>
+          <a:bodyPr/>
+          <a:lstStyle/>
+          <a:p>
+            <a:endParaRPr lang="en-VN"/>
+          </a:p>
+        </p:txBody>
+      </p:sp>
+      <p:sp>
+        <p:nvSpPr>
+          <p:cNvPr id="4" name="Slide Number Placeholder 3">
+            <a:extLst>
+              <a:ext uri="{FF2B5EF4-FFF2-40B4-BE49-F238E27FC236}">
+                <a16:creationId xmlns:a16="http://schemas.microsoft.com/office/drawing/2014/main" id="{DDDEC4E7-E0DC-7DF2-7B5B-1D1762F0F755}"/>
+              </a:ext>
+            </a:extLst>
+          </p:cNvPr>
+          <p:cNvSpPr>
+            <a:spLocks noGrp="1"/>
+          </p:cNvSpPr>
+          <p:nvPr>
+            <p:ph type="sldNum" sz="quarter" idx="5"/>
+          </p:nvPr>
+        </p:nvSpPr>
+        <p:spPr/>
+        <p:txBody>
+          <a:bodyPr/>
+          <a:lstStyle/>
+          <a:p>
+            <a:fld id="{C8B4E8EC-94C0-9245-8D1B-1E799525FF0E}" type="slidenum">
+              <a:rPr lang="en-VN"/>
+              <a:t>7</a:t>
+            </a:fld>
+            <a:endParaRPr lang="en-VN"/>
+          </a:p>
+        </p:txBody>
+      </p:sp>
+    </p:spTree>
+    <p:extLst>
+      <p:ext uri="{BB962C8B-B14F-4D97-AF65-F5344CB8AC3E}">
+        <p14:creationId xmlns:p14="http://schemas.microsoft.com/office/powerpoint/2010/main" val="2975234700"/>
+      </p:ext>
+    </p:extLst>
+  </p:cSld>
+  <p:clrMapOvr>
+    <a:masterClrMapping/>
+  </p:clrMapOvr>
+</p:notes>
+</file>
+
+<file path=ppt/notesSlides/notesSlide8.xml><?xml version="1.0" encoding="utf-8"?>
+<p:notes xmlns:a="http://schemas.openxmlformats.org/drawingml/2006/main" xmlns:r="http://schemas.openxmlformats.org/officeDocument/2006/relationships" xmlns:p="http://schemas.openxmlformats.org/presentationml/2006/main">
+  <p:cSld>
+    <p:spTree>
+      <p:nvGrpSpPr>
+        <p:cNvPr id="1" name="">
+          <a:extLst>
+            <a:ext uri="{FF2B5EF4-FFF2-40B4-BE49-F238E27FC236}">
+              <a16:creationId xmlns:a16="http://schemas.microsoft.com/office/drawing/2014/main" id="{FADACFBE-87B7-4C63-FCAC-9792CDC4905A}"/>
+            </a:ext>
+          </a:extLst>
+        </p:cNvPr>
+        <p:cNvGrpSpPr/>
+        <p:nvPr/>
+      </p:nvGrpSpPr>
+      <p:grpSpPr>
+        <a:xfrm>
+          <a:off x="0" y="0"/>
+          <a:ext cx="0" cy="0"/>
+          <a:chOff x="0" y="0"/>
+          <a:chExt cx="0" cy="0"/>
+        </a:xfrm>
+      </p:grpSpPr>
+      <p:sp>
+        <p:nvSpPr>
+          <p:cNvPr id="2" name="Slide Image Placeholder 1">
+            <a:extLst>
+              <a:ext uri="{FF2B5EF4-FFF2-40B4-BE49-F238E27FC236}">
+                <a16:creationId xmlns:a16="http://schemas.microsoft.com/office/drawing/2014/main" id="{384943D5-6737-7DE0-7729-8E8E65E42544}"/>
+              </a:ext>
+            </a:extLst>
+          </p:cNvPr>
+          <p:cNvSpPr>
+            <a:spLocks noGrp="1" noRot="1" noChangeAspect="1"/>
+          </p:cNvSpPr>
+          <p:nvPr>
+            <p:ph type="sldImg"/>
+          </p:nvPr>
+        </p:nvSpPr>
+        <p:spPr/>
+      </p:sp>
+      <p:sp>
+        <p:nvSpPr>
+          <p:cNvPr id="3" name="Notes Placeholder 2">
+            <a:extLst>
+              <a:ext uri="{FF2B5EF4-FFF2-40B4-BE49-F238E27FC236}">
+                <a16:creationId xmlns:a16="http://schemas.microsoft.com/office/drawing/2014/main" id="{04B7299A-1D2A-81F1-FB30-A4D775162F98}"/>
+              </a:ext>
+            </a:extLst>
+          </p:cNvPr>
+          <p:cNvSpPr>
+            <a:spLocks noGrp="1"/>
+          </p:cNvSpPr>
+          <p:nvPr>
+            <p:ph type="body" idx="1"/>
+          </p:nvPr>
+        </p:nvSpPr>
+        <p:spPr/>
+        <p:txBody>
+          <a:bodyPr/>
+          <a:lstStyle/>
+          <a:p>
+            <a:endParaRPr lang="en-VN"/>
+          </a:p>
+        </p:txBody>
+      </p:sp>
+      <p:sp>
+        <p:nvSpPr>
+          <p:cNvPr id="4" name="Slide Number Placeholder 3">
+            <a:extLst>
+              <a:ext uri="{FF2B5EF4-FFF2-40B4-BE49-F238E27FC236}">
+                <a16:creationId xmlns:a16="http://schemas.microsoft.com/office/drawing/2014/main" id="{E266F1D4-8E52-32D4-808E-428F130E827E}"/>
+              </a:ext>
+            </a:extLst>
+          </p:cNvPr>
+          <p:cNvSpPr>
+            <a:spLocks noGrp="1"/>
+          </p:cNvSpPr>
+          <p:nvPr>
+            <p:ph type="sldNum" sz="quarter" idx="5"/>
+          </p:nvPr>
+        </p:nvSpPr>
+        <p:spPr/>
+        <p:txBody>
+          <a:bodyPr/>
+          <a:lstStyle/>
+          <a:p>
+            <a:fld id="{C8B4E8EC-94C0-9245-8D1B-1E799525FF0E}" type="slidenum">
+              <a:rPr lang="en-VN"/>
+              <a:t>8</a:t>
+            </a:fld>
+            <a:endParaRPr lang="en-VN"/>
+          </a:p>
+        </p:txBody>
+      </p:sp>
+    </p:spTree>
+    <p:extLst>
+      <p:ext uri="{BB962C8B-B14F-4D97-AF65-F5344CB8AC3E}">
+        <p14:creationId xmlns:p14="http://schemas.microsoft.com/office/powerpoint/2010/main" val="946301008"/>
+      </p:ext>
+    </p:extLst>
+  </p:cSld>
+  <p:clrMapOvr>
+    <a:masterClrMapping/>
+  </p:clrMapOvr>
+</p:notes>
+</file>
+
+<file path=ppt/notesSlides/notesSlide9.xml><?xml version="1.0" encoding="utf-8"?>
+<p:notes xmlns:a="http://schemas.openxmlformats.org/drawingml/2006/main" xmlns:r="http://schemas.openxmlformats.org/officeDocument/2006/relationships" xmlns:p="http://schemas.openxmlformats.org/presentationml/2006/main">
+  <p:cSld>
+    <p:spTree>
+      <p:nvGrpSpPr>
+        <p:cNvPr id="1" name="">
+          <a:extLst>
+            <a:ext uri="{FF2B5EF4-FFF2-40B4-BE49-F238E27FC236}">
+              <a16:creationId xmlns:a16="http://schemas.microsoft.com/office/drawing/2014/main" id="{B5C2634D-BF01-FD78-C2EC-5BA9B785904B}"/>
+            </a:ext>
+          </a:extLst>
+        </p:cNvPr>
+        <p:cNvGrpSpPr/>
+        <p:nvPr/>
+      </p:nvGrpSpPr>
+      <p:grpSpPr>
+        <a:xfrm>
+          <a:off x="0" y="0"/>
+          <a:ext cx="0" cy="0"/>
+          <a:chOff x="0" y="0"/>
+          <a:chExt cx="0" cy="0"/>
+        </a:xfrm>
+      </p:grpSpPr>
+      <p:sp>
+        <p:nvSpPr>
+          <p:cNvPr id="2" name="Slide Image Placeholder 1">
+            <a:extLst>
+              <a:ext uri="{FF2B5EF4-FFF2-40B4-BE49-F238E27FC236}">
+                <a16:creationId xmlns:a16="http://schemas.microsoft.com/office/drawing/2014/main" id="{EC5B15C0-5F4C-14AB-F3C5-F04BD1A5900C}"/>
+              </a:ext>
+            </a:extLst>
+          </p:cNvPr>
+          <p:cNvSpPr>
+            <a:spLocks noGrp="1" noRot="1" noChangeAspect="1"/>
+          </p:cNvSpPr>
+          <p:nvPr>
+            <p:ph type="sldImg"/>
+          </p:nvPr>
+        </p:nvSpPr>
+        <p:spPr/>
+      </p:sp>
+      <p:sp>
+        <p:nvSpPr>
+          <p:cNvPr id="3" name="Notes Placeholder 2">
+            <a:extLst>
+              <a:ext uri="{FF2B5EF4-FFF2-40B4-BE49-F238E27FC236}">
+                <a16:creationId xmlns:a16="http://schemas.microsoft.com/office/drawing/2014/main" id="{B966E3BC-4235-DA66-3C02-E5457134972A}"/>
+              </a:ext>
+            </a:extLst>
+          </p:cNvPr>
+          <p:cNvSpPr>
+            <a:spLocks noGrp="1"/>
+          </p:cNvSpPr>
+          <p:nvPr>
+            <p:ph type="body" idx="1"/>
+          </p:nvPr>
+        </p:nvSpPr>
+        <p:spPr/>
+        <p:txBody>
+          <a:bodyPr/>
+          <a:lstStyle/>
+          <a:p>
+            <a:endParaRPr lang="en-VN"/>
+          </a:p>
+        </p:txBody>
+      </p:sp>
+      <p:sp>
+        <p:nvSpPr>
+          <p:cNvPr id="4" name="Slide Number Placeholder 3">
+            <a:extLst>
+              <a:ext uri="{FF2B5EF4-FFF2-40B4-BE49-F238E27FC236}">
+                <a16:creationId xmlns:a16="http://schemas.microsoft.com/office/drawing/2014/main" id="{175735A8-48F2-0D34-2882-117F7C496412}"/>
+              </a:ext>
+            </a:extLst>
+          </p:cNvPr>
+          <p:cNvSpPr>
+            <a:spLocks noGrp="1"/>
+          </p:cNvSpPr>
+          <p:nvPr>
+            <p:ph type="sldNum" sz="quarter" idx="5"/>
+          </p:nvPr>
+        </p:nvSpPr>
+        <p:spPr/>
+        <p:txBody>
+          <a:bodyPr/>
+          <a:lstStyle/>
+          <a:p>
+            <a:fld id="{C8B4E8EC-94C0-9245-8D1B-1E799525FF0E}" type="slidenum">
+              <a:rPr lang="en-VN"/>
+              <a:t>9</a:t>
+            </a:fld>
+            <a:endParaRPr lang="en-VN"/>
+          </a:p>
+        </p:txBody>
+      </p:sp>
+    </p:spTree>
+    <p:extLst>
+      <p:ext uri="{BB962C8B-B14F-4D97-AF65-F5344CB8AC3E}">
+        <p14:creationId xmlns:p14="http://schemas.microsoft.com/office/powerpoint/2010/main" val="1205774197"/>
       </p:ext>
     </p:extLst>
   </p:cSld>
@@ -1158,7 +1811,7 @@
             <a:fld id="{1D8BD707-D9CF-40AE-B4C6-C98DA3205C09}" type="datetimeFigureOut">
               <a:rPr lang="en-US" smtClean="0"/>
               <a:pPr/>
-              <a:t>4/1/26</a:t>
+              <a:t>4/23/26</a:t>
             </a:fld>
             <a:endParaRPr lang="en-US"/>
           </a:p>
@@ -1328,7 +1981,7 @@
             <a:fld id="{1D8BD707-D9CF-40AE-B4C6-C98DA3205C09}" type="datetimeFigureOut">
               <a:rPr lang="en-US" smtClean="0"/>
               <a:pPr/>
-              <a:t>4/1/26</a:t>
+              <a:t>4/23/26</a:t>
             </a:fld>
             <a:endParaRPr lang="en-US"/>
           </a:p>
@@ -1508,7 +2161,7 @@
             <a:fld id="{1D8BD707-D9CF-40AE-B4C6-C98DA3205C09}" type="datetimeFigureOut">
               <a:rPr lang="en-US" smtClean="0"/>
               <a:pPr/>
-              <a:t>4/1/26</a:t>
+              <a:t>4/23/26</a:t>
             </a:fld>
             <a:endParaRPr lang="en-US"/>
           </a:p>
@@ -1678,7 +2331,7 @@
             <a:fld id="{1D8BD707-D9CF-40AE-B4C6-C98DA3205C09}" type="datetimeFigureOut">
               <a:rPr lang="en-US" smtClean="0"/>
               <a:pPr/>
-              <a:t>4/1/26</a:t>
+              <a:t>4/23/26</a:t>
             </a:fld>
             <a:endParaRPr lang="en-US"/>
           </a:p>
@@ -1925,7 +2578,7 @@
             <a:fld id="{1D8BD707-D9CF-40AE-B4C6-C98DA3205C09}" type="datetimeFigureOut">
               <a:rPr lang="en-US" smtClean="0"/>
               <a:pPr/>
-              <a:t>4/1/26</a:t>
+              <a:t>4/23/26</a:t>
             </a:fld>
             <a:endParaRPr lang="en-US"/>
           </a:p>
@@ -2212,7 +2865,7 @@
             <a:fld id="{1D8BD707-D9CF-40AE-B4C6-C98DA3205C09}" type="datetimeFigureOut">
               <a:rPr lang="en-US" smtClean="0"/>
               <a:pPr/>
-              <a:t>4/1/26</a:t>
+              <a:t>4/23/26</a:t>
             </a:fld>
             <a:endParaRPr lang="en-US"/>
           </a:p>
@@ -2633,7 +3286,7 @@
             <a:fld id="{1D8BD707-D9CF-40AE-B4C6-C98DA3205C09}" type="datetimeFigureOut">
               <a:rPr lang="en-US" smtClean="0"/>
               <a:pPr/>
-              <a:t>4/1/26</a:t>
+              <a:t>4/23/26</a:t>
             </a:fld>
             <a:endParaRPr lang="en-US"/>
           </a:p>
@@ -2752,7 +3405,7 @@
             <a:fld id="{1D8BD707-D9CF-40AE-B4C6-C98DA3205C09}" type="datetimeFigureOut">
               <a:rPr lang="en-US" smtClean="0"/>
               <a:pPr/>
-              <a:t>4/1/26</a:t>
+              <a:t>4/23/26</a:t>
             </a:fld>
             <a:endParaRPr lang="en-US"/>
           </a:p>
@@ -2849,7 +3502,7 @@
             <a:fld id="{1D8BD707-D9CF-40AE-B4C6-C98DA3205C09}" type="datetimeFigureOut">
               <a:rPr lang="en-US" smtClean="0"/>
               <a:pPr/>
-              <a:t>4/1/26</a:t>
+              <a:t>4/23/26</a:t>
             </a:fld>
             <a:endParaRPr lang="en-US"/>
           </a:p>
@@ -3126,7 +3779,7 @@
             <a:fld id="{1D8BD707-D9CF-40AE-B4C6-C98DA3205C09}" type="datetimeFigureOut">
               <a:rPr lang="en-US" smtClean="0"/>
               <a:pPr/>
-              <a:t>4/1/26</a:t>
+              <a:t>4/23/26</a:t>
             </a:fld>
             <a:endParaRPr lang="en-US"/>
           </a:p>
@@ -3383,7 +4036,7 @@
             <a:fld id="{1D8BD707-D9CF-40AE-B4C6-C98DA3205C09}" type="datetimeFigureOut">
               <a:rPr lang="en-US" smtClean="0"/>
               <a:pPr/>
-              <a:t>4/1/26</a:t>
+              <a:t>4/23/26</a:t>
             </a:fld>
             <a:endParaRPr lang="en-US"/>
           </a:p>
@@ -3599,7 +4252,7 @@
             <a:fld id="{1D8BD707-D9CF-40AE-B4C6-C98DA3205C09}" type="datetimeFigureOut">
               <a:rPr lang="en-US" smtClean="0"/>
               <a:pPr/>
-              <a:t>4/1/26</a:t>
+              <a:t>4/23/26</a:t>
             </a:fld>
             <a:endParaRPr lang="en-US"/>
           </a:p>
@@ -4393,6 +5046,700 @@
 </p:sld>
 </file>
 
+<file path=ppt/slides/slide10.xml><?xml version="1.0" encoding="utf-8"?>
+<p:sld xmlns:a="http://schemas.openxmlformats.org/drawingml/2006/main" xmlns:r="http://schemas.openxmlformats.org/officeDocument/2006/relationships" xmlns:p="http://schemas.openxmlformats.org/presentationml/2006/main">
+  <p:cSld>
+    <p:spTree>
+      <p:nvGrpSpPr>
+        <p:cNvPr id="1" name="">
+          <a:extLst>
+            <a:ext uri="{FF2B5EF4-FFF2-40B4-BE49-F238E27FC236}">
+              <a16:creationId xmlns:a16="http://schemas.microsoft.com/office/drawing/2014/main" id="{7C258372-9D98-C552-ADA7-EAE78A84ECA0}"/>
+            </a:ext>
+          </a:extLst>
+        </p:cNvPr>
+        <p:cNvGrpSpPr/>
+        <p:nvPr/>
+      </p:nvGrpSpPr>
+      <p:grpSpPr>
+        <a:xfrm>
+          <a:off x="0" y="0"/>
+          <a:ext cx="0" cy="0"/>
+          <a:chOff x="0" y="0"/>
+          <a:chExt cx="0" cy="0"/>
+        </a:xfrm>
+      </p:grpSpPr>
+      <p:sp>
+        <p:nvSpPr>
+          <p:cNvPr id="22" name="TextBox 22">
+            <a:extLst>
+              <a:ext uri="{FF2B5EF4-FFF2-40B4-BE49-F238E27FC236}">
+                <a16:creationId xmlns:a16="http://schemas.microsoft.com/office/drawing/2014/main" id="{A0E7C8BC-4C3B-E684-8955-BAF7B92898AB}"/>
+              </a:ext>
+            </a:extLst>
+          </p:cNvPr>
+          <p:cNvSpPr txBox="1"/>
+          <p:nvPr/>
+        </p:nvSpPr>
+        <p:spPr>
+          <a:xfrm>
+            <a:off x="1104903" y="1589147"/>
+            <a:ext cx="8039091" cy="663195"/>
+          </a:xfrm>
+          <a:prstGeom prst="rect">
+            <a:avLst/>
+          </a:prstGeom>
+        </p:spPr>
+        <p:txBody>
+          <a:bodyPr wrap="square" lIns="0" tIns="0" rIns="0" bIns="0" rtlCol="0" anchor="t">
+            <a:spAutoFit/>
+          </a:bodyPr>
+          <a:lstStyle/>
+          <a:p>
+            <a:pPr marL="0" lvl="0" indent="0" algn="l">
+              <a:lnSpc>
+                <a:spcPts val="4601"/>
+              </a:lnSpc>
+            </a:pPr>
+            <a:r>
+              <a:rPr lang="en-US" sz="6000" b="1" spc="-77">
+                <a:solidFill>
+                  <a:srgbClr val="002150"/>
+                </a:solidFill>
+                <a:latin typeface="League Spartan"/>
+                <a:ea typeface="League Spartan"/>
+                <a:cs typeface="League Spartan"/>
+                <a:sym typeface="League Spartan"/>
+              </a:rPr>
+              <a:t>III. Next Plan</a:t>
+            </a:r>
+          </a:p>
+        </p:txBody>
+      </p:sp>
+      <p:sp>
+        <p:nvSpPr>
+          <p:cNvPr id="26" name="AutoShape 26">
+            <a:extLst>
+              <a:ext uri="{FF2B5EF4-FFF2-40B4-BE49-F238E27FC236}">
+                <a16:creationId xmlns:a16="http://schemas.microsoft.com/office/drawing/2014/main" id="{4FAA869F-493A-2FCE-FADE-F9D083E51A56}"/>
+              </a:ext>
+            </a:extLst>
+          </p:cNvPr>
+          <p:cNvSpPr/>
+          <p:nvPr/>
+        </p:nvSpPr>
+        <p:spPr>
+          <a:xfrm flipV="1">
+            <a:off x="11947020" y="1194282"/>
+            <a:ext cx="0" cy="2116120"/>
+          </a:xfrm>
+          <a:prstGeom prst="line">
+            <a:avLst/>
+          </a:prstGeom>
+          <a:ln w="9525" cap="flat">
+            <a:solidFill>
+              <a:srgbClr val="F7E7D7"/>
+            </a:solidFill>
+            <a:prstDash val="sysDot"/>
+            <a:headEnd type="none" w="sm" len="sm"/>
+            <a:tailEnd type="none" w="sm" len="sm"/>
+          </a:ln>
+        </p:spPr>
+        <p:txBody>
+          <a:bodyPr/>
+          <a:lstStyle/>
+          <a:p>
+            <a:endParaRPr lang="en-VN"/>
+          </a:p>
+        </p:txBody>
+      </p:sp>
+      <p:grpSp>
+        <p:nvGrpSpPr>
+          <p:cNvPr id="28" name="Group 28">
+            <a:extLst>
+              <a:ext uri="{FF2B5EF4-FFF2-40B4-BE49-F238E27FC236}">
+                <a16:creationId xmlns:a16="http://schemas.microsoft.com/office/drawing/2014/main" id="{773860A4-DC7F-A24E-CE98-12080E1D83F1}"/>
+              </a:ext>
+            </a:extLst>
+          </p:cNvPr>
+          <p:cNvGrpSpPr>
+            <a:grpSpLocks/>
+          </p:cNvGrpSpPr>
+          <p:nvPr/>
+        </p:nvGrpSpPr>
+        <p:grpSpPr>
+          <a:xfrm>
+            <a:off x="0" y="-719504"/>
+            <a:ext cx="6768300" cy="1330380"/>
+            <a:chOff x="0" y="-38100"/>
+            <a:chExt cx="1782597" cy="383810"/>
+          </a:xfrm>
+        </p:grpSpPr>
+        <p:sp>
+          <p:nvSpPr>
+            <p:cNvPr id="29" name="Freeform 29">
+              <a:extLst>
+                <a:ext uri="{FF2B5EF4-FFF2-40B4-BE49-F238E27FC236}">
+                  <a16:creationId xmlns:a16="http://schemas.microsoft.com/office/drawing/2014/main" id="{13A13CED-9F77-4D9D-1962-FEC484E479E7}"/>
+                </a:ext>
+              </a:extLst>
+            </p:cNvPr>
+            <p:cNvSpPr>
+              <a:spLocks/>
+            </p:cNvSpPr>
+            <p:nvPr/>
+          </p:nvSpPr>
+          <p:spPr>
+            <a:xfrm>
+              <a:off x="0" y="-38100"/>
+              <a:ext cx="1782597" cy="383810"/>
+            </a:xfrm>
+            <a:custGeom>
+              <a:avLst/>
+              <a:gdLst/>
+              <a:ahLst/>
+              <a:cxnLst/>
+              <a:rect l="l" t="t" r="r" b="b"/>
+              <a:pathLst>
+                <a:path w="1782597" h="345710">
+                  <a:moveTo>
+                    <a:pt x="0" y="0"/>
+                  </a:moveTo>
+                  <a:lnTo>
+                    <a:pt x="1782597" y="0"/>
+                  </a:lnTo>
+                  <a:lnTo>
+                    <a:pt x="1782597" y="345710"/>
+                  </a:lnTo>
+                  <a:lnTo>
+                    <a:pt x="0" y="345710"/>
+                  </a:lnTo>
+                  <a:close/>
+                </a:path>
+              </a:pathLst>
+            </a:custGeom>
+            <a:solidFill>
+              <a:srgbClr val="002250"/>
+            </a:solidFill>
+          </p:spPr>
+          <p:txBody>
+            <a:bodyPr/>
+            <a:lstStyle/>
+            <a:p>
+              <a:endParaRPr lang="en-VN"/>
+            </a:p>
+          </p:txBody>
+        </p:sp>
+        <p:sp>
+          <p:nvSpPr>
+            <p:cNvPr id="30" name="TextBox 30">
+              <a:extLst>
+                <a:ext uri="{FF2B5EF4-FFF2-40B4-BE49-F238E27FC236}">
+                  <a16:creationId xmlns:a16="http://schemas.microsoft.com/office/drawing/2014/main" id="{B73D2B91-F4A0-6881-4843-B9D5C158ABA3}"/>
+                </a:ext>
+              </a:extLst>
+            </p:cNvPr>
+            <p:cNvSpPr txBox="1">
+              <a:spLocks/>
+            </p:cNvSpPr>
+            <p:nvPr/>
+          </p:nvSpPr>
+          <p:spPr>
+            <a:xfrm>
+              <a:off x="0" y="-38100"/>
+              <a:ext cx="1782597" cy="383810"/>
+            </a:xfrm>
+            <a:prstGeom prst="rect">
+              <a:avLst/>
+            </a:prstGeom>
+          </p:spPr>
+          <p:txBody>
+            <a:bodyPr lIns="50800" tIns="50800" rIns="50800" bIns="50800" rtlCol="0" anchor="ctr"/>
+            <a:lstStyle/>
+            <a:p>
+              <a:pPr algn="ctr">
+                <a:lnSpc>
+                  <a:spcPts val="2659"/>
+                </a:lnSpc>
+              </a:pPr>
+              <a:endParaRPr/>
+            </a:p>
+          </p:txBody>
+        </p:sp>
+      </p:grpSp>
+      <p:pic>
+        <p:nvPicPr>
+          <p:cNvPr id="41" name="Picture 40">
+            <a:extLst>
+              <a:ext uri="{FF2B5EF4-FFF2-40B4-BE49-F238E27FC236}">
+                <a16:creationId xmlns:a16="http://schemas.microsoft.com/office/drawing/2014/main" id="{35B5997B-94ED-975E-91FF-C0B316098578}"/>
+              </a:ext>
+            </a:extLst>
+          </p:cNvPr>
+          <p:cNvPicPr>
+            <a:picLocks noChangeAspect="1"/>
+          </p:cNvPicPr>
+          <p:nvPr/>
+        </p:nvPicPr>
+        <p:blipFill>
+          <a:blip r:embed="rId3">
+            <a:extLst>
+              <a:ext uri="{28A0092B-C50C-407E-A947-70E740481C1C}">
+                <a14:useLocalDpi xmlns:a14="http://schemas.microsoft.com/office/drawing/2010/main" val="0"/>
+              </a:ext>
+            </a:extLst>
+          </a:blip>
+          <a:stretch>
+            <a:fillRect/>
+          </a:stretch>
+        </p:blipFill>
+        <p:spPr>
+          <a:xfrm>
+            <a:off x="6768300" y="-748114"/>
+            <a:ext cx="11519700" cy="1358990"/>
+          </a:xfrm>
+          <a:prstGeom prst="rect">
+            <a:avLst/>
+          </a:prstGeom>
+        </p:spPr>
+      </p:pic>
+      <p:sp>
+        <p:nvSpPr>
+          <p:cNvPr id="8" name="TextBox 7">
+            <a:extLst>
+              <a:ext uri="{FF2B5EF4-FFF2-40B4-BE49-F238E27FC236}">
+                <a16:creationId xmlns:a16="http://schemas.microsoft.com/office/drawing/2014/main" id="{4FADE4D8-9DAF-BF50-2F12-0B8E6785F39A}"/>
+              </a:ext>
+            </a:extLst>
+          </p:cNvPr>
+          <p:cNvSpPr txBox="1"/>
+          <p:nvPr/>
+        </p:nvSpPr>
+        <p:spPr>
+          <a:xfrm>
+            <a:off x="1401507" y="2472100"/>
+            <a:ext cx="14592298" cy="1008931"/>
+          </a:xfrm>
+          <a:prstGeom prst="rect">
+            <a:avLst/>
+          </a:prstGeom>
+          <a:noFill/>
+        </p:spPr>
+        <p:txBody>
+          <a:bodyPr wrap="square" rtlCol="0">
+            <a:spAutoFit/>
+          </a:bodyPr>
+          <a:lstStyle/>
+          <a:p>
+            <a:pPr>
+              <a:lnSpc>
+                <a:spcPct val="120000"/>
+              </a:lnSpc>
+            </a:pPr>
+            <a:r>
+              <a:rPr lang="en-US" sz="2600" spc="-64">
+                <a:solidFill>
+                  <a:srgbClr val="002150"/>
+                </a:solidFill>
+                <a:latin typeface="Adobe Clean UX" panose="020B0503020404020204" pitchFamily="34" charset="0"/>
+              </a:rPr>
+              <a:t>- Implement the game </a:t>
+            </a:r>
+          </a:p>
+          <a:p>
+            <a:pPr>
+              <a:lnSpc>
+                <a:spcPct val="120000"/>
+              </a:lnSpc>
+            </a:pPr>
+            <a:r>
+              <a:rPr lang="en-US" sz="2600" spc="-64">
+                <a:solidFill>
+                  <a:srgbClr val="002150"/>
+                </a:solidFill>
+                <a:latin typeface="Adobe Clean UX" panose="020B0503020404020204" pitchFamily="34" charset="0"/>
+              </a:rPr>
+              <a:t> </a:t>
+            </a:r>
+          </a:p>
+        </p:txBody>
+      </p:sp>
+    </p:spTree>
+    <p:extLst>
+      <p:ext uri="{BB962C8B-B14F-4D97-AF65-F5344CB8AC3E}">
+        <p14:creationId xmlns:p14="http://schemas.microsoft.com/office/powerpoint/2010/main" val="2120628250"/>
+      </p:ext>
+    </p:extLst>
+  </p:cSld>
+  <p:clrMapOvr>
+    <a:masterClrMapping/>
+  </p:clrMapOvr>
+</p:sld>
+</file>
+
+<file path=ppt/slides/slide11.xml><?xml version="1.0" encoding="utf-8"?>
+<p:sld xmlns:a="http://schemas.openxmlformats.org/drawingml/2006/main" xmlns:r="http://schemas.openxmlformats.org/officeDocument/2006/relationships" xmlns:p="http://schemas.openxmlformats.org/presentationml/2006/main">
+  <p:cSld>
+    <p:bg>
+      <p:bgPr>
+        <a:solidFill>
+          <a:srgbClr val="002150"/>
+        </a:solidFill>
+        <a:effectLst/>
+      </p:bgPr>
+    </p:bg>
+    <p:spTree>
+      <p:nvGrpSpPr>
+        <p:cNvPr id="1" name="">
+          <a:extLst>
+            <a:ext uri="{FF2B5EF4-FFF2-40B4-BE49-F238E27FC236}">
+              <a16:creationId xmlns:a16="http://schemas.microsoft.com/office/drawing/2014/main" id="{76004016-496C-AE22-2465-EADD53784ED6}"/>
+            </a:ext>
+          </a:extLst>
+        </p:cNvPr>
+        <p:cNvGrpSpPr/>
+        <p:nvPr/>
+      </p:nvGrpSpPr>
+      <p:grpSpPr>
+        <a:xfrm>
+          <a:off x="0" y="0"/>
+          <a:ext cx="0" cy="0"/>
+          <a:chOff x="0" y="0"/>
+          <a:chExt cx="0" cy="0"/>
+        </a:xfrm>
+      </p:grpSpPr>
+      <p:pic>
+        <p:nvPicPr>
+          <p:cNvPr id="11" name="Picture 10">
+            <a:extLst>
+              <a:ext uri="{FF2B5EF4-FFF2-40B4-BE49-F238E27FC236}">
+                <a16:creationId xmlns:a16="http://schemas.microsoft.com/office/drawing/2014/main" id="{C87A2D41-C0FD-8B6D-0383-C9F201443221}"/>
+              </a:ext>
+            </a:extLst>
+          </p:cNvPr>
+          <p:cNvPicPr>
+            <a:picLocks noChangeAspect="1"/>
+          </p:cNvPicPr>
+          <p:nvPr/>
+        </p:nvPicPr>
+        <p:blipFill>
+          <a:blip r:embed="rId3"/>
+          <a:srcRect l="39520" b="4709"/>
+          <a:stretch/>
+        </p:blipFill>
+        <p:spPr>
+          <a:xfrm>
+            <a:off x="-1" y="1373683"/>
+            <a:ext cx="6970530" cy="8913317"/>
+          </a:xfrm>
+          <a:prstGeom prst="rect">
+            <a:avLst/>
+          </a:prstGeom>
+        </p:spPr>
+      </p:pic>
+      <p:sp>
+        <p:nvSpPr>
+          <p:cNvPr id="7" name="TextBox 7">
+            <a:extLst>
+              <a:ext uri="{FF2B5EF4-FFF2-40B4-BE49-F238E27FC236}">
+                <a16:creationId xmlns:a16="http://schemas.microsoft.com/office/drawing/2014/main" id="{1D23C974-625B-104F-F03C-016C40E6AE1D}"/>
+              </a:ext>
+            </a:extLst>
+          </p:cNvPr>
+          <p:cNvSpPr txBox="1"/>
+          <p:nvPr/>
+        </p:nvSpPr>
+        <p:spPr>
+          <a:xfrm>
+            <a:off x="838200" y="8274134"/>
+            <a:ext cx="5551714" cy="831766"/>
+          </a:xfrm>
+          <a:prstGeom prst="rect">
+            <a:avLst/>
+          </a:prstGeom>
+        </p:spPr>
+        <p:txBody>
+          <a:bodyPr wrap="square" lIns="0" tIns="0" rIns="0" bIns="0" rtlCol="0" anchor="t">
+            <a:spAutoFit/>
+          </a:bodyPr>
+          <a:lstStyle/>
+          <a:p>
+            <a:pPr algn="l">
+              <a:lnSpc>
+                <a:spcPts val="7488"/>
+              </a:lnSpc>
+            </a:pPr>
+            <a:r>
+              <a:rPr lang="en-US" sz="3000" b="1" spc="-39">
+                <a:solidFill>
+                  <a:srgbClr val="FAF2EC"/>
+                </a:solidFill>
+                <a:latin typeface="League Spartan SemiBold" pitchFamily="2" charset="77"/>
+                <a:ea typeface="League Spartan"/>
+                <a:cs typeface="Segoe UI" panose="020F0502020204030204" pitchFamily="34" charset="0"/>
+                <a:sym typeface="League Spartan"/>
+              </a:rPr>
+              <a:t>Individual Honours Project</a:t>
+            </a:r>
+          </a:p>
+        </p:txBody>
+      </p:sp>
+      <p:pic>
+        <p:nvPicPr>
+          <p:cNvPr id="10" name="Picture 9" descr="A white lion with a black background&#10;&#10;Description automatically generated">
+            <a:extLst>
+              <a:ext uri="{FF2B5EF4-FFF2-40B4-BE49-F238E27FC236}">
+                <a16:creationId xmlns:a16="http://schemas.microsoft.com/office/drawing/2014/main" id="{B54BC935-F322-DF78-714D-F95F888D85CB}"/>
+              </a:ext>
+            </a:extLst>
+          </p:cNvPr>
+          <p:cNvPicPr>
+            <a:picLocks noChangeAspect="1"/>
+          </p:cNvPicPr>
+          <p:nvPr/>
+        </p:nvPicPr>
+        <p:blipFill>
+          <a:blip r:embed="rId4">
+            <a:duotone>
+              <a:prstClr val="black"/>
+              <a:srgbClr val="FAF2EC">
+                <a:tint val="45000"/>
+                <a:satMod val="400000"/>
+              </a:srgbClr>
+            </a:duotone>
+            <a:extLst>
+              <a:ext uri="{28A0092B-C50C-407E-A947-70E740481C1C}">
+                <a14:useLocalDpi xmlns:a14="http://schemas.microsoft.com/office/drawing/2010/main" val="0"/>
+              </a:ext>
+            </a:extLst>
+          </a:blip>
+          <a:stretch>
+            <a:fillRect/>
+          </a:stretch>
+        </p:blipFill>
+        <p:spPr>
+          <a:xfrm>
+            <a:off x="8970647" y="3009900"/>
+            <a:ext cx="1270000" cy="1270000"/>
+          </a:xfrm>
+          <a:prstGeom prst="rect">
+            <a:avLst/>
+          </a:prstGeom>
+        </p:spPr>
+      </p:pic>
+      <p:pic>
+        <p:nvPicPr>
+          <p:cNvPr id="12" name="Picture 11" descr="A white logo with a black background&#10;&#10;Description automatically generated">
+            <a:extLst>
+              <a:ext uri="{FF2B5EF4-FFF2-40B4-BE49-F238E27FC236}">
+                <a16:creationId xmlns:a16="http://schemas.microsoft.com/office/drawing/2014/main" id="{B12364C6-3778-ECB0-4A1E-DBC15203834F}"/>
+              </a:ext>
+            </a:extLst>
+          </p:cNvPr>
+          <p:cNvPicPr>
+            <a:picLocks noChangeAspect="1"/>
+          </p:cNvPicPr>
+          <p:nvPr/>
+        </p:nvPicPr>
+        <p:blipFill>
+          <a:blip r:embed="rId5">
+            <a:duotone>
+              <a:prstClr val="black"/>
+              <a:srgbClr val="FAF2EC">
+                <a:tint val="45000"/>
+                <a:satMod val="400000"/>
+              </a:srgbClr>
+            </a:duotone>
+            <a:extLst>
+              <a:ext uri="{28A0092B-C50C-407E-A947-70E740481C1C}">
+                <a14:useLocalDpi xmlns:a14="http://schemas.microsoft.com/office/drawing/2010/main" val="0"/>
+              </a:ext>
+            </a:extLst>
+          </a:blip>
+          <a:stretch>
+            <a:fillRect/>
+          </a:stretch>
+        </p:blipFill>
+        <p:spPr>
+          <a:xfrm>
+            <a:off x="7957686" y="3009900"/>
+            <a:ext cx="1270000" cy="1270000"/>
+          </a:xfrm>
+          <a:prstGeom prst="rect">
+            <a:avLst/>
+          </a:prstGeom>
+        </p:spPr>
+      </p:pic>
+      <p:sp>
+        <p:nvSpPr>
+          <p:cNvPr id="20" name="TextBox 19">
+            <a:extLst>
+              <a:ext uri="{FF2B5EF4-FFF2-40B4-BE49-F238E27FC236}">
+                <a16:creationId xmlns:a16="http://schemas.microsoft.com/office/drawing/2014/main" id="{B03E0354-D0F3-48F4-F63D-40EB60B225EF}"/>
+              </a:ext>
+            </a:extLst>
+          </p:cNvPr>
+          <p:cNvSpPr txBox="1"/>
+          <p:nvPr/>
+        </p:nvSpPr>
+        <p:spPr>
+          <a:xfrm>
+            <a:off x="744086" y="9029700"/>
+            <a:ext cx="7848600" cy="923330"/>
+          </a:xfrm>
+          <a:prstGeom prst="rect">
+            <a:avLst/>
+          </a:prstGeom>
+          <a:noFill/>
+        </p:spPr>
+        <p:txBody>
+          <a:bodyPr wrap="square">
+            <a:spAutoFit/>
+          </a:bodyPr>
+          <a:lstStyle/>
+          <a:p>
+            <a:r>
+              <a:rPr lang="en-US" b="1" spc="-39">
+                <a:solidFill>
+                  <a:srgbClr val="FAF2EC"/>
+                </a:solidFill>
+                <a:latin typeface="League Spartan SemiBold" pitchFamily="2" charset="77"/>
+              </a:rPr>
+              <a:t>Dang Khoa Cao - Supervisor: PhD. Chi Thanh Vi</a:t>
+            </a:r>
+          </a:p>
+          <a:p>
+            <a:r>
+              <a:rPr lang="en-US" b="1" spc="-39">
+                <a:solidFill>
+                  <a:srgbClr val="FAF2EC"/>
+                </a:solidFill>
+                <a:latin typeface="League Spartan SemiBold" pitchFamily="2" charset="77"/>
+              </a:rPr>
+              <a:t>UIT ID: 23560023 | BCU ID: 25195675</a:t>
+            </a:r>
+          </a:p>
+          <a:p>
+            <a:r>
+              <a:rPr lang="en-US" b="1" spc="-39">
+                <a:solidFill>
+                  <a:srgbClr val="FAF2EC"/>
+                </a:solidFill>
+                <a:latin typeface="League Spartan SemiBold" pitchFamily="2" charset="77"/>
+              </a:rPr>
+              <a:t>23560023@gm.uit.edu.vn | dang.cao@mail.bcu.ac.uk</a:t>
+            </a:r>
+          </a:p>
+        </p:txBody>
+      </p:sp>
+      <p:sp>
+        <p:nvSpPr>
+          <p:cNvPr id="6" name="TextBox 7">
+            <a:extLst>
+              <a:ext uri="{FF2B5EF4-FFF2-40B4-BE49-F238E27FC236}">
+                <a16:creationId xmlns:a16="http://schemas.microsoft.com/office/drawing/2014/main" id="{C23A1498-366D-AFFC-972A-3A3C7ED41DF3}"/>
+              </a:ext>
+            </a:extLst>
+          </p:cNvPr>
+          <p:cNvSpPr txBox="1"/>
+          <p:nvPr/>
+        </p:nvSpPr>
+        <p:spPr>
+          <a:xfrm>
+            <a:off x="3589375" y="4153964"/>
+            <a:ext cx="11109249" cy="1973232"/>
+          </a:xfrm>
+          <a:prstGeom prst="rect">
+            <a:avLst/>
+          </a:prstGeom>
+        </p:spPr>
+        <p:txBody>
+          <a:bodyPr wrap="square" lIns="0" tIns="0" rIns="0" bIns="0" rtlCol="0" anchor="t">
+            <a:spAutoFit/>
+          </a:bodyPr>
+          <a:lstStyle/>
+          <a:p>
+            <a:pPr algn="ctr">
+              <a:lnSpc>
+                <a:spcPts val="7488"/>
+              </a:lnSpc>
+            </a:pPr>
+            <a:r>
+              <a:rPr lang="en-US" sz="7000" spc="-39">
+                <a:solidFill>
+                  <a:srgbClr val="FAF2EC"/>
+                </a:solidFill>
+                <a:latin typeface="League Spartan ExtraBold" pitchFamily="2" charset="77"/>
+                <a:ea typeface="League Spartan"/>
+                <a:cs typeface="Segoe UI" panose="020F0502020204030204" pitchFamily="34" charset="0"/>
+                <a:sym typeface="League Spartan"/>
+              </a:rPr>
+              <a:t>THANK YOU</a:t>
+            </a:r>
+          </a:p>
+          <a:p>
+            <a:pPr algn="ctr">
+              <a:lnSpc>
+                <a:spcPts val="7488"/>
+              </a:lnSpc>
+            </a:pPr>
+            <a:r>
+              <a:rPr lang="en-US" sz="7000" spc="-39">
+                <a:solidFill>
+                  <a:srgbClr val="FAF2EC"/>
+                </a:solidFill>
+                <a:latin typeface="League Spartan ExtraBold" pitchFamily="2" charset="77"/>
+                <a:ea typeface="League Spartan"/>
+                <a:cs typeface="Segoe UI" panose="020F0502020204030204" pitchFamily="34" charset="0"/>
+                <a:sym typeface="League Spartan"/>
+              </a:rPr>
+              <a:t>FOR READING!</a:t>
+            </a:r>
+          </a:p>
+        </p:txBody>
+      </p:sp>
+      <p:pic>
+        <p:nvPicPr>
+          <p:cNvPr id="16" name="Picture 15">
+            <a:extLst>
+              <a:ext uri="{FF2B5EF4-FFF2-40B4-BE49-F238E27FC236}">
+                <a16:creationId xmlns:a16="http://schemas.microsoft.com/office/drawing/2014/main" id="{BE9548F2-93D6-3772-8F0F-39AB66FE8F95}"/>
+              </a:ext>
+            </a:extLst>
+          </p:cNvPr>
+          <p:cNvPicPr>
+            <a:picLocks noChangeAspect="1"/>
+          </p:cNvPicPr>
+          <p:nvPr/>
+        </p:nvPicPr>
+        <p:blipFill>
+          <a:blip r:embed="rId6"/>
+          <a:srcRect r="32464"/>
+          <a:stretch/>
+        </p:blipFill>
+        <p:spPr>
+          <a:xfrm>
+            <a:off x="11782871" y="1340663"/>
+            <a:ext cx="6505129" cy="8787143"/>
+          </a:xfrm>
+          <a:prstGeom prst="rect">
+            <a:avLst/>
+          </a:prstGeom>
+        </p:spPr>
+      </p:pic>
+    </p:spTree>
+    <p:extLst>
+      <p:ext uri="{BB962C8B-B14F-4D97-AF65-F5344CB8AC3E}">
+        <p14:creationId xmlns:p14="http://schemas.microsoft.com/office/powerpoint/2010/main" val="2793671517"/>
+      </p:ext>
+    </p:extLst>
+  </p:cSld>
+  <p:clrMapOvr>
+    <a:masterClrMapping/>
+  </p:clrMapOvr>
+</p:sld>
+</file>
+
 <file path=ppt/slides/slide2.xml><?xml version="1.0" encoding="utf-8"?>
 <p:sld xmlns:a="http://schemas.openxmlformats.org/drawingml/2006/main" xmlns:r="http://schemas.openxmlformats.org/officeDocument/2006/relationships" xmlns:p="http://schemas.openxmlformats.org/presentationml/2006/main">
   <p:cSld>
@@ -4606,7 +5953,7 @@
                 </a:solidFill>
                 <a:latin typeface="League Spartan Light" pitchFamily="2" charset="77"/>
               </a:rPr>
-              <a:t>Date: 1 Apr 2026</a:t>
+              <a:t>Date: 23 Apr 2026</a:t>
             </a:r>
           </a:p>
         </p:txBody>
@@ -4626,7 +5973,7 @@
         <p:spPr>
           <a:xfrm>
             <a:off x="2469664" y="3363327"/>
-            <a:ext cx="11734801" cy="1215397"/>
+            <a:ext cx="11734801" cy="2421945"/>
           </a:xfrm>
           <a:prstGeom prst="rect">
             <a:avLst/>
@@ -4654,7 +6001,26 @@
                 <a:latin typeface="Gotham Bold"/>
                 <a:cs typeface="Gotham Bold"/>
               </a:rPr>
-              <a:t>Overview</a:t>
+              <a:t>Summary</a:t>
+            </a:r>
+          </a:p>
+          <a:p>
+            <a:pPr marL="539750" indent="-539750" algn="just">
+              <a:lnSpc>
+                <a:spcPct val="140000"/>
+              </a:lnSpc>
+              <a:buFont typeface="+mj-lt"/>
+              <a:buAutoNum type="romanUcPeriod"/>
+            </a:pPr>
+            <a:r>
+              <a:rPr lang="en-US" sz="2800" spc="-64">
+                <a:solidFill>
+                  <a:srgbClr val="002250"/>
+                </a:solidFill>
+                <a:latin typeface="Gotham Bold"/>
+                <a:cs typeface="Gotham Bold"/>
+              </a:rPr>
+              <a:t>Finished tasks</a:t>
             </a:r>
             <a:endParaRPr lang="en-VN" sz="2800" spc="-64">
               <a:solidFill>
@@ -4681,6 +6047,25 @@
                 <a:cs typeface="Gotham Bold"/>
               </a:rPr>
               <a:t>Current difficulties</a:t>
+            </a:r>
+          </a:p>
+          <a:p>
+            <a:pPr marL="539750" indent="-539750" algn="just">
+              <a:lnSpc>
+                <a:spcPct val="140000"/>
+              </a:lnSpc>
+              <a:buFont typeface="+mj-lt"/>
+              <a:buAutoNum type="romanUcPeriod"/>
+            </a:pPr>
+            <a:r>
+              <a:rPr lang="en-VN" sz="2800" spc="-64">
+                <a:solidFill>
+                  <a:srgbClr val="002250"/>
+                </a:solidFill>
+                <a:latin typeface="Gotham Bold"/>
+                <a:cs typeface="Gotham Bold"/>
+              </a:rPr>
+              <a:t>Next plan</a:t>
             </a:r>
           </a:p>
         </p:txBody>
@@ -5009,7 +6394,7 @@
         <p:spPr>
           <a:xfrm>
             <a:off x="1104902" y="2628900"/>
-            <a:ext cx="15506683" cy="2449325"/>
+            <a:ext cx="15506683" cy="1969193"/>
           </a:xfrm>
           <a:prstGeom prst="rect">
             <a:avLst/>
@@ -5067,12 +6452,10 @@
             </a:r>
           </a:p>
           <a:p>
-            <a:pPr marL="342900" indent="-342900">
+            <a:pPr>
               <a:lnSpc>
                 <a:spcPct val="120000"/>
               </a:lnSpc>
-              <a:buFont typeface="System Font Regular"/>
-              <a:buChar char="⎯"/>
             </a:pPr>
             <a:endParaRPr lang="en-US" sz="2600" spc="-64">
               <a:solidFill>
@@ -5081,69 +6464,8 @@
               <a:latin typeface="Adobe Clean UX" panose="020B0503020404020204" pitchFamily="34" charset="0"/>
             </a:endParaRPr>
           </a:p>
-          <a:p>
-            <a:pPr marL="342900" indent="-342900">
-              <a:lnSpc>
-                <a:spcPct val="120000"/>
-              </a:lnSpc>
-              <a:buFont typeface="System Font Regular"/>
-              <a:buChar char="⎯"/>
-            </a:pPr>
-            <a:r>
-              <a:rPr lang="en-US" sz="2600" spc="-64">
-                <a:solidFill>
-                  <a:srgbClr val="002250"/>
-                </a:solidFill>
-                <a:latin typeface="Adobe Clean UX" panose="020B0503020404020204" pitchFamily="34" charset="0"/>
-              </a:rPr>
-              <a:t>Timeline:</a:t>
-            </a:r>
-          </a:p>
-        </p:txBody>
-      </p:sp>
-      <p:pic>
-        <p:nvPicPr>
-          <p:cNvPr id="4" name="Picture 3" descr="A table with text on it&#10;&#10;Description automatically generated">
-            <a:extLst>
-              <a:ext uri="{FF2B5EF4-FFF2-40B4-BE49-F238E27FC236}">
-                <a16:creationId xmlns:a16="http://schemas.microsoft.com/office/drawing/2014/main" id="{73AF34D2-2CD1-29C3-76B5-25AD8425738F}"/>
-              </a:ext>
-            </a:extLst>
-          </p:cNvPr>
-          <p:cNvPicPr>
-            <a:picLocks noChangeAspect="1"/>
-          </p:cNvPicPr>
-          <p:nvPr/>
-        </p:nvPicPr>
-        <p:blipFill>
-          <a:blip r:embed="rId4">
-            <a:extLst>
-              <a:ext uri="{28A0092B-C50C-407E-A947-70E740481C1C}">
-                <a14:useLocalDpi xmlns:a14="http://schemas.microsoft.com/office/drawing/2010/main" val="0"/>
-              </a:ext>
-            </a:extLst>
-          </a:blip>
-          <a:stretch>
-            <a:fillRect/>
-          </a:stretch>
-        </p:blipFill>
-        <p:spPr>
-          <a:xfrm>
-            <a:off x="3124200" y="4594349"/>
-            <a:ext cx="14670233" cy="5003800"/>
-          </a:xfrm>
-          <a:prstGeom prst="rect">
-            <a:avLst/>
-          </a:prstGeom>
-          <a:ln w="19050">
-            <a:solidFill>
-              <a:schemeClr val="tx2">
-                <a:lumMod val="50000"/>
-              </a:schemeClr>
-            </a:solidFill>
-          </a:ln>
-        </p:spPr>
-      </p:pic>
+        </p:txBody>
+      </p:sp>
     </p:spTree>
   </p:cSld>
   <p:clrMapOvr>
@@ -5160,7 +6482,7 @@
         <p:cNvPr id="1" name="">
           <a:extLst>
             <a:ext uri="{FF2B5EF4-FFF2-40B4-BE49-F238E27FC236}">
-              <a16:creationId xmlns:a16="http://schemas.microsoft.com/office/drawing/2014/main" id="{D60CF20B-4D28-97E3-A0BB-041D4F536CE5}"/>
+              <a16:creationId xmlns:a16="http://schemas.microsoft.com/office/drawing/2014/main" id="{35C51ABB-3520-9816-3766-25E59FC52371}"/>
             </a:ext>
           </a:extLst>
         </p:cNvPr>
@@ -5180,7 +6502,7 @@
           <p:cNvPr id="22" name="TextBox 22">
             <a:extLst>
               <a:ext uri="{FF2B5EF4-FFF2-40B4-BE49-F238E27FC236}">
-                <a16:creationId xmlns:a16="http://schemas.microsoft.com/office/drawing/2014/main" id="{146F9269-32F8-0A8C-0BBF-B46888822385}"/>
+                <a16:creationId xmlns:a16="http://schemas.microsoft.com/office/drawing/2014/main" id="{FB1E16EB-FDB4-4C00-F8F3-777C300B3801}"/>
               </a:ext>
             </a:extLst>
           </p:cNvPr>
@@ -5190,7 +6512,7 @@
         <p:spPr>
           <a:xfrm>
             <a:off x="1104903" y="1589147"/>
-            <a:ext cx="8039091" cy="663195"/>
+            <a:ext cx="5197969" cy="663195"/>
           </a:xfrm>
           <a:prstGeom prst="rect">
             <a:avLst/>
@@ -5217,7 +6539,7 @@
                 <a:cs typeface="League Spartan"/>
                 <a:sym typeface="League Spartan"/>
               </a:rPr>
-              <a:t>III. Current Difficulties</a:t>
+              <a:t>I. Finished tasks</a:t>
             </a:r>
           </a:p>
         </p:txBody>
@@ -5227,7 +6549,7 @@
           <p:cNvPr id="26" name="AutoShape 26">
             <a:extLst>
               <a:ext uri="{FF2B5EF4-FFF2-40B4-BE49-F238E27FC236}">
-                <a16:creationId xmlns:a16="http://schemas.microsoft.com/office/drawing/2014/main" id="{47126B45-469F-1D65-434C-A9C6BAEDAD1D}"/>
+                <a16:creationId xmlns:a16="http://schemas.microsoft.com/office/drawing/2014/main" id="{F8DB5CB9-6CE8-6FEF-CF34-295F6A6FC614}"/>
               </a:ext>
             </a:extLst>
           </p:cNvPr>
@@ -5264,7 +6586,7 @@
           <p:cNvPr id="28" name="Group 28">
             <a:extLst>
               <a:ext uri="{FF2B5EF4-FFF2-40B4-BE49-F238E27FC236}">
-                <a16:creationId xmlns:a16="http://schemas.microsoft.com/office/drawing/2014/main" id="{35DAC9B5-71EE-74D9-E1AC-675018AC98BF}"/>
+                <a16:creationId xmlns:a16="http://schemas.microsoft.com/office/drawing/2014/main" id="{7501318A-B35C-EF8F-9475-66976567D64F}"/>
               </a:ext>
             </a:extLst>
           </p:cNvPr>
@@ -5286,7 +6608,7 @@
             <p:cNvPr id="29" name="Freeform 29">
               <a:extLst>
                 <a:ext uri="{FF2B5EF4-FFF2-40B4-BE49-F238E27FC236}">
-                  <a16:creationId xmlns:a16="http://schemas.microsoft.com/office/drawing/2014/main" id="{C3C73E32-6971-A621-06EE-6B1D10A57526}"/>
+                  <a16:creationId xmlns:a16="http://schemas.microsoft.com/office/drawing/2014/main" id="{E2451BEB-1372-62F0-3FA9-5FDBEC15722B}"/>
                 </a:ext>
               </a:extLst>
             </p:cNvPr>
@@ -5341,7 +6663,7 @@
             <p:cNvPr id="30" name="TextBox 30">
               <a:extLst>
                 <a:ext uri="{FF2B5EF4-FFF2-40B4-BE49-F238E27FC236}">
-                  <a16:creationId xmlns:a16="http://schemas.microsoft.com/office/drawing/2014/main" id="{8CE27191-3499-5021-853A-9A84DE72EA9B}"/>
+                  <a16:creationId xmlns:a16="http://schemas.microsoft.com/office/drawing/2014/main" id="{ECA28851-49C4-4FD5-C1BC-7FE85204E1B1}"/>
                 </a:ext>
               </a:extLst>
             </p:cNvPr>
@@ -5373,222 +6695,12 @@
           </p:txBody>
         </p:sp>
       </p:grpSp>
-      <p:sp>
-        <p:nvSpPr>
-          <p:cNvPr id="34" name="TextBox 33">
-            <a:extLst>
-              <a:ext uri="{FF2B5EF4-FFF2-40B4-BE49-F238E27FC236}">
-                <a16:creationId xmlns:a16="http://schemas.microsoft.com/office/drawing/2014/main" id="{0496C35E-B0D4-0F3C-C4FA-59526D542F27}"/>
-              </a:ext>
-            </a:extLst>
-          </p:cNvPr>
-          <p:cNvSpPr txBox="1"/>
-          <p:nvPr/>
-        </p:nvSpPr>
-        <p:spPr>
-          <a:xfrm>
-            <a:off x="1104903" y="2590053"/>
-            <a:ext cx="15354298" cy="5710794"/>
-          </a:xfrm>
-          <a:prstGeom prst="rect">
-            <a:avLst/>
-          </a:prstGeom>
-          <a:noFill/>
-        </p:spPr>
-        <p:txBody>
-          <a:bodyPr wrap="square" rtlCol="0">
-            <a:spAutoFit/>
-          </a:bodyPr>
-          <a:lstStyle/>
-          <a:p>
-            <a:pPr marL="342900" indent="-342900" algn="just">
-              <a:lnSpc>
-                <a:spcPct val="120000"/>
-              </a:lnSpc>
-              <a:buFont typeface="System Font Regular"/>
-              <a:buChar char="⎯"/>
-            </a:pPr>
-            <a:r>
-              <a:rPr lang="en-US" sz="2600" spc="-64">
-                <a:solidFill>
-                  <a:srgbClr val="002250"/>
-                </a:solidFill>
-                <a:latin typeface="Adobe Clean UX" panose="020B0503020404020204" pitchFamily="34" charset="0"/>
-              </a:rPr>
-              <a:t>The results of trained models are very low:</a:t>
-            </a:r>
-          </a:p>
-          <a:p>
-            <a:pPr marL="342900" indent="-342900" algn="just">
-              <a:lnSpc>
-                <a:spcPct val="120000"/>
-              </a:lnSpc>
-              <a:buFont typeface="System Font Regular"/>
-              <a:buChar char="⎯"/>
-            </a:pPr>
-            <a:endParaRPr lang="en-US" sz="2600" spc="-64">
-              <a:solidFill>
-                <a:srgbClr val="002250"/>
-              </a:solidFill>
-              <a:latin typeface="Adobe Clean UX" panose="020B0503020404020204" pitchFamily="34" charset="0"/>
-            </a:endParaRPr>
-          </a:p>
-          <a:p>
-            <a:pPr marL="342900" indent="-342900" algn="just">
-              <a:lnSpc>
-                <a:spcPct val="120000"/>
-              </a:lnSpc>
-              <a:buFont typeface="System Font Regular"/>
-              <a:buChar char="⎯"/>
-            </a:pPr>
-            <a:endParaRPr lang="en-US" sz="2600" spc="-64">
-              <a:solidFill>
-                <a:srgbClr val="002250"/>
-              </a:solidFill>
-              <a:latin typeface="Adobe Clean UX" panose="020B0503020404020204" pitchFamily="34" charset="0"/>
-            </a:endParaRPr>
-          </a:p>
-          <a:p>
-            <a:pPr algn="just">
-              <a:lnSpc>
-                <a:spcPct val="120000"/>
-              </a:lnSpc>
-            </a:pPr>
-            <a:endParaRPr lang="en-US" sz="2600" spc="-64">
-              <a:solidFill>
-                <a:srgbClr val="002250"/>
-              </a:solidFill>
-              <a:latin typeface="Adobe Clean UX" panose="020B0503020404020204" pitchFamily="34" charset="0"/>
-            </a:endParaRPr>
-          </a:p>
-          <a:p>
-            <a:pPr algn="just">
-              <a:lnSpc>
-                <a:spcPct val="120000"/>
-              </a:lnSpc>
-            </a:pPr>
-            <a:endParaRPr lang="en-US" sz="2600" spc="-64">
-              <a:solidFill>
-                <a:srgbClr val="002250"/>
-              </a:solidFill>
-              <a:latin typeface="Adobe Clean UX" panose="020B0503020404020204" pitchFamily="34" charset="0"/>
-            </a:endParaRPr>
-          </a:p>
-          <a:p>
-            <a:pPr algn="just">
-              <a:lnSpc>
-                <a:spcPct val="120000"/>
-              </a:lnSpc>
-            </a:pPr>
-            <a:endParaRPr lang="en-US" sz="2600" spc="-64">
-              <a:solidFill>
-                <a:srgbClr val="002250"/>
-              </a:solidFill>
-              <a:latin typeface="Adobe Clean UX" panose="020B0503020404020204" pitchFamily="34" charset="0"/>
-            </a:endParaRPr>
-          </a:p>
-          <a:p>
-            <a:pPr algn="just">
-              <a:lnSpc>
-                <a:spcPct val="120000"/>
-              </a:lnSpc>
-            </a:pPr>
-            <a:endParaRPr lang="en-US" sz="2600" spc="-64">
-              <a:solidFill>
-                <a:srgbClr val="002250"/>
-              </a:solidFill>
-              <a:latin typeface="Adobe Clean UX" panose="020B0503020404020204" pitchFamily="34" charset="0"/>
-            </a:endParaRPr>
-          </a:p>
-          <a:p>
-            <a:pPr algn="just">
-              <a:lnSpc>
-                <a:spcPct val="120000"/>
-              </a:lnSpc>
-            </a:pPr>
-            <a:endParaRPr lang="en-VN" sz="2400" spc="-64">
-              <a:solidFill>
-                <a:srgbClr val="002250"/>
-              </a:solidFill>
-              <a:latin typeface="Gotham Bold"/>
-              <a:cs typeface="Gotham Bold"/>
-            </a:endParaRPr>
-          </a:p>
-          <a:p>
-            <a:pPr marL="342900" indent="-342900" algn="just">
-              <a:lnSpc>
-                <a:spcPct val="120000"/>
-              </a:lnSpc>
-              <a:buFont typeface="System Font Regular"/>
-              <a:buChar char="⎯"/>
-            </a:pPr>
-            <a:endParaRPr lang="en-US" sz="2600" spc="-64">
-              <a:solidFill>
-                <a:srgbClr val="002250"/>
-              </a:solidFill>
-              <a:latin typeface="Adobe Clean UX" panose="020B0503020404020204" pitchFamily="34" charset="0"/>
-            </a:endParaRPr>
-          </a:p>
-          <a:p>
-            <a:pPr marL="342900" indent="-342900" algn="just">
-              <a:lnSpc>
-                <a:spcPct val="120000"/>
-              </a:lnSpc>
-              <a:buFont typeface="System Font Regular"/>
-              <a:buChar char="⎯"/>
-            </a:pPr>
-            <a:r>
-              <a:rPr lang="en-US" sz="2600" spc="-64">
-                <a:solidFill>
-                  <a:srgbClr val="002250"/>
-                </a:solidFill>
-                <a:latin typeface="Adobe Clean UX" panose="020B0503020404020204" pitchFamily="34" charset="0"/>
-              </a:rPr>
-              <a:t>Possible cause: Dataset too small overall (240 epochs total) </a:t>
-            </a:r>
-          </a:p>
-          <a:p>
-            <a:pPr marL="342900" indent="-342900" algn="just">
-              <a:lnSpc>
-                <a:spcPct val="120000"/>
-              </a:lnSpc>
-              <a:buFont typeface="System Font Regular"/>
-              <a:buChar char="⎯"/>
-            </a:pPr>
-            <a:r>
-              <a:rPr lang="en-US" sz="2600" spc="-64">
-                <a:solidFill>
-                  <a:srgbClr val="002250"/>
-                </a:solidFill>
-                <a:latin typeface="Adobe Clean UX" panose="020B0503020404020204" pitchFamily="34" charset="0"/>
-              </a:rPr>
-              <a:t>Next we will head into possible solutions</a:t>
-            </a:r>
-          </a:p>
-          <a:p>
-            <a:pPr marL="800100" lvl="1" indent="-342900" algn="just">
-              <a:lnSpc>
-                <a:spcPct val="120000"/>
-              </a:lnSpc>
-              <a:buFont typeface="System Font Regular"/>
-              <a:buChar char="⎯"/>
-            </a:pPr>
-            <a:endParaRPr lang="en-US" sz="2300" spc="-64">
-              <a:solidFill>
-                <a:srgbClr val="002250"/>
-              </a:solidFill>
-              <a:latin typeface="Gotham Bold"/>
-              <a:cs typeface="Gotham Bold"/>
-            </a:endParaRPr>
-          </a:p>
-        </p:txBody>
-      </p:sp>
       <p:pic>
         <p:nvPicPr>
           <p:cNvPr id="41" name="Picture 40">
             <a:extLst>
               <a:ext uri="{FF2B5EF4-FFF2-40B4-BE49-F238E27FC236}">
-                <a16:creationId xmlns:a16="http://schemas.microsoft.com/office/drawing/2014/main" id="{115280A8-CBED-5766-233D-D7942CE06004}"/>
+                <a16:creationId xmlns:a16="http://schemas.microsoft.com/office/drawing/2014/main" id="{C1880C31-71C0-EBCE-6BAE-66F327970F19}"/>
               </a:ext>
             </a:extLst>
           </p:cNvPr>
@@ -5598,7 +6710,7 @@
           <p:nvPr/>
         </p:nvPicPr>
         <p:blipFill>
-          <a:blip r:embed="rId2">
+          <a:blip r:embed="rId3">
             <a:extLst>
               <a:ext uri="{28A0092B-C50C-407E-A947-70E740481C1C}">
                 <a14:useLocalDpi xmlns:a14="http://schemas.microsoft.com/office/drawing/2010/main" val="0"/>
@@ -5619,12 +6731,215 @@
           </a:prstGeom>
         </p:spPr>
       </p:pic>
+      <p:sp>
+        <p:nvSpPr>
+          <p:cNvPr id="4" name="TextBox 3">
+            <a:extLst>
+              <a:ext uri="{FF2B5EF4-FFF2-40B4-BE49-F238E27FC236}">
+                <a16:creationId xmlns:a16="http://schemas.microsoft.com/office/drawing/2014/main" id="{30BFB57B-5820-CED8-FC6D-D45125A5C4E5}"/>
+              </a:ext>
+            </a:extLst>
+          </p:cNvPr>
+          <p:cNvSpPr txBox="1"/>
+          <p:nvPr/>
+        </p:nvSpPr>
+        <p:spPr>
+          <a:xfrm>
+            <a:off x="1730872" y="2400190"/>
+            <a:ext cx="9144000" cy="667234"/>
+          </a:xfrm>
+          <a:prstGeom prst="rect">
+            <a:avLst/>
+          </a:prstGeom>
+          <a:noFill/>
+        </p:spPr>
+        <p:txBody>
+          <a:bodyPr wrap="square">
+            <a:spAutoFit/>
+          </a:bodyPr>
+          <a:lstStyle/>
+          <a:p>
+            <a:pPr marL="0" lvl="0" indent="0" algn="l">
+              <a:lnSpc>
+                <a:spcPts val="4601"/>
+              </a:lnSpc>
+            </a:pPr>
+            <a:r>
+              <a:rPr lang="en-US" sz="3200" b="1" spc="-77">
+                <a:solidFill>
+                  <a:srgbClr val="002150"/>
+                </a:solidFill>
+                <a:latin typeface="League Spartan SemiBold" pitchFamily="2" charset="77"/>
+                <a:ea typeface="League Spartan"/>
+                <a:cs typeface="League Spartan"/>
+                <a:sym typeface="League Spartan"/>
+              </a:rPr>
+              <a:t>1. Model training </a:t>
+            </a:r>
+            <a:r>
+              <a:rPr lang="en-US" sz="3200" b="1" spc="-77" baseline="30000">
+                <a:solidFill>
+                  <a:srgbClr val="002150"/>
+                </a:solidFill>
+                <a:latin typeface="League Spartan SemiBold" pitchFamily="2" charset="77"/>
+                <a:ea typeface="League Spartan"/>
+                <a:cs typeface="League Spartan"/>
+                <a:sym typeface="League Spartan"/>
+              </a:rPr>
+              <a:t>[STP7]</a:t>
+            </a:r>
+            <a:r>
+              <a:rPr lang="en-US" sz="3200" b="1" spc="-77">
+                <a:solidFill>
+                  <a:srgbClr val="002150"/>
+                </a:solidFill>
+                <a:latin typeface="League Spartan SemiBold" pitchFamily="2" charset="77"/>
+                <a:ea typeface="League Spartan"/>
+                <a:cs typeface="League Spartan"/>
+                <a:sym typeface="League Spartan"/>
+              </a:rPr>
+              <a:t> – 100%</a:t>
+            </a:r>
+            <a:r>
+              <a:rPr lang="en-US" sz="3200" b="1" spc="-77" baseline="30000">
+                <a:solidFill>
+                  <a:srgbClr val="002150"/>
+                </a:solidFill>
+                <a:latin typeface="League Spartan SemiBold" pitchFamily="2" charset="77"/>
+                <a:ea typeface="League Spartan"/>
+                <a:cs typeface="League Spartan"/>
+                <a:sym typeface="League Spartan"/>
+              </a:rPr>
+              <a:t> </a:t>
+            </a:r>
+          </a:p>
+        </p:txBody>
+      </p:sp>
+      <p:sp>
+        <p:nvSpPr>
+          <p:cNvPr id="8" name="TextBox 7">
+            <a:extLst>
+              <a:ext uri="{FF2B5EF4-FFF2-40B4-BE49-F238E27FC236}">
+                <a16:creationId xmlns:a16="http://schemas.microsoft.com/office/drawing/2014/main" id="{B43FFE54-8368-6C5D-1764-651C516AF25E}"/>
+              </a:ext>
+            </a:extLst>
+          </p:cNvPr>
+          <p:cNvSpPr txBox="1"/>
+          <p:nvPr/>
+        </p:nvSpPr>
+        <p:spPr>
+          <a:xfrm>
+            <a:off x="1730871" y="3361411"/>
+            <a:ext cx="15718925" cy="3778920"/>
+          </a:xfrm>
+          <a:prstGeom prst="rect">
+            <a:avLst/>
+          </a:prstGeom>
+          <a:noFill/>
+        </p:spPr>
+        <p:txBody>
+          <a:bodyPr wrap="square" rtlCol="0">
+            <a:spAutoFit/>
+          </a:bodyPr>
+          <a:lstStyle/>
+          <a:p>
+            <a:pPr>
+              <a:lnSpc>
+                <a:spcPct val="120000"/>
+              </a:lnSpc>
+            </a:pPr>
+            <a:r>
+              <a:rPr lang="en-US" sz="2000" b="1" spc="-64">
+                <a:solidFill>
+                  <a:srgbClr val="002250"/>
+                </a:solidFill>
+                <a:latin typeface="Adobe Clean UX" panose="020B0503020404020204" pitchFamily="34" charset="0"/>
+              </a:rPr>
+              <a:t>STRATEGY 1</a:t>
+            </a:r>
+          </a:p>
+          <a:p>
+            <a:pPr>
+              <a:lnSpc>
+                <a:spcPct val="120000"/>
+              </a:lnSpc>
+            </a:pPr>
+            <a:r>
+              <a:rPr lang="en-US" sz="2600" b="1" spc="-64">
+                <a:solidFill>
+                  <a:srgbClr val="002250"/>
+                </a:solidFill>
+                <a:latin typeface="Adobe Clean UX" panose="020B0503020404020204" pitchFamily="34" charset="0"/>
+              </a:rPr>
+              <a:t>Classical ML on MIMED dataset</a:t>
+            </a:r>
+          </a:p>
+          <a:p>
+            <a:pPr>
+              <a:lnSpc>
+                <a:spcPct val="120000"/>
+              </a:lnSpc>
+            </a:pPr>
+            <a:endParaRPr lang="en-US" sz="2600" spc="-64">
+              <a:solidFill>
+                <a:srgbClr val="002250"/>
+              </a:solidFill>
+              <a:latin typeface="Adobe Clean UX" panose="020B0503020404020204" pitchFamily="34" charset="0"/>
+            </a:endParaRPr>
+          </a:p>
+          <a:p>
+            <a:pPr>
+              <a:lnSpc>
+                <a:spcPct val="120000"/>
+              </a:lnSpc>
+            </a:pPr>
+            <a:r>
+              <a:rPr lang="en-US" sz="2600" spc="-64">
+                <a:solidFill>
+                  <a:srgbClr val="002250"/>
+                </a:solidFill>
+                <a:latin typeface="Adobe Clean UX" panose="020B0503020404020204" pitchFamily="34" charset="0"/>
+              </a:rPr>
+              <a:t>- Initial approach using CSP (Common Spatial Pattern) with classical classifiers. MIMED was chosen as the primary dataset because it was recorded on the EMOTIV Epoc X. </a:t>
+            </a:r>
+          </a:p>
+          <a:p>
+            <a:pPr>
+              <a:lnSpc>
+                <a:spcPct val="120000"/>
+              </a:lnSpc>
+            </a:pPr>
+            <a:r>
+              <a:rPr lang="en-US" sz="2600" spc="-64">
+                <a:solidFill>
+                  <a:srgbClr val="002250"/>
+                </a:solidFill>
+                <a:latin typeface="Adobe Clean UX" panose="020B0503020404020204" pitchFamily="34" charset="0"/>
+              </a:rPr>
+              <a:t>- However, the dataset suffers from very few trials per subject (~8), which causes unstable CSP covariance estimation and poor generalization.</a:t>
+            </a:r>
+          </a:p>
+          <a:p>
+            <a:pPr>
+              <a:lnSpc>
+                <a:spcPct val="120000"/>
+              </a:lnSpc>
+            </a:pPr>
+            <a:endParaRPr lang="en-US" sz="2600" spc="-64">
+              <a:solidFill>
+                <a:srgbClr val="002250"/>
+              </a:solidFill>
+              <a:latin typeface="Adobe Clean UX" panose="020B0503020404020204" pitchFamily="34" charset="0"/>
+            </a:endParaRPr>
+          </a:p>
+        </p:txBody>
+      </p:sp>
       <p:graphicFrame>
         <p:nvGraphicFramePr>
-          <p:cNvPr id="2" name="Table 1">
+          <p:cNvPr id="11" name="Table 10">
             <a:extLst>
               <a:ext uri="{FF2B5EF4-FFF2-40B4-BE49-F238E27FC236}">
-                <a16:creationId xmlns:a16="http://schemas.microsoft.com/office/drawing/2014/main" id="{5380B7A5-7761-EF93-FCC0-1FF33B4DF9CF}"/>
+                <a16:creationId xmlns:a16="http://schemas.microsoft.com/office/drawing/2014/main" id="{1FAA362B-720D-B5FD-6BEF-242276BE9138}"/>
               </a:ext>
             </a:extLst>
           </p:cNvPr>
@@ -5634,343 +6949,72 @@
           <p:nvPr>
             <p:extLst>
               <p:ext uri="{D42A27DB-BD31-4B8C-83A1-F6EECF244321}">
-                <p14:modId xmlns:p14="http://schemas.microsoft.com/office/powerpoint/2010/main" val="3850534356"/>
+                <p14:modId xmlns:p14="http://schemas.microsoft.com/office/powerpoint/2010/main" val="3852049445"/>
               </p:ext>
             </p:extLst>
           </p:nvPr>
         </p:nvGraphicFramePr>
         <p:xfrm>
-          <a:off x="1975391" y="3633424"/>
-          <a:ext cx="10591797" cy="2649080"/>
+          <a:off x="1905000" y="7144499"/>
+          <a:ext cx="7936824" cy="2209801"/>
         </p:xfrm>
         <a:graphic>
           <a:graphicData uri="http://schemas.openxmlformats.org/drawingml/2006/table">
             <a:tbl>
-              <a:tblPr/>
+              <a:tblPr firstRow="1" bandRow="1">
+                <a:tableStyleId>{2D5ABB26-0587-4C30-8999-92F81FD0307C}</a:tableStyleId>
+              </a:tblPr>
               <a:tblGrid>
-                <a:gridCol w="2743200">
+                <a:gridCol w="1890942">
                   <a:extLst>
                     <a:ext uri="{9D8B030D-6E8A-4147-A177-3AD203B41FA5}">
-                      <a16:colId xmlns:a16="http://schemas.microsoft.com/office/drawing/2014/main" val="1706675086"/>
+                      <a16:colId xmlns:a16="http://schemas.microsoft.com/office/drawing/2014/main" val="1333062104"/>
                     </a:ext>
                   </a:extLst>
                 </a:gridCol>
-                <a:gridCol w="2057400">
+                <a:gridCol w="1447800">
                   <a:extLst>
                     <a:ext uri="{9D8B030D-6E8A-4147-A177-3AD203B41FA5}">
-                      <a16:colId xmlns:a16="http://schemas.microsoft.com/office/drawing/2014/main" val="1319592355"/>
+                      <a16:colId xmlns:a16="http://schemas.microsoft.com/office/drawing/2014/main" val="3442373815"/>
                     </a:ext>
                   </a:extLst>
                 </a:gridCol>
-                <a:gridCol w="3910998">
+                <a:gridCol w="2514600">
                   <a:extLst>
                     <a:ext uri="{9D8B030D-6E8A-4147-A177-3AD203B41FA5}">
-                      <a16:colId xmlns:a16="http://schemas.microsoft.com/office/drawing/2014/main" val="4281314773"/>
+                      <a16:colId xmlns:a16="http://schemas.microsoft.com/office/drawing/2014/main" val="2715292797"/>
                     </a:ext>
                   </a:extLst>
                 </a:gridCol>
-                <a:gridCol w="1880199">
+                <a:gridCol w="2083482">
                   <a:extLst>
                     <a:ext uri="{9D8B030D-6E8A-4147-A177-3AD203B41FA5}">
-                      <a16:colId xmlns:a16="http://schemas.microsoft.com/office/drawing/2014/main" val="2032673314"/>
+                      <a16:colId xmlns:a16="http://schemas.microsoft.com/office/drawing/2014/main" val="2411584792"/>
                     </a:ext>
                   </a:extLst>
                 </a:gridCol>
               </a:tblGrid>
-              <a:tr h="662270">
+              <a:tr h="492139">
                 <a:tc>
                   <a:txBody>
                     <a:bodyPr/>
                     <a:lstStyle/>
                     <a:p>
-                      <a:pPr algn="ctr"/>
+                      <a:pPr algn="l"/>
                       <a:r>
-                        <a:rPr lang="en-US" sz="2600">
-                          <a:effectLst/>
-                          <a:latin typeface="Adobe Clean UX" panose="020B0503020404020204" pitchFamily="34" charset="0"/>
+                        <a:rPr lang="en-VN" sz="2000" b="1">
+                          <a:solidFill>
+                            <a:srgbClr val="002150"/>
+                          </a:solidFill>
                         </a:rPr>
                         <a:t>Model</a:t>
                       </a:r>
                     </a:p>
                   </a:txBody>
-                  <a:tcPr marL="126218" marR="126218" marT="126218" marB="126218" anchor="ctr">
-                    <a:lnL w="9525" cap="flat" cmpd="sng" algn="ctr">
+                  <a:tcPr anchor="ctr">
+                    <a:lnB w="12700" cap="flat" cmpd="sng" algn="ctr">
                       <a:solidFill>
-                        <a:srgbClr val="DDDDDD"/>
-                      </a:solidFill>
-                      <a:prstDash val="solid"/>
-                      <a:round/>
-                      <a:headEnd type="none" w="med" len="med"/>
-                      <a:tailEnd type="none" w="med" len="med"/>
-                    </a:lnL>
-                    <a:lnR w="9525" cap="flat" cmpd="sng" algn="ctr">
-                      <a:solidFill>
-                        <a:srgbClr val="DDDDDD"/>
-                      </a:solidFill>
-                      <a:prstDash val="solid"/>
-                      <a:round/>
-                      <a:headEnd type="none" w="med" len="med"/>
-                      <a:tailEnd type="none" w="med" len="med"/>
-                    </a:lnR>
-                    <a:lnT w="9525" cap="flat" cmpd="sng" algn="ctr">
-                      <a:solidFill>
-                        <a:srgbClr val="DDDDDD"/>
-                      </a:solidFill>
-                      <a:prstDash val="solid"/>
-                      <a:round/>
-                      <a:headEnd type="none" w="med" len="med"/>
-                      <a:tailEnd type="none" w="med" len="med"/>
-                    </a:lnT>
-                    <a:lnB w="9525" cap="flat" cmpd="sng" algn="ctr">
-                      <a:solidFill>
-                        <a:srgbClr val="DDDDDD"/>
-                      </a:solidFill>
-                      <a:prstDash val="solid"/>
-                      <a:round/>
-                      <a:headEnd type="none" w="med" len="med"/>
-                      <a:tailEnd type="none" w="med" len="med"/>
-                    </a:lnB>
-                    <a:solidFill>
-                      <a:schemeClr val="tx2">
-                        <a:lumMod val="60000"/>
-                        <a:lumOff val="40000"/>
-                      </a:schemeClr>
-                    </a:solidFill>
-                  </a:tcPr>
-                </a:tc>
-                <a:tc>
-                  <a:txBody>
-                    <a:bodyPr/>
-                    <a:lstStyle/>
-                    <a:p>
-                      <a:pPr algn="ctr"/>
-                      <a:r>
-                        <a:rPr lang="en-US" sz="2600">
-                          <a:effectLst/>
-                          <a:latin typeface="Adobe Clean UX" panose="020B0503020404020204" pitchFamily="34" charset="0"/>
-                        </a:rPr>
-                        <a:t>Dataset</a:t>
-                      </a:r>
-                    </a:p>
-                  </a:txBody>
-                  <a:tcPr marL="126218" marR="126218" marT="126218" marB="126218" anchor="ctr">
-                    <a:lnL w="9525" cap="flat" cmpd="sng" algn="ctr">
-                      <a:solidFill>
-                        <a:srgbClr val="DDDDDD"/>
-                      </a:solidFill>
-                      <a:prstDash val="solid"/>
-                      <a:round/>
-                      <a:headEnd type="none" w="med" len="med"/>
-                      <a:tailEnd type="none" w="med" len="med"/>
-                    </a:lnL>
-                    <a:lnR w="9525" cap="flat" cmpd="sng" algn="ctr">
-                      <a:solidFill>
-                        <a:srgbClr val="DDDDDD"/>
-                      </a:solidFill>
-                      <a:prstDash val="solid"/>
-                      <a:round/>
-                      <a:headEnd type="none" w="med" len="med"/>
-                      <a:tailEnd type="none" w="med" len="med"/>
-                    </a:lnR>
-                    <a:lnT w="9525" cap="flat" cmpd="sng" algn="ctr">
-                      <a:solidFill>
-                        <a:srgbClr val="DDDDDD"/>
-                      </a:solidFill>
-                      <a:prstDash val="solid"/>
-                      <a:round/>
-                      <a:headEnd type="none" w="med" len="med"/>
-                      <a:tailEnd type="none" w="med" len="med"/>
-                    </a:lnT>
-                    <a:lnB w="9525" cap="flat" cmpd="sng" algn="ctr">
-                      <a:solidFill>
-                        <a:srgbClr val="DDDDDD"/>
-                      </a:solidFill>
-                      <a:prstDash val="solid"/>
-                      <a:round/>
-                      <a:headEnd type="none" w="med" len="med"/>
-                      <a:tailEnd type="none" w="med" len="med"/>
-                    </a:lnB>
-                    <a:solidFill>
-                      <a:schemeClr val="tx2">
-                        <a:lumMod val="60000"/>
-                        <a:lumOff val="40000"/>
-                      </a:schemeClr>
-                    </a:solidFill>
-                  </a:tcPr>
-                </a:tc>
-                <a:tc>
-                  <a:txBody>
-                    <a:bodyPr/>
-                    <a:lstStyle/>
-                    <a:p>
-                      <a:pPr algn="ctr"/>
-                      <a:r>
-                        <a:rPr lang="en-US" sz="2600">
-                          <a:effectLst/>
-                          <a:latin typeface="Adobe Clean UX" panose="020B0503020404020204" pitchFamily="34" charset="0"/>
-                        </a:rPr>
-                        <a:t>Evaluation</a:t>
-                      </a:r>
-                    </a:p>
-                  </a:txBody>
-                  <a:tcPr marL="126218" marR="126218" marT="126218" marB="126218" anchor="ctr">
-                    <a:lnL w="9525" cap="flat" cmpd="sng" algn="ctr">
-                      <a:solidFill>
-                        <a:srgbClr val="DDDDDD"/>
-                      </a:solidFill>
-                      <a:prstDash val="solid"/>
-                      <a:round/>
-                      <a:headEnd type="none" w="med" len="med"/>
-                      <a:tailEnd type="none" w="med" len="med"/>
-                    </a:lnL>
-                    <a:lnR w="9525" cap="flat" cmpd="sng" algn="ctr">
-                      <a:solidFill>
-                        <a:srgbClr val="DDDDDD"/>
-                      </a:solidFill>
-                      <a:prstDash val="solid"/>
-                      <a:round/>
-                      <a:headEnd type="none" w="med" len="med"/>
-                      <a:tailEnd type="none" w="med" len="med"/>
-                    </a:lnR>
-                    <a:lnT w="9525" cap="flat" cmpd="sng" algn="ctr">
-                      <a:solidFill>
-                        <a:srgbClr val="DDDDDD"/>
-                      </a:solidFill>
-                      <a:prstDash val="solid"/>
-                      <a:round/>
-                      <a:headEnd type="none" w="med" len="med"/>
-                      <a:tailEnd type="none" w="med" len="med"/>
-                    </a:lnT>
-                    <a:lnB w="9525" cap="flat" cmpd="sng" algn="ctr">
-                      <a:solidFill>
-                        <a:srgbClr val="DDDDDD"/>
-                      </a:solidFill>
-                      <a:prstDash val="solid"/>
-                      <a:round/>
-                      <a:headEnd type="none" w="med" len="med"/>
-                      <a:tailEnd type="none" w="med" len="med"/>
-                    </a:lnB>
-                    <a:solidFill>
-                      <a:schemeClr val="tx2">
-                        <a:lumMod val="60000"/>
-                        <a:lumOff val="40000"/>
-                      </a:schemeClr>
-                    </a:solidFill>
-                  </a:tcPr>
-                </a:tc>
-                <a:tc>
-                  <a:txBody>
-                    <a:bodyPr/>
-                    <a:lstStyle/>
-                    <a:p>
-                      <a:pPr algn="ctr"/>
-                      <a:r>
-                        <a:rPr lang="en-US" sz="2600">
-                          <a:effectLst/>
-                          <a:latin typeface="Adobe Clean UX" panose="020B0503020404020204" pitchFamily="34" charset="0"/>
-                        </a:rPr>
-                        <a:t>Accuracy</a:t>
-                      </a:r>
-                    </a:p>
-                  </a:txBody>
-                  <a:tcPr marL="126218" marR="126218" marT="126218" marB="126218" anchor="ctr">
-                    <a:lnL w="9525" cap="flat" cmpd="sng" algn="ctr">
-                      <a:solidFill>
-                        <a:srgbClr val="DDDDDD"/>
-                      </a:solidFill>
-                      <a:prstDash val="solid"/>
-                      <a:round/>
-                      <a:headEnd type="none" w="med" len="med"/>
-                      <a:tailEnd type="none" w="med" len="med"/>
-                    </a:lnL>
-                    <a:lnR w="9525" cap="flat" cmpd="sng" algn="ctr">
-                      <a:solidFill>
-                        <a:srgbClr val="DDDDDD"/>
-                      </a:solidFill>
-                      <a:prstDash val="solid"/>
-                      <a:round/>
-                      <a:headEnd type="none" w="med" len="med"/>
-                      <a:tailEnd type="none" w="med" len="med"/>
-                    </a:lnR>
-                    <a:lnT w="9525" cap="flat" cmpd="sng" algn="ctr">
-                      <a:solidFill>
-                        <a:srgbClr val="DDDDDD"/>
-                      </a:solidFill>
-                      <a:prstDash val="solid"/>
-                      <a:round/>
-                      <a:headEnd type="none" w="med" len="med"/>
-                      <a:tailEnd type="none" w="med" len="med"/>
-                    </a:lnT>
-                    <a:lnB w="9525" cap="flat" cmpd="sng" algn="ctr">
-                      <a:solidFill>
-                        <a:srgbClr val="DDDDDD"/>
-                      </a:solidFill>
-                      <a:prstDash val="solid"/>
-                      <a:round/>
-                      <a:headEnd type="none" w="med" len="med"/>
-                      <a:tailEnd type="none" w="med" len="med"/>
-                    </a:lnB>
-                    <a:solidFill>
-                      <a:schemeClr val="tx2">
-                        <a:lumMod val="60000"/>
-                        <a:lumOff val="40000"/>
-                      </a:schemeClr>
-                    </a:solidFill>
-                  </a:tcPr>
-                </a:tc>
-                <a:extLst>
-                  <a:ext uri="{0D108BD9-81ED-4DB2-BD59-A6C34878D82A}">
-                    <a16:rowId xmlns:a16="http://schemas.microsoft.com/office/drawing/2014/main" val="1451610095"/>
-                  </a:ext>
-                </a:extLst>
-              </a:tr>
-              <a:tr h="662270">
-                <a:tc>
-                  <a:txBody>
-                    <a:bodyPr/>
-                    <a:lstStyle/>
-                    <a:p>
-                      <a:pPr algn="ctr"/>
-                      <a:r>
-                        <a:rPr lang="en-US" sz="2600">
-                          <a:effectLst/>
-                          <a:latin typeface="Adobe Clean UX" panose="020B0503020404020204" pitchFamily="34" charset="0"/>
-                        </a:rPr>
-                        <a:t>CSP + LDA</a:t>
-                      </a:r>
-                    </a:p>
-                  </a:txBody>
-                  <a:tcPr marL="126218" marR="126218" marT="126218" marB="126218" anchor="ctr">
-                    <a:lnL w="9525" cap="flat" cmpd="sng" algn="ctr">
-                      <a:solidFill>
-                        <a:srgbClr val="DDDDDD"/>
-                      </a:solidFill>
-                      <a:prstDash val="solid"/>
-                      <a:round/>
-                      <a:headEnd type="none" w="med" len="med"/>
-                      <a:tailEnd type="none" w="med" len="med"/>
-                    </a:lnL>
-                    <a:lnR w="9525" cap="flat" cmpd="sng" algn="ctr">
-                      <a:solidFill>
-                        <a:srgbClr val="DDDDDD"/>
-                      </a:solidFill>
-                      <a:prstDash val="solid"/>
-                      <a:round/>
-                      <a:headEnd type="none" w="med" len="med"/>
-                      <a:tailEnd type="none" w="med" len="med"/>
-                    </a:lnR>
-                    <a:lnT w="9525" cap="flat" cmpd="sng" algn="ctr">
-                      <a:solidFill>
-                        <a:srgbClr val="DDDDDD"/>
-                      </a:solidFill>
-                      <a:prstDash val="solid"/>
-                      <a:round/>
-                      <a:headEnd type="none" w="med" len="med"/>
-                      <a:tailEnd type="none" w="med" len="med"/>
-                    </a:lnT>
-                    <a:lnB w="9525" cap="flat" cmpd="sng" algn="ctr">
-                      <a:solidFill>
-                        <a:srgbClr val="DDDDDD"/>
+                        <a:schemeClr val="tx1"/>
                       </a:solidFill>
                       <a:prstDash val="solid"/>
                       <a:round/>
@@ -5985,47 +7029,21 @@
                     <a:bodyPr/>
                     <a:lstStyle/>
                     <a:p>
-                      <a:pPr algn="ctr"/>
+                      <a:pPr algn="l"/>
                       <a:r>
-                        <a:rPr lang="en-US" sz="2600">
-                          <a:effectLst/>
-                          <a:latin typeface="Adobe Clean UX" panose="020B0503020404020204" pitchFamily="34" charset="0"/>
+                        <a:rPr lang="en-VN" sz="2000" b="1">
+                          <a:solidFill>
+                            <a:srgbClr val="002150"/>
+                          </a:solidFill>
                         </a:rPr>
-                        <a:t>MIMED</a:t>
+                        <a:t>Classes</a:t>
                       </a:r>
                     </a:p>
                   </a:txBody>
-                  <a:tcPr marL="126218" marR="126218" marT="126218" marB="126218" anchor="ctr">
-                    <a:lnL w="9525" cap="flat" cmpd="sng" algn="ctr">
+                  <a:tcPr anchor="ctr">
+                    <a:lnB w="12700" cap="flat" cmpd="sng" algn="ctr">
                       <a:solidFill>
-                        <a:srgbClr val="DDDDDD"/>
-                      </a:solidFill>
-                      <a:prstDash val="solid"/>
-                      <a:round/>
-                      <a:headEnd type="none" w="med" len="med"/>
-                      <a:tailEnd type="none" w="med" len="med"/>
-                    </a:lnL>
-                    <a:lnR w="9525" cap="flat" cmpd="sng" algn="ctr">
-                      <a:solidFill>
-                        <a:srgbClr val="DDDDDD"/>
-                      </a:solidFill>
-                      <a:prstDash val="solid"/>
-                      <a:round/>
-                      <a:headEnd type="none" w="med" len="med"/>
-                      <a:tailEnd type="none" w="med" len="med"/>
-                    </a:lnR>
-                    <a:lnT w="9525" cap="flat" cmpd="sng" algn="ctr">
-                      <a:solidFill>
-                        <a:srgbClr val="DDDDDD"/>
-                      </a:solidFill>
-                      <a:prstDash val="solid"/>
-                      <a:round/>
-                      <a:headEnd type="none" w="med" len="med"/>
-                      <a:tailEnd type="none" w="med" len="med"/>
-                    </a:lnT>
-                    <a:lnB w="9525" cap="flat" cmpd="sng" algn="ctr">
-                      <a:solidFill>
-                        <a:srgbClr val="DDDDDD"/>
+                        <a:schemeClr val="tx1"/>
                       </a:solidFill>
                       <a:prstDash val="solid"/>
                       <a:round/>
@@ -6040,47 +7058,21 @@
                     <a:bodyPr/>
                     <a:lstStyle/>
                     <a:p>
-                      <a:pPr algn="ctr"/>
+                      <a:pPr algn="l"/>
                       <a:r>
-                        <a:rPr lang="en-US" sz="2600">
-                          <a:effectLst/>
-                          <a:latin typeface="Adobe Clean UX" panose="020B0503020404020204" pitchFamily="34" charset="0"/>
+                        <a:rPr lang="en-VN" sz="2000" b="1">
+                          <a:solidFill>
+                            <a:srgbClr val="002150"/>
+                          </a:solidFill>
                         </a:rPr>
-                        <a:t>Cross-subject, 5-fold</a:t>
+                        <a:t>Protocol</a:t>
                       </a:r>
                     </a:p>
                   </a:txBody>
-                  <a:tcPr marL="126218" marR="126218" marT="126218" marB="126218" anchor="ctr">
-                    <a:lnL w="9525" cap="flat" cmpd="sng" algn="ctr">
+                  <a:tcPr anchor="ctr">
+                    <a:lnB w="12700" cap="flat" cmpd="sng" algn="ctr">
                       <a:solidFill>
-                        <a:srgbClr val="DDDDDD"/>
-                      </a:solidFill>
-                      <a:prstDash val="solid"/>
-                      <a:round/>
-                      <a:headEnd type="none" w="med" len="med"/>
-                      <a:tailEnd type="none" w="med" len="med"/>
-                    </a:lnL>
-                    <a:lnR w="9525" cap="flat" cmpd="sng" algn="ctr">
-                      <a:solidFill>
-                        <a:srgbClr val="DDDDDD"/>
-                      </a:solidFill>
-                      <a:prstDash val="solid"/>
-                      <a:round/>
-                      <a:headEnd type="none" w="med" len="med"/>
-                      <a:tailEnd type="none" w="med" len="med"/>
-                    </a:lnR>
-                    <a:lnT w="9525" cap="flat" cmpd="sng" algn="ctr">
-                      <a:solidFill>
-                        <a:srgbClr val="DDDDDD"/>
-                      </a:solidFill>
-                      <a:prstDash val="solid"/>
-                      <a:round/>
-                      <a:headEnd type="none" w="med" len="med"/>
-                      <a:tailEnd type="none" w="med" len="med"/>
-                    </a:lnT>
-                    <a:lnB w="9525" cap="flat" cmpd="sng" algn="ctr">
-                      <a:solidFill>
-                        <a:srgbClr val="DDDDDD"/>
+                        <a:schemeClr val="tx1"/>
                       </a:solidFill>
                       <a:prstDash val="solid"/>
                       <a:round/>
@@ -6095,47 +7087,21 @@
                     <a:bodyPr/>
                     <a:lstStyle/>
                     <a:p>
-                      <a:pPr algn="ctr"/>
+                      <a:pPr algn="l"/>
                       <a:r>
-                        <a:rPr lang="en-VN" sz="2600">
-                          <a:effectLst/>
-                          <a:latin typeface="Adobe Clean UX" panose="020B0503020404020204" pitchFamily="34" charset="0"/>
+                        <a:rPr lang="en-VN" sz="2000" b="1">
+                          <a:solidFill>
+                            <a:srgbClr val="002150"/>
+                          </a:solidFill>
                         </a:rPr>
-                        <a:t>52.5%</a:t>
+                        <a:t>Accuracy</a:t>
                       </a:r>
                     </a:p>
                   </a:txBody>
-                  <a:tcPr marL="126218" marR="126218" marT="126218" marB="126218" anchor="ctr">
-                    <a:lnL w="9525" cap="flat" cmpd="sng" algn="ctr">
+                  <a:tcPr anchor="ctr">
+                    <a:lnB w="12700" cap="flat" cmpd="sng" algn="ctr">
                       <a:solidFill>
-                        <a:srgbClr val="DDDDDD"/>
-                      </a:solidFill>
-                      <a:prstDash val="solid"/>
-                      <a:round/>
-                      <a:headEnd type="none" w="med" len="med"/>
-                      <a:tailEnd type="none" w="med" len="med"/>
-                    </a:lnL>
-                    <a:lnR w="9525" cap="flat" cmpd="sng" algn="ctr">
-                      <a:solidFill>
-                        <a:srgbClr val="DDDDDD"/>
-                      </a:solidFill>
-                      <a:prstDash val="solid"/>
-                      <a:round/>
-                      <a:headEnd type="none" w="med" len="med"/>
-                      <a:tailEnd type="none" w="med" len="med"/>
-                    </a:lnR>
-                    <a:lnT w="9525" cap="flat" cmpd="sng" algn="ctr">
-                      <a:solidFill>
-                        <a:srgbClr val="DDDDDD"/>
-                      </a:solidFill>
-                      <a:prstDash val="solid"/>
-                      <a:round/>
-                      <a:headEnd type="none" w="med" len="med"/>
-                      <a:tailEnd type="none" w="med" len="med"/>
-                    </a:lnT>
-                    <a:lnB w="9525" cap="flat" cmpd="sng" algn="ctr">
-                      <a:solidFill>
-                        <a:srgbClr val="DDDDDD"/>
+                        <a:schemeClr val="tx1"/>
                       </a:solidFill>
                       <a:prstDash val="solid"/>
                       <a:round/>
@@ -6147,57 +7113,1097 @@
                 </a:tc>
                 <a:extLst>
                   <a:ext uri="{0D108BD9-81ED-4DB2-BD59-A6C34878D82A}">
-                    <a16:rowId xmlns:a16="http://schemas.microsoft.com/office/drawing/2014/main" val="2076927401"/>
+                    <a16:rowId xmlns:a16="http://schemas.microsoft.com/office/drawing/2014/main" val="3350081796"/>
                   </a:ext>
                 </a:extLst>
               </a:tr>
-              <a:tr h="662270">
+              <a:tr h="572554">
                 <a:tc>
                   <a:txBody>
                     <a:bodyPr/>
                     <a:lstStyle/>
                     <a:p>
-                      <a:pPr algn="ctr"/>
+                      <a:pPr algn="l"/>
                       <a:r>
-                        <a:rPr lang="en-US" sz="2600">
-                          <a:effectLst/>
-                          <a:latin typeface="Adobe Clean UX" panose="020B0503020404020204" pitchFamily="34" charset="0"/>
+                        <a:rPr lang="en-VN">
+                          <a:solidFill>
+                            <a:srgbClr val="002150"/>
+                          </a:solidFill>
                         </a:rPr>
-                        <a:t>CSP + SVM</a:t>
+                        <a:t>CSP + LDA</a:t>
                       </a:r>
                     </a:p>
                   </a:txBody>
-                  <a:tcPr marL="126218" marR="126218" marT="126218" marB="126218" anchor="ctr">
-                    <a:lnL w="9525" cap="flat" cmpd="sng" algn="ctr">
+                  <a:tcPr anchor="ctr">
+                    <a:lnT w="12700" cap="flat" cmpd="sng" algn="ctr">
                       <a:solidFill>
-                        <a:srgbClr val="DDDDDD"/>
-                      </a:solidFill>
-                      <a:prstDash val="solid"/>
-                      <a:round/>
-                      <a:headEnd type="none" w="med" len="med"/>
-                      <a:tailEnd type="none" w="med" len="med"/>
-                    </a:lnL>
-                    <a:lnR w="9525" cap="flat" cmpd="sng" algn="ctr">
-                      <a:solidFill>
-                        <a:srgbClr val="DDDDDD"/>
-                      </a:solidFill>
-                      <a:prstDash val="solid"/>
-                      <a:round/>
-                      <a:headEnd type="none" w="med" len="med"/>
-                      <a:tailEnd type="none" w="med" len="med"/>
-                    </a:lnR>
-                    <a:lnT w="9525" cap="flat" cmpd="sng" algn="ctr">
-                      <a:solidFill>
-                        <a:srgbClr val="DDDDDD"/>
+                        <a:schemeClr val="tx1"/>
                       </a:solidFill>
                       <a:prstDash val="solid"/>
                       <a:round/>
                       <a:headEnd type="none" w="med" len="med"/>
                       <a:tailEnd type="none" w="med" len="med"/>
                     </a:lnT>
-                    <a:lnB w="9525" cap="flat" cmpd="sng" algn="ctr">
+                    <a:lnB w="12700" cap="flat" cmpd="sng" algn="ctr">
                       <a:solidFill>
-                        <a:srgbClr val="DDDDDD"/>
+                        <a:schemeClr val="tx1"/>
+                      </a:solidFill>
+                      <a:prstDash val="solid"/>
+                      <a:round/>
+                      <a:headEnd type="none" w="med" len="med"/>
+                      <a:tailEnd type="none" w="med" len="med"/>
+                    </a:lnB>
+                  </a:tcPr>
+                </a:tc>
+                <a:tc>
+                  <a:txBody>
+                    <a:bodyPr/>
+                    <a:lstStyle/>
+                    <a:p>
+                      <a:pPr algn="l"/>
+                      <a:r>
+                        <a:rPr lang="en-VN">
+                          <a:solidFill>
+                            <a:srgbClr val="002150"/>
+                          </a:solidFill>
+                        </a:rPr>
+                        <a:t>4-class</a:t>
+                      </a:r>
+                    </a:p>
+                  </a:txBody>
+                  <a:tcPr anchor="ctr">
+                    <a:lnT w="12700" cap="flat" cmpd="sng" algn="ctr">
+                      <a:solidFill>
+                        <a:schemeClr val="tx1"/>
+                      </a:solidFill>
+                      <a:prstDash val="solid"/>
+                      <a:round/>
+                      <a:headEnd type="none" w="med" len="med"/>
+                      <a:tailEnd type="none" w="med" len="med"/>
+                    </a:lnT>
+                    <a:lnB w="12700" cap="flat" cmpd="sng" algn="ctr">
+                      <a:solidFill>
+                        <a:schemeClr val="tx1"/>
+                      </a:solidFill>
+                      <a:prstDash val="solid"/>
+                      <a:round/>
+                      <a:headEnd type="none" w="med" len="med"/>
+                      <a:tailEnd type="none" w="med" len="med"/>
+                    </a:lnB>
+                  </a:tcPr>
+                </a:tc>
+                <a:tc>
+                  <a:txBody>
+                    <a:bodyPr/>
+                    <a:lstStyle/>
+                    <a:p>
+                      <a:pPr algn="l"/>
+                      <a:r>
+                        <a:rPr lang="en-US" sz="1800" b="0" i="0" kern="1200">
+                          <a:solidFill>
+                            <a:srgbClr val="002150"/>
+                          </a:solidFill>
+                          <a:effectLst/>
+                          <a:latin typeface="+mn-lt"/>
+                          <a:ea typeface="+mn-ea"/>
+                          <a:cs typeface="+mn-cs"/>
+                        </a:rPr>
+                        <a:t>Cross-subject, 5-fold</a:t>
+                      </a:r>
+                      <a:endParaRPr lang="en-VN">
+                        <a:solidFill>
+                          <a:srgbClr val="002150"/>
+                        </a:solidFill>
+                      </a:endParaRPr>
+                    </a:p>
+                  </a:txBody>
+                  <a:tcPr anchor="ctr">
+                    <a:lnT w="12700" cap="flat" cmpd="sng" algn="ctr">
+                      <a:solidFill>
+                        <a:schemeClr val="tx1"/>
+                      </a:solidFill>
+                      <a:prstDash val="solid"/>
+                      <a:round/>
+                      <a:headEnd type="none" w="med" len="med"/>
+                      <a:tailEnd type="none" w="med" len="med"/>
+                    </a:lnT>
+                    <a:lnB w="12700" cap="flat" cmpd="sng" algn="ctr">
+                      <a:solidFill>
+                        <a:schemeClr val="tx1"/>
+                      </a:solidFill>
+                      <a:prstDash val="solid"/>
+                      <a:round/>
+                      <a:headEnd type="none" w="med" len="med"/>
+                      <a:tailEnd type="none" w="med" len="med"/>
+                    </a:lnB>
+                  </a:tcPr>
+                </a:tc>
+                <a:tc>
+                  <a:txBody>
+                    <a:bodyPr/>
+                    <a:lstStyle/>
+                    <a:p>
+                      <a:pPr algn="l"/>
+                      <a:r>
+                        <a:rPr lang="en-VN" sz="1800" b="0" i="0" kern="1200">
+                          <a:solidFill>
+                            <a:srgbClr val="002150"/>
+                          </a:solidFill>
+                          <a:effectLst/>
+                          <a:latin typeface="+mn-lt"/>
+                          <a:ea typeface="+mn-ea"/>
+                          <a:cs typeface="+mn-cs"/>
+                        </a:rPr>
+                        <a:t>52.5%</a:t>
+                      </a:r>
+                      <a:endParaRPr lang="en-VN">
+                        <a:solidFill>
+                          <a:srgbClr val="002150"/>
+                        </a:solidFill>
+                      </a:endParaRPr>
+                    </a:p>
+                  </a:txBody>
+                  <a:tcPr anchor="ctr">
+                    <a:lnT w="12700" cap="flat" cmpd="sng" algn="ctr">
+                      <a:solidFill>
+                        <a:schemeClr val="tx1"/>
+                      </a:solidFill>
+                      <a:prstDash val="solid"/>
+                      <a:round/>
+                      <a:headEnd type="none" w="med" len="med"/>
+                      <a:tailEnd type="none" w="med" len="med"/>
+                    </a:lnT>
+                    <a:lnB w="12700" cap="flat" cmpd="sng" algn="ctr">
+                      <a:solidFill>
+                        <a:schemeClr val="tx1"/>
+                      </a:solidFill>
+                      <a:prstDash val="solid"/>
+                      <a:round/>
+                      <a:headEnd type="none" w="med" len="med"/>
+                      <a:tailEnd type="none" w="med" len="med"/>
+                    </a:lnB>
+                  </a:tcPr>
+                </a:tc>
+                <a:extLst>
+                  <a:ext uri="{0D108BD9-81ED-4DB2-BD59-A6C34878D82A}">
+                    <a16:rowId xmlns:a16="http://schemas.microsoft.com/office/drawing/2014/main" val="313414534"/>
+                  </a:ext>
+                </a:extLst>
+              </a:tr>
+              <a:tr h="572554">
+                <a:tc>
+                  <a:txBody>
+                    <a:bodyPr/>
+                    <a:lstStyle/>
+                    <a:p>
+                      <a:pPr algn="l"/>
+                      <a:r>
+                        <a:rPr lang="en-VN">
+                          <a:solidFill>
+                            <a:srgbClr val="002150"/>
+                          </a:solidFill>
+                        </a:rPr>
+                        <a:t>CSP + SVM</a:t>
+                      </a:r>
+                    </a:p>
+                  </a:txBody>
+                  <a:tcPr anchor="ctr">
+                    <a:lnT w="12700" cap="flat" cmpd="sng" algn="ctr">
+                      <a:solidFill>
+                        <a:schemeClr val="tx1"/>
+                      </a:solidFill>
+                      <a:prstDash val="solid"/>
+                      <a:round/>
+                      <a:headEnd type="none" w="med" len="med"/>
+                      <a:tailEnd type="none" w="med" len="med"/>
+                    </a:lnT>
+                    <a:lnB w="12700" cap="flat" cmpd="sng" algn="ctr">
+                      <a:solidFill>
+                        <a:schemeClr val="tx1"/>
+                      </a:solidFill>
+                      <a:prstDash val="solid"/>
+                      <a:round/>
+                      <a:headEnd type="none" w="med" len="med"/>
+                      <a:tailEnd type="none" w="med" len="med"/>
+                    </a:lnB>
+                  </a:tcPr>
+                </a:tc>
+                <a:tc>
+                  <a:txBody>
+                    <a:bodyPr/>
+                    <a:lstStyle/>
+                    <a:p>
+                      <a:pPr marL="0" marR="0" lvl="0" indent="0" algn="l" defTabSz="914400" rtl="0" eaLnBrk="1" fontAlgn="auto" latinLnBrk="0" hangingPunct="1">
+                        <a:lnSpc>
+                          <a:spcPct val="100000"/>
+                        </a:lnSpc>
+                        <a:spcBef>
+                          <a:spcPts val="0"/>
+                        </a:spcBef>
+                        <a:spcAft>
+                          <a:spcPts val="0"/>
+                        </a:spcAft>
+                        <a:buClrTx/>
+                        <a:buSzTx/>
+                        <a:buFontTx/>
+                        <a:buNone/>
+                        <a:tabLst/>
+                        <a:defRPr/>
+                      </a:pPr>
+                      <a:r>
+                        <a:rPr lang="en-VN">
+                          <a:solidFill>
+                            <a:srgbClr val="002150"/>
+                          </a:solidFill>
+                        </a:rPr>
+                        <a:t>4-class</a:t>
+                      </a:r>
+                    </a:p>
+                  </a:txBody>
+                  <a:tcPr anchor="ctr">
+                    <a:lnT w="12700" cap="flat" cmpd="sng" algn="ctr">
+                      <a:solidFill>
+                        <a:schemeClr val="tx1"/>
+                      </a:solidFill>
+                      <a:prstDash val="solid"/>
+                      <a:round/>
+                      <a:headEnd type="none" w="med" len="med"/>
+                      <a:tailEnd type="none" w="med" len="med"/>
+                    </a:lnT>
+                    <a:lnB w="12700" cap="flat" cmpd="sng" algn="ctr">
+                      <a:solidFill>
+                        <a:schemeClr val="tx1"/>
+                      </a:solidFill>
+                      <a:prstDash val="solid"/>
+                      <a:round/>
+                      <a:headEnd type="none" w="med" len="med"/>
+                      <a:tailEnd type="none" w="med" len="med"/>
+                    </a:lnB>
+                  </a:tcPr>
+                </a:tc>
+                <a:tc>
+                  <a:txBody>
+                    <a:bodyPr/>
+                    <a:lstStyle/>
+                    <a:p>
+                      <a:pPr algn="l"/>
+                      <a:r>
+                        <a:rPr lang="en-US" sz="1800" b="0" i="0" kern="1200">
+                          <a:solidFill>
+                            <a:srgbClr val="002150"/>
+                          </a:solidFill>
+                          <a:effectLst/>
+                          <a:latin typeface="+mn-lt"/>
+                          <a:ea typeface="+mn-ea"/>
+                          <a:cs typeface="+mn-cs"/>
+                        </a:rPr>
+                        <a:t>Cross-subject, 5-fold</a:t>
+                      </a:r>
+                      <a:endParaRPr lang="en-VN">
+                        <a:solidFill>
+                          <a:srgbClr val="002150"/>
+                        </a:solidFill>
+                      </a:endParaRPr>
+                    </a:p>
+                  </a:txBody>
+                  <a:tcPr anchor="ctr">
+                    <a:lnT w="12700" cap="flat" cmpd="sng" algn="ctr">
+                      <a:solidFill>
+                        <a:schemeClr val="tx1"/>
+                      </a:solidFill>
+                      <a:prstDash val="solid"/>
+                      <a:round/>
+                      <a:headEnd type="none" w="med" len="med"/>
+                      <a:tailEnd type="none" w="med" len="med"/>
+                    </a:lnT>
+                    <a:lnB w="12700" cap="flat" cmpd="sng" algn="ctr">
+                      <a:solidFill>
+                        <a:schemeClr val="tx1"/>
+                      </a:solidFill>
+                      <a:prstDash val="solid"/>
+                      <a:round/>
+                      <a:headEnd type="none" w="med" len="med"/>
+                      <a:tailEnd type="none" w="med" len="med"/>
+                    </a:lnB>
+                  </a:tcPr>
+                </a:tc>
+                <a:tc>
+                  <a:txBody>
+                    <a:bodyPr/>
+                    <a:lstStyle/>
+                    <a:p>
+                      <a:pPr algn="l"/>
+                      <a:r>
+                        <a:rPr lang="en-VN" sz="1800" b="0" i="0" kern="1200">
+                          <a:solidFill>
+                            <a:srgbClr val="002150"/>
+                          </a:solidFill>
+                          <a:effectLst/>
+                          <a:latin typeface="+mn-lt"/>
+                          <a:ea typeface="+mn-ea"/>
+                          <a:cs typeface="+mn-cs"/>
+                        </a:rPr>
+                        <a:t>46.7%</a:t>
+                      </a:r>
+                      <a:endParaRPr lang="en-VN">
+                        <a:solidFill>
+                          <a:srgbClr val="002150"/>
+                        </a:solidFill>
+                      </a:endParaRPr>
+                    </a:p>
+                  </a:txBody>
+                  <a:tcPr anchor="ctr">
+                    <a:lnT w="12700" cap="flat" cmpd="sng" algn="ctr">
+                      <a:solidFill>
+                        <a:schemeClr val="tx1"/>
+                      </a:solidFill>
+                      <a:prstDash val="solid"/>
+                      <a:round/>
+                      <a:headEnd type="none" w="med" len="med"/>
+                      <a:tailEnd type="none" w="med" len="med"/>
+                    </a:lnT>
+                    <a:lnB w="12700" cap="flat" cmpd="sng" algn="ctr">
+                      <a:solidFill>
+                        <a:schemeClr val="tx1"/>
+                      </a:solidFill>
+                      <a:prstDash val="solid"/>
+                      <a:round/>
+                      <a:headEnd type="none" w="med" len="med"/>
+                      <a:tailEnd type="none" w="med" len="med"/>
+                    </a:lnB>
+                  </a:tcPr>
+                </a:tc>
+                <a:extLst>
+                  <a:ext uri="{0D108BD9-81ED-4DB2-BD59-A6C34878D82A}">
+                    <a16:rowId xmlns:a16="http://schemas.microsoft.com/office/drawing/2014/main" val="2357774600"/>
+                  </a:ext>
+                </a:extLst>
+              </a:tr>
+              <a:tr h="572554">
+                <a:tc>
+                  <a:txBody>
+                    <a:bodyPr/>
+                    <a:lstStyle/>
+                    <a:p>
+                      <a:pPr algn="l"/>
+                      <a:r>
+                        <a:rPr lang="en-VN">
+                          <a:solidFill>
+                            <a:srgbClr val="002150"/>
+                          </a:solidFill>
+                        </a:rPr>
+                        <a:t>CSP + LDA</a:t>
+                      </a:r>
+                    </a:p>
+                  </a:txBody>
+                  <a:tcPr anchor="ctr">
+                    <a:lnT w="12700" cap="flat" cmpd="sng" algn="ctr">
+                      <a:solidFill>
+                        <a:schemeClr val="tx1"/>
+                      </a:solidFill>
+                      <a:prstDash val="solid"/>
+                      <a:round/>
+                      <a:headEnd type="none" w="med" len="med"/>
+                      <a:tailEnd type="none" w="med" len="med"/>
+                    </a:lnT>
+                  </a:tcPr>
+                </a:tc>
+                <a:tc>
+                  <a:txBody>
+                    <a:bodyPr/>
+                    <a:lstStyle/>
+                    <a:p>
+                      <a:pPr marL="0" marR="0" lvl="0" indent="0" algn="l" defTabSz="914400" rtl="0" eaLnBrk="1" fontAlgn="auto" latinLnBrk="0" hangingPunct="1">
+                        <a:lnSpc>
+                          <a:spcPct val="100000"/>
+                        </a:lnSpc>
+                        <a:spcBef>
+                          <a:spcPts val="0"/>
+                        </a:spcBef>
+                        <a:spcAft>
+                          <a:spcPts val="0"/>
+                        </a:spcAft>
+                        <a:buClrTx/>
+                        <a:buSzTx/>
+                        <a:buFontTx/>
+                        <a:buNone/>
+                        <a:tabLst/>
+                        <a:defRPr/>
+                      </a:pPr>
+                      <a:r>
+                        <a:rPr lang="en-VN">
+                          <a:solidFill>
+                            <a:srgbClr val="002150"/>
+                          </a:solidFill>
+                        </a:rPr>
+                        <a:t>4-class</a:t>
+                      </a:r>
+                    </a:p>
+                  </a:txBody>
+                  <a:tcPr anchor="ctr">
+                    <a:lnT w="12700" cap="flat" cmpd="sng" algn="ctr">
+                      <a:solidFill>
+                        <a:schemeClr val="tx1"/>
+                      </a:solidFill>
+                      <a:prstDash val="solid"/>
+                      <a:round/>
+                      <a:headEnd type="none" w="med" len="med"/>
+                      <a:tailEnd type="none" w="med" len="med"/>
+                    </a:lnT>
+                  </a:tcPr>
+                </a:tc>
+                <a:tc>
+                  <a:txBody>
+                    <a:bodyPr/>
+                    <a:lstStyle/>
+                    <a:p>
+                      <a:pPr algn="l"/>
+                      <a:r>
+                        <a:rPr lang="en-US" sz="1800" b="0" i="0" kern="1200">
+                          <a:solidFill>
+                            <a:srgbClr val="002150"/>
+                          </a:solidFill>
+                          <a:effectLst/>
+                          <a:latin typeface="+mn-lt"/>
+                          <a:ea typeface="+mn-ea"/>
+                          <a:cs typeface="+mn-cs"/>
+                        </a:rPr>
+                        <a:t>Cross-subject, 5-fold</a:t>
+                      </a:r>
+                      <a:endParaRPr lang="en-VN">
+                        <a:solidFill>
+                          <a:srgbClr val="002150"/>
+                        </a:solidFill>
+                      </a:endParaRPr>
+                    </a:p>
+                  </a:txBody>
+                  <a:tcPr anchor="ctr">
+                    <a:lnT w="12700" cap="flat" cmpd="sng" algn="ctr">
+                      <a:solidFill>
+                        <a:schemeClr val="tx1"/>
+                      </a:solidFill>
+                      <a:prstDash val="solid"/>
+                      <a:round/>
+                      <a:headEnd type="none" w="med" len="med"/>
+                      <a:tailEnd type="none" w="med" len="med"/>
+                    </a:lnT>
+                  </a:tcPr>
+                </a:tc>
+                <a:tc>
+                  <a:txBody>
+                    <a:bodyPr/>
+                    <a:lstStyle/>
+                    <a:p>
+                      <a:pPr algn="l"/>
+                      <a:r>
+                        <a:rPr lang="en-VN" sz="1800" b="0" i="0" kern="1200">
+                          <a:solidFill>
+                            <a:srgbClr val="002150"/>
+                          </a:solidFill>
+                          <a:effectLst/>
+                          <a:latin typeface="+mn-lt"/>
+                          <a:ea typeface="+mn-ea"/>
+                          <a:cs typeface="+mn-cs"/>
+                        </a:rPr>
+                        <a:t>42.1%</a:t>
+                      </a:r>
+                      <a:endParaRPr lang="en-VN">
+                        <a:solidFill>
+                          <a:srgbClr val="002150"/>
+                        </a:solidFill>
+                      </a:endParaRPr>
+                    </a:p>
+                  </a:txBody>
+                  <a:tcPr anchor="ctr">
+                    <a:lnT w="12700" cap="flat" cmpd="sng" algn="ctr">
+                      <a:solidFill>
+                        <a:schemeClr val="tx1"/>
+                      </a:solidFill>
+                      <a:prstDash val="solid"/>
+                      <a:round/>
+                      <a:headEnd type="none" w="med" len="med"/>
+                      <a:tailEnd type="none" w="med" len="med"/>
+                    </a:lnT>
+                  </a:tcPr>
+                </a:tc>
+                <a:extLst>
+                  <a:ext uri="{0D108BD9-81ED-4DB2-BD59-A6C34878D82A}">
+                    <a16:rowId xmlns:a16="http://schemas.microsoft.com/office/drawing/2014/main" val="3740803259"/>
+                  </a:ext>
+                </a:extLst>
+              </a:tr>
+            </a:tbl>
+          </a:graphicData>
+        </a:graphic>
+      </p:graphicFrame>
+    </p:spTree>
+    <p:extLst>
+      <p:ext uri="{BB962C8B-B14F-4D97-AF65-F5344CB8AC3E}">
+        <p14:creationId xmlns:p14="http://schemas.microsoft.com/office/powerpoint/2010/main" val="2334202644"/>
+      </p:ext>
+    </p:extLst>
+  </p:cSld>
+  <p:clrMapOvr>
+    <a:masterClrMapping/>
+  </p:clrMapOvr>
+</p:sld>
+</file>
+
+<file path=ppt/slides/slide5.xml><?xml version="1.0" encoding="utf-8"?>
+<p:sld xmlns:a="http://schemas.openxmlformats.org/drawingml/2006/main" xmlns:r="http://schemas.openxmlformats.org/officeDocument/2006/relationships" xmlns:p="http://schemas.openxmlformats.org/presentationml/2006/main">
+  <p:cSld>
+    <p:spTree>
+      <p:nvGrpSpPr>
+        <p:cNvPr id="1" name="">
+          <a:extLst>
+            <a:ext uri="{FF2B5EF4-FFF2-40B4-BE49-F238E27FC236}">
+              <a16:creationId xmlns:a16="http://schemas.microsoft.com/office/drawing/2014/main" id="{FCDD16AB-14A3-78D6-CFAD-7AA6ADD78E20}"/>
+            </a:ext>
+          </a:extLst>
+        </p:cNvPr>
+        <p:cNvGrpSpPr/>
+        <p:nvPr/>
+      </p:nvGrpSpPr>
+      <p:grpSpPr>
+        <a:xfrm>
+          <a:off x="0" y="0"/>
+          <a:ext cx="0" cy="0"/>
+          <a:chOff x="0" y="0"/>
+          <a:chExt cx="0" cy="0"/>
+        </a:xfrm>
+      </p:grpSpPr>
+      <p:sp>
+        <p:nvSpPr>
+          <p:cNvPr id="22" name="TextBox 22">
+            <a:extLst>
+              <a:ext uri="{FF2B5EF4-FFF2-40B4-BE49-F238E27FC236}">
+                <a16:creationId xmlns:a16="http://schemas.microsoft.com/office/drawing/2014/main" id="{C8370A0C-FA92-6E11-60BA-CF77488B77EA}"/>
+              </a:ext>
+            </a:extLst>
+          </p:cNvPr>
+          <p:cNvSpPr txBox="1"/>
+          <p:nvPr/>
+        </p:nvSpPr>
+        <p:spPr>
+          <a:xfrm>
+            <a:off x="1104903" y="1589147"/>
+            <a:ext cx="5197969" cy="663195"/>
+          </a:xfrm>
+          <a:prstGeom prst="rect">
+            <a:avLst/>
+          </a:prstGeom>
+        </p:spPr>
+        <p:txBody>
+          <a:bodyPr wrap="square" lIns="0" tIns="0" rIns="0" bIns="0" rtlCol="0" anchor="t">
+            <a:spAutoFit/>
+          </a:bodyPr>
+          <a:lstStyle/>
+          <a:p>
+            <a:pPr marL="0" lvl="0" indent="0" algn="l">
+              <a:lnSpc>
+                <a:spcPts val="4601"/>
+              </a:lnSpc>
+            </a:pPr>
+            <a:r>
+              <a:rPr lang="en-US" sz="6000" b="1" spc="-77">
+                <a:solidFill>
+                  <a:srgbClr val="002150"/>
+                </a:solidFill>
+                <a:latin typeface="League Spartan"/>
+                <a:ea typeface="League Spartan"/>
+                <a:cs typeface="League Spartan"/>
+                <a:sym typeface="League Spartan"/>
+              </a:rPr>
+              <a:t>I. Finished tasks</a:t>
+            </a:r>
+          </a:p>
+        </p:txBody>
+      </p:sp>
+      <p:sp>
+        <p:nvSpPr>
+          <p:cNvPr id="26" name="AutoShape 26">
+            <a:extLst>
+              <a:ext uri="{FF2B5EF4-FFF2-40B4-BE49-F238E27FC236}">
+                <a16:creationId xmlns:a16="http://schemas.microsoft.com/office/drawing/2014/main" id="{58FFAFDD-67C1-07D7-BD81-BC7B4929B859}"/>
+              </a:ext>
+            </a:extLst>
+          </p:cNvPr>
+          <p:cNvSpPr/>
+          <p:nvPr/>
+        </p:nvSpPr>
+        <p:spPr>
+          <a:xfrm flipV="1">
+            <a:off x="11947020" y="1194282"/>
+            <a:ext cx="0" cy="2116120"/>
+          </a:xfrm>
+          <a:prstGeom prst="line">
+            <a:avLst/>
+          </a:prstGeom>
+          <a:ln w="9525" cap="flat">
+            <a:solidFill>
+              <a:srgbClr val="F7E7D7"/>
+            </a:solidFill>
+            <a:prstDash val="sysDot"/>
+            <a:headEnd type="none" w="sm" len="sm"/>
+            <a:tailEnd type="none" w="sm" len="sm"/>
+          </a:ln>
+        </p:spPr>
+        <p:txBody>
+          <a:bodyPr/>
+          <a:lstStyle/>
+          <a:p>
+            <a:endParaRPr lang="en-VN"/>
+          </a:p>
+        </p:txBody>
+      </p:sp>
+      <p:grpSp>
+        <p:nvGrpSpPr>
+          <p:cNvPr id="28" name="Group 28">
+            <a:extLst>
+              <a:ext uri="{FF2B5EF4-FFF2-40B4-BE49-F238E27FC236}">
+                <a16:creationId xmlns:a16="http://schemas.microsoft.com/office/drawing/2014/main" id="{8EE1E5F9-5443-0EA4-FEEB-EA4F4375EFB5}"/>
+              </a:ext>
+            </a:extLst>
+          </p:cNvPr>
+          <p:cNvGrpSpPr>
+            <a:grpSpLocks/>
+          </p:cNvGrpSpPr>
+          <p:nvPr/>
+        </p:nvGrpSpPr>
+        <p:grpSpPr>
+          <a:xfrm>
+            <a:off x="0" y="-719504"/>
+            <a:ext cx="6768300" cy="1330380"/>
+            <a:chOff x="0" y="-38100"/>
+            <a:chExt cx="1782597" cy="383810"/>
+          </a:xfrm>
+        </p:grpSpPr>
+        <p:sp>
+          <p:nvSpPr>
+            <p:cNvPr id="29" name="Freeform 29">
+              <a:extLst>
+                <a:ext uri="{FF2B5EF4-FFF2-40B4-BE49-F238E27FC236}">
+                  <a16:creationId xmlns:a16="http://schemas.microsoft.com/office/drawing/2014/main" id="{75765F54-2252-3BE8-E933-E5A615335CE8}"/>
+                </a:ext>
+              </a:extLst>
+            </p:cNvPr>
+            <p:cNvSpPr>
+              <a:spLocks/>
+            </p:cNvSpPr>
+            <p:nvPr/>
+          </p:nvSpPr>
+          <p:spPr>
+            <a:xfrm>
+              <a:off x="0" y="-38100"/>
+              <a:ext cx="1782597" cy="383810"/>
+            </a:xfrm>
+            <a:custGeom>
+              <a:avLst/>
+              <a:gdLst/>
+              <a:ahLst/>
+              <a:cxnLst/>
+              <a:rect l="l" t="t" r="r" b="b"/>
+              <a:pathLst>
+                <a:path w="1782597" h="345710">
+                  <a:moveTo>
+                    <a:pt x="0" y="0"/>
+                  </a:moveTo>
+                  <a:lnTo>
+                    <a:pt x="1782597" y="0"/>
+                  </a:lnTo>
+                  <a:lnTo>
+                    <a:pt x="1782597" y="345710"/>
+                  </a:lnTo>
+                  <a:lnTo>
+                    <a:pt x="0" y="345710"/>
+                  </a:lnTo>
+                  <a:close/>
+                </a:path>
+              </a:pathLst>
+            </a:custGeom>
+            <a:solidFill>
+              <a:srgbClr val="002250"/>
+            </a:solidFill>
+          </p:spPr>
+          <p:txBody>
+            <a:bodyPr/>
+            <a:lstStyle/>
+            <a:p>
+              <a:endParaRPr lang="en-VN"/>
+            </a:p>
+          </p:txBody>
+        </p:sp>
+        <p:sp>
+          <p:nvSpPr>
+            <p:cNvPr id="30" name="TextBox 30">
+              <a:extLst>
+                <a:ext uri="{FF2B5EF4-FFF2-40B4-BE49-F238E27FC236}">
+                  <a16:creationId xmlns:a16="http://schemas.microsoft.com/office/drawing/2014/main" id="{FA997A0D-3804-39A7-4A06-231A2F3374CA}"/>
+                </a:ext>
+              </a:extLst>
+            </p:cNvPr>
+            <p:cNvSpPr txBox="1">
+              <a:spLocks/>
+            </p:cNvSpPr>
+            <p:nvPr/>
+          </p:nvSpPr>
+          <p:spPr>
+            <a:xfrm>
+              <a:off x="0" y="-38100"/>
+              <a:ext cx="1782597" cy="383810"/>
+            </a:xfrm>
+            <a:prstGeom prst="rect">
+              <a:avLst/>
+            </a:prstGeom>
+          </p:spPr>
+          <p:txBody>
+            <a:bodyPr lIns="50800" tIns="50800" rIns="50800" bIns="50800" rtlCol="0" anchor="ctr"/>
+            <a:lstStyle/>
+            <a:p>
+              <a:pPr algn="ctr">
+                <a:lnSpc>
+                  <a:spcPts val="2659"/>
+                </a:lnSpc>
+              </a:pPr>
+              <a:endParaRPr/>
+            </a:p>
+          </p:txBody>
+        </p:sp>
+      </p:grpSp>
+      <p:pic>
+        <p:nvPicPr>
+          <p:cNvPr id="41" name="Picture 40">
+            <a:extLst>
+              <a:ext uri="{FF2B5EF4-FFF2-40B4-BE49-F238E27FC236}">
+                <a16:creationId xmlns:a16="http://schemas.microsoft.com/office/drawing/2014/main" id="{F13824A5-AFC4-116F-AE4D-3B1AC8EC0450}"/>
+              </a:ext>
+            </a:extLst>
+          </p:cNvPr>
+          <p:cNvPicPr>
+            <a:picLocks noChangeAspect="1"/>
+          </p:cNvPicPr>
+          <p:nvPr/>
+        </p:nvPicPr>
+        <p:blipFill>
+          <a:blip r:embed="rId3">
+            <a:extLst>
+              <a:ext uri="{28A0092B-C50C-407E-A947-70E740481C1C}">
+                <a14:useLocalDpi xmlns:a14="http://schemas.microsoft.com/office/drawing/2010/main" val="0"/>
+              </a:ext>
+            </a:extLst>
+          </a:blip>
+          <a:stretch>
+            <a:fillRect/>
+          </a:stretch>
+        </p:blipFill>
+        <p:spPr>
+          <a:xfrm>
+            <a:off x="6768300" y="-748114"/>
+            <a:ext cx="11519700" cy="1358990"/>
+          </a:xfrm>
+          <a:prstGeom prst="rect">
+            <a:avLst/>
+          </a:prstGeom>
+        </p:spPr>
+      </p:pic>
+      <p:sp>
+        <p:nvSpPr>
+          <p:cNvPr id="4" name="TextBox 3">
+            <a:extLst>
+              <a:ext uri="{FF2B5EF4-FFF2-40B4-BE49-F238E27FC236}">
+                <a16:creationId xmlns:a16="http://schemas.microsoft.com/office/drawing/2014/main" id="{6FC65B45-F6C6-8025-3C79-C74532837D1E}"/>
+              </a:ext>
+            </a:extLst>
+          </p:cNvPr>
+          <p:cNvSpPr txBox="1"/>
+          <p:nvPr/>
+        </p:nvSpPr>
+        <p:spPr>
+          <a:xfrm>
+            <a:off x="1730872" y="2400190"/>
+            <a:ext cx="9144000" cy="667234"/>
+          </a:xfrm>
+          <a:prstGeom prst="rect">
+            <a:avLst/>
+          </a:prstGeom>
+          <a:noFill/>
+        </p:spPr>
+        <p:txBody>
+          <a:bodyPr wrap="square">
+            <a:spAutoFit/>
+          </a:bodyPr>
+          <a:lstStyle/>
+          <a:p>
+            <a:pPr marL="0" lvl="0" indent="0" algn="l">
+              <a:lnSpc>
+                <a:spcPts val="4601"/>
+              </a:lnSpc>
+            </a:pPr>
+            <a:r>
+              <a:rPr lang="en-US" sz="3200" b="1" spc="-77">
+                <a:solidFill>
+                  <a:srgbClr val="002150"/>
+                </a:solidFill>
+                <a:latin typeface="League Spartan SemiBold" pitchFamily="2" charset="77"/>
+                <a:ea typeface="League Spartan"/>
+                <a:cs typeface="League Spartan"/>
+                <a:sym typeface="League Spartan"/>
+              </a:rPr>
+              <a:t>1. Model training </a:t>
+            </a:r>
+            <a:r>
+              <a:rPr lang="en-US" sz="3200" b="1" spc="-77" baseline="30000">
+                <a:solidFill>
+                  <a:srgbClr val="002150"/>
+                </a:solidFill>
+                <a:latin typeface="League Spartan SemiBold" pitchFamily="2" charset="77"/>
+                <a:ea typeface="League Spartan"/>
+                <a:cs typeface="League Spartan"/>
+                <a:sym typeface="League Spartan"/>
+              </a:rPr>
+              <a:t>[STP7]  </a:t>
+            </a:r>
+            <a:r>
+              <a:rPr lang="en-US" sz="3200" b="1" spc="-77">
+                <a:solidFill>
+                  <a:srgbClr val="002150"/>
+                </a:solidFill>
+                <a:latin typeface="League Spartan SemiBold" pitchFamily="2" charset="77"/>
+                <a:ea typeface="League Spartan"/>
+                <a:cs typeface="League Spartan"/>
+                <a:sym typeface="League Spartan"/>
+              </a:rPr>
+              <a:t>– 100%</a:t>
+            </a:r>
+            <a:r>
+              <a:rPr lang="en-US" sz="3200" b="1" spc="-77" baseline="30000">
+                <a:solidFill>
+                  <a:srgbClr val="002150"/>
+                </a:solidFill>
+                <a:latin typeface="League Spartan SemiBold" pitchFamily="2" charset="77"/>
+                <a:ea typeface="League Spartan"/>
+                <a:cs typeface="League Spartan"/>
+                <a:sym typeface="League Spartan"/>
+              </a:rPr>
+              <a:t> </a:t>
+            </a:r>
+          </a:p>
+        </p:txBody>
+      </p:sp>
+      <p:sp>
+        <p:nvSpPr>
+          <p:cNvPr id="8" name="TextBox 7">
+            <a:extLst>
+              <a:ext uri="{FF2B5EF4-FFF2-40B4-BE49-F238E27FC236}">
+                <a16:creationId xmlns:a16="http://schemas.microsoft.com/office/drawing/2014/main" id="{2CCE3D47-75D1-A8E0-A10F-C533637AE8A5}"/>
+              </a:ext>
+            </a:extLst>
+          </p:cNvPr>
+          <p:cNvSpPr txBox="1"/>
+          <p:nvPr/>
+        </p:nvSpPr>
+        <p:spPr>
+          <a:xfrm>
+            <a:off x="1730871" y="3361411"/>
+            <a:ext cx="14575927" cy="3778920"/>
+          </a:xfrm>
+          <a:prstGeom prst="rect">
+            <a:avLst/>
+          </a:prstGeom>
+          <a:noFill/>
+        </p:spPr>
+        <p:txBody>
+          <a:bodyPr wrap="square" rtlCol="0">
+            <a:spAutoFit/>
+          </a:bodyPr>
+          <a:lstStyle/>
+          <a:p>
+            <a:pPr>
+              <a:lnSpc>
+                <a:spcPct val="120000"/>
+              </a:lnSpc>
+            </a:pPr>
+            <a:r>
+              <a:rPr lang="en-US" sz="2000" b="1" spc="-64">
+                <a:solidFill>
+                  <a:srgbClr val="002250"/>
+                </a:solidFill>
+                <a:latin typeface="Adobe Clean UX" panose="020B0503020404020204" pitchFamily="34" charset="0"/>
+              </a:rPr>
+              <a:t>STRATEGY 2</a:t>
+            </a:r>
+          </a:p>
+          <a:p>
+            <a:pPr>
+              <a:lnSpc>
+                <a:spcPct val="120000"/>
+              </a:lnSpc>
+            </a:pPr>
+            <a:r>
+              <a:rPr lang="en-US" sz="2600" b="1" spc="-64">
+                <a:solidFill>
+                  <a:srgbClr val="002250"/>
+                </a:solidFill>
+                <a:latin typeface="Adobe Clean UX" panose="020B0503020404020204" pitchFamily="34" charset="0"/>
+              </a:rPr>
+              <a:t>Deep Learning (EEGNet architecture) trained on BCI IV 2a dataset -&gt; fine-tuned on MIMED</a:t>
+            </a:r>
+          </a:p>
+          <a:p>
+            <a:pPr>
+              <a:lnSpc>
+                <a:spcPct val="120000"/>
+              </a:lnSpc>
+            </a:pPr>
+            <a:endParaRPr lang="en-US" sz="2600" spc="-64">
+              <a:solidFill>
+                <a:srgbClr val="002250"/>
+              </a:solidFill>
+              <a:latin typeface="Adobe Clean UX" panose="020B0503020404020204" pitchFamily="34" charset="0"/>
+            </a:endParaRPr>
+          </a:p>
+          <a:p>
+            <a:pPr>
+              <a:lnSpc>
+                <a:spcPct val="120000"/>
+              </a:lnSpc>
+            </a:pPr>
+            <a:r>
+              <a:rPr lang="en-US" sz="2600" spc="-64">
+                <a:solidFill>
+                  <a:srgbClr val="002250"/>
+                </a:solidFill>
+                <a:latin typeface="Adobe Clean UX" panose="020B0503020404020204" pitchFamily="34" charset="0"/>
+              </a:rPr>
+              <a:t>- To overcome the data scarcity problem, EEGNet was first pretrained on BCI IV 2a, a larger research-grade dataset with 5,184 trials across 9 subjects. The model learned general EEG patterns (mu/beta rhythms) from this data.</a:t>
+            </a:r>
+          </a:p>
+          <a:p>
+            <a:pPr>
+              <a:lnSpc>
+                <a:spcPct val="120000"/>
+              </a:lnSpc>
+            </a:pPr>
+            <a:endParaRPr lang="en-US" sz="2600" spc="-64">
+              <a:solidFill>
+                <a:srgbClr val="002250"/>
+              </a:solidFill>
+              <a:latin typeface="Adobe Clean UX" panose="020B0503020404020204" pitchFamily="34" charset="0"/>
+            </a:endParaRPr>
+          </a:p>
+          <a:p>
+            <a:pPr>
+              <a:lnSpc>
+                <a:spcPct val="120000"/>
+              </a:lnSpc>
+            </a:pPr>
+            <a:r>
+              <a:rPr lang="en-US" sz="2600" spc="-64">
+                <a:solidFill>
+                  <a:srgbClr val="002250"/>
+                </a:solidFill>
+                <a:latin typeface="Adobe Clean UX" panose="020B0503020404020204" pitchFamily="34" charset="0"/>
+              </a:rPr>
+              <a:t>- The pretrained model was then adapted to Epoc X hardware by fine-tuning on MIMED. </a:t>
+            </a:r>
+            <a:br>
+              <a:rPr lang="en-US" sz="2600" spc="-64">
+                <a:solidFill>
+                  <a:srgbClr val="002250"/>
+                </a:solidFill>
+                <a:latin typeface="Adobe Clean UX" panose="020B0503020404020204" pitchFamily="34" charset="0"/>
+              </a:rPr>
+            </a:br>
+            <a:endParaRPr lang="en-US" sz="2600" spc="-64">
+              <a:solidFill>
+                <a:srgbClr val="002250"/>
+              </a:solidFill>
+              <a:latin typeface="Adobe Clean UX" panose="020B0503020404020204" pitchFamily="34" charset="0"/>
+            </a:endParaRPr>
+          </a:p>
+        </p:txBody>
+      </p:sp>
+      <p:graphicFrame>
+        <p:nvGraphicFramePr>
+          <p:cNvPr id="11" name="Table 10">
+            <a:extLst>
+              <a:ext uri="{FF2B5EF4-FFF2-40B4-BE49-F238E27FC236}">
+                <a16:creationId xmlns:a16="http://schemas.microsoft.com/office/drawing/2014/main" id="{407874F7-481B-8372-5708-C7C156AF97C0}"/>
+              </a:ext>
+            </a:extLst>
+          </p:cNvPr>
+          <p:cNvGraphicFramePr>
+            <a:graphicFrameLocks noGrp="1"/>
+          </p:cNvGraphicFramePr>
+          <p:nvPr>
+            <p:extLst>
+              <p:ext uri="{D42A27DB-BD31-4B8C-83A1-F6EECF244321}">
+                <p14:modId xmlns:p14="http://schemas.microsoft.com/office/powerpoint/2010/main" val="997689165"/>
+              </p:ext>
+            </p:extLst>
+          </p:nvPr>
+        </p:nvGraphicFramePr>
+        <p:xfrm>
+          <a:off x="1981203" y="7140331"/>
+          <a:ext cx="12420599" cy="2381652"/>
+        </p:xfrm>
+        <a:graphic>
+          <a:graphicData uri="http://schemas.openxmlformats.org/drawingml/2006/table">
+            <a:tbl>
+              <a:tblPr firstRow="1" bandRow="1">
+                <a:tableStyleId>{2D5ABB26-0587-4C30-8999-92F81FD0307C}</a:tableStyleId>
+              </a:tblPr>
+              <a:tblGrid>
+                <a:gridCol w="5943597">
+                  <a:extLst>
+                    <a:ext uri="{9D8B030D-6E8A-4147-A177-3AD203B41FA5}">
+                      <a16:colId xmlns:a16="http://schemas.microsoft.com/office/drawing/2014/main" val="1333062104"/>
+                    </a:ext>
+                  </a:extLst>
+                </a:gridCol>
+                <a:gridCol w="2362200">
+                  <a:extLst>
+                    <a:ext uri="{9D8B030D-6E8A-4147-A177-3AD203B41FA5}">
+                      <a16:colId xmlns:a16="http://schemas.microsoft.com/office/drawing/2014/main" val="3442373815"/>
+                    </a:ext>
+                  </a:extLst>
+                </a:gridCol>
+                <a:gridCol w="2362200">
+                  <a:extLst>
+                    <a:ext uri="{9D8B030D-6E8A-4147-A177-3AD203B41FA5}">
+                      <a16:colId xmlns:a16="http://schemas.microsoft.com/office/drawing/2014/main" val="2715292797"/>
+                    </a:ext>
+                  </a:extLst>
+                </a:gridCol>
+                <a:gridCol w="1752602">
+                  <a:extLst>
+                    <a:ext uri="{9D8B030D-6E8A-4147-A177-3AD203B41FA5}">
+                      <a16:colId xmlns:a16="http://schemas.microsoft.com/office/drawing/2014/main" val="2411584792"/>
+                    </a:ext>
+                  </a:extLst>
+                </a:gridCol>
+              </a:tblGrid>
+              <a:tr h="492139">
+                <a:tc>
+                  <a:txBody>
+                    <a:bodyPr/>
+                    <a:lstStyle/>
+                    <a:p>
+                      <a:pPr algn="l"/>
+                      <a:r>
+                        <a:rPr lang="en-VN" sz="2000" b="1">
+                          <a:solidFill>
+                            <a:srgbClr val="002150"/>
+                          </a:solidFill>
+                        </a:rPr>
+                        <a:t>Model</a:t>
+                      </a:r>
+                    </a:p>
+                  </a:txBody>
+                  <a:tcPr anchor="ctr">
+                    <a:lnB w="12700" cap="flat" cmpd="sng" algn="ctr">
+                      <a:solidFill>
+                        <a:schemeClr val="tx1"/>
                       </a:solidFill>
                       <a:prstDash val="solid"/>
                       <a:round/>
@@ -6212,47 +8218,21 @@
                     <a:bodyPr/>
                     <a:lstStyle/>
                     <a:p>
-                      <a:pPr algn="ctr"/>
+                      <a:pPr algn="l"/>
                       <a:r>
-                        <a:rPr lang="en-US" sz="2600">
-                          <a:effectLst/>
-                          <a:latin typeface="Adobe Clean UX" panose="020B0503020404020204" pitchFamily="34" charset="0"/>
+                        <a:rPr lang="en-VN" sz="2000" b="1">
+                          <a:solidFill>
+                            <a:srgbClr val="002150"/>
+                          </a:solidFill>
                         </a:rPr>
-                        <a:t>MIMED</a:t>
+                        <a:t>Classes</a:t>
                       </a:r>
                     </a:p>
                   </a:txBody>
-                  <a:tcPr marL="126218" marR="126218" marT="126218" marB="126218" anchor="ctr">
-                    <a:lnL w="9525" cap="flat" cmpd="sng" algn="ctr">
+                  <a:tcPr anchor="ctr">
+                    <a:lnB w="12700" cap="flat" cmpd="sng" algn="ctr">
                       <a:solidFill>
-                        <a:srgbClr val="DDDDDD"/>
-                      </a:solidFill>
-                      <a:prstDash val="solid"/>
-                      <a:round/>
-                      <a:headEnd type="none" w="med" len="med"/>
-                      <a:tailEnd type="none" w="med" len="med"/>
-                    </a:lnL>
-                    <a:lnR w="9525" cap="flat" cmpd="sng" algn="ctr">
-                      <a:solidFill>
-                        <a:srgbClr val="DDDDDD"/>
-                      </a:solidFill>
-                      <a:prstDash val="solid"/>
-                      <a:round/>
-                      <a:headEnd type="none" w="med" len="med"/>
-                      <a:tailEnd type="none" w="med" len="med"/>
-                    </a:lnR>
-                    <a:lnT w="9525" cap="flat" cmpd="sng" algn="ctr">
-                      <a:solidFill>
-                        <a:srgbClr val="DDDDDD"/>
-                      </a:solidFill>
-                      <a:prstDash val="solid"/>
-                      <a:round/>
-                      <a:headEnd type="none" w="med" len="med"/>
-                      <a:tailEnd type="none" w="med" len="med"/>
-                    </a:lnT>
-                    <a:lnB w="9525" cap="flat" cmpd="sng" algn="ctr">
-                      <a:solidFill>
-                        <a:srgbClr val="DDDDDD"/>
+                        <a:schemeClr val="tx1"/>
                       </a:solidFill>
                       <a:prstDash val="solid"/>
                       <a:round/>
@@ -6267,47 +8247,21 @@
                     <a:bodyPr/>
                     <a:lstStyle/>
                     <a:p>
-                      <a:pPr algn="ctr"/>
+                      <a:pPr algn="l"/>
                       <a:r>
-                        <a:rPr lang="en-US" sz="2600">
-                          <a:effectLst/>
-                          <a:latin typeface="Adobe Clean UX" panose="020B0503020404020204" pitchFamily="34" charset="0"/>
+                        <a:rPr lang="en-VN" sz="2000" b="1">
+                          <a:solidFill>
+                            <a:srgbClr val="002150"/>
+                          </a:solidFill>
                         </a:rPr>
-                        <a:t>Cross-subject, 5-fold</a:t>
+                        <a:t>Protocol</a:t>
                       </a:r>
                     </a:p>
                   </a:txBody>
-                  <a:tcPr marL="126218" marR="126218" marT="126218" marB="126218" anchor="ctr">
-                    <a:lnL w="9525" cap="flat" cmpd="sng" algn="ctr">
+                  <a:tcPr anchor="ctr">
+                    <a:lnB w="12700" cap="flat" cmpd="sng" algn="ctr">
                       <a:solidFill>
-                        <a:srgbClr val="DDDDDD"/>
-                      </a:solidFill>
-                      <a:prstDash val="solid"/>
-                      <a:round/>
-                      <a:headEnd type="none" w="med" len="med"/>
-                      <a:tailEnd type="none" w="med" len="med"/>
-                    </a:lnL>
-                    <a:lnR w="9525" cap="flat" cmpd="sng" algn="ctr">
-                      <a:solidFill>
-                        <a:srgbClr val="DDDDDD"/>
-                      </a:solidFill>
-                      <a:prstDash val="solid"/>
-                      <a:round/>
-                      <a:headEnd type="none" w="med" len="med"/>
-                      <a:tailEnd type="none" w="med" len="med"/>
-                    </a:lnR>
-                    <a:lnT w="9525" cap="flat" cmpd="sng" algn="ctr">
-                      <a:solidFill>
-                        <a:srgbClr val="DDDDDD"/>
-                      </a:solidFill>
-                      <a:prstDash val="solid"/>
-                      <a:round/>
-                      <a:headEnd type="none" w="med" len="med"/>
-                      <a:tailEnd type="none" w="med" len="med"/>
-                    </a:lnT>
-                    <a:lnB w="9525" cap="flat" cmpd="sng" algn="ctr">
-                      <a:solidFill>
-                        <a:srgbClr val="DDDDDD"/>
+                        <a:schemeClr val="tx1"/>
                       </a:solidFill>
                       <a:prstDash val="solid"/>
                       <a:round/>
@@ -6322,47 +8276,21 @@
                     <a:bodyPr/>
                     <a:lstStyle/>
                     <a:p>
-                      <a:pPr algn="ctr"/>
+                      <a:pPr algn="l"/>
                       <a:r>
-                        <a:rPr lang="en-VN" sz="2600">
-                          <a:effectLst/>
-                          <a:latin typeface="Adobe Clean UX" panose="020B0503020404020204" pitchFamily="34" charset="0"/>
+                        <a:rPr lang="en-VN" sz="2000" b="1">
+                          <a:solidFill>
+                            <a:srgbClr val="002150"/>
+                          </a:solidFill>
                         </a:rPr>
-                        <a:t>46.7%</a:t>
+                        <a:t>Accuracy</a:t>
                       </a:r>
                     </a:p>
                   </a:txBody>
-                  <a:tcPr marL="126218" marR="126218" marT="126218" marB="126218" anchor="ctr">
-                    <a:lnL w="9525" cap="flat" cmpd="sng" algn="ctr">
+                  <a:tcPr anchor="ctr">
+                    <a:lnB w="12700" cap="flat" cmpd="sng" algn="ctr">
                       <a:solidFill>
-                        <a:srgbClr val="DDDDDD"/>
-                      </a:solidFill>
-                      <a:prstDash val="solid"/>
-                      <a:round/>
-                      <a:headEnd type="none" w="med" len="med"/>
-                      <a:tailEnd type="none" w="med" len="med"/>
-                    </a:lnL>
-                    <a:lnR w="9525" cap="flat" cmpd="sng" algn="ctr">
-                      <a:solidFill>
-                        <a:srgbClr val="DDDDDD"/>
-                      </a:solidFill>
-                      <a:prstDash val="solid"/>
-                      <a:round/>
-                      <a:headEnd type="none" w="med" len="med"/>
-                      <a:tailEnd type="none" w="med" len="med"/>
-                    </a:lnR>
-                    <a:lnT w="9525" cap="flat" cmpd="sng" algn="ctr">
-                      <a:solidFill>
-                        <a:srgbClr val="DDDDDD"/>
-                      </a:solidFill>
-                      <a:prstDash val="solid"/>
-                      <a:round/>
-                      <a:headEnd type="none" w="med" len="med"/>
-                      <a:tailEnd type="none" w="med" len="med"/>
-                    </a:lnT>
-                    <a:lnB w="9525" cap="flat" cmpd="sng" algn="ctr">
-                      <a:solidFill>
-                        <a:srgbClr val="DDDDDD"/>
+                        <a:schemeClr val="tx1"/>
                       </a:solidFill>
                       <a:prstDash val="solid"/>
                       <a:round/>
@@ -6374,64 +8302,46 @@
                 </a:tc>
                 <a:extLst>
                   <a:ext uri="{0D108BD9-81ED-4DB2-BD59-A6C34878D82A}">
-                    <a16:rowId xmlns:a16="http://schemas.microsoft.com/office/drawing/2014/main" val="130041681"/>
+                    <a16:rowId xmlns:a16="http://schemas.microsoft.com/office/drawing/2014/main" val="3350081796"/>
                   </a:ext>
                 </a:extLst>
               </a:tr>
-              <a:tr h="662270">
+              <a:tr h="572554">
                 <a:tc>
                   <a:txBody>
                     <a:bodyPr/>
                     <a:lstStyle/>
                     <a:p>
-                      <a:pPr algn="ctr"/>
+                      <a:pPr algn="l"/>
                       <a:r>
-                        <a:rPr lang="en-US" sz="2600">
-                          <a:effectLst/>
-                          <a:latin typeface="Adobe Clean UX" panose="020B0503020404020204" pitchFamily="34" charset="0"/>
+                        <a:rPr lang="en-VN">
+                          <a:solidFill>
+                            <a:srgbClr val="002150"/>
+                          </a:solidFill>
                         </a:rPr>
-                        <a:t>CSP + LDA</a:t>
+                        <a:t>EEGNet + BCI IV 2a</a:t>
                       </a:r>
                     </a:p>
                   </a:txBody>
-                  <a:tcPr marL="126218" marR="126218" marT="126218" marB="126218" anchor="ctr">
-                    <a:lnL w="9525" cap="flat" cmpd="sng" algn="ctr">
+                  <a:tcPr anchor="ctr">
+                    <a:lnT w="12700" cap="flat" cmpd="sng" algn="ctr">
                       <a:solidFill>
-                        <a:srgbClr val="DDDDDD"/>
-                      </a:solidFill>
-                      <a:prstDash val="solid"/>
-                      <a:round/>
-                      <a:headEnd type="none" w="med" len="med"/>
-                      <a:tailEnd type="none" w="med" len="med"/>
-                    </a:lnL>
-                    <a:lnR w="9525" cap="flat" cmpd="sng" algn="ctr">
-                      <a:solidFill>
-                        <a:srgbClr val="DDDDDD"/>
-                      </a:solidFill>
-                      <a:prstDash val="solid"/>
-                      <a:round/>
-                      <a:headEnd type="none" w="med" len="med"/>
-                      <a:tailEnd type="none" w="med" len="med"/>
-                    </a:lnR>
-                    <a:lnT w="9525" cap="flat" cmpd="sng" algn="ctr">
-                      <a:solidFill>
-                        <a:srgbClr val="DDDDDD"/>
+                        <a:schemeClr val="tx1"/>
                       </a:solidFill>
                       <a:prstDash val="solid"/>
                       <a:round/>
                       <a:headEnd type="none" w="med" len="med"/>
                       <a:tailEnd type="none" w="med" len="med"/>
                     </a:lnT>
-                    <a:lnB w="9525" cap="flat" cmpd="sng" algn="ctr">
+                    <a:lnB w="12700" cap="flat" cmpd="sng" algn="ctr">
                       <a:solidFill>
-                        <a:srgbClr val="DDDDDD"/>
+                        <a:schemeClr val="tx1"/>
                       </a:solidFill>
                       <a:prstDash val="solid"/>
                       <a:round/>
                       <a:headEnd type="none" w="med" len="med"/>
                       <a:tailEnd type="none" w="med" len="med"/>
                     </a:lnB>
-                    <a:noFill/>
                   </a:tcPr>
                 </a:tc>
                 <a:tc>
@@ -6439,54 +8349,36 @@
                     <a:bodyPr/>
                     <a:lstStyle/>
                     <a:p>
-                      <a:pPr algn="ctr"/>
+                      <a:pPr algn="l"/>
                       <a:r>
-                        <a:rPr lang="en-US" sz="2600">
-                          <a:effectLst/>
-                          <a:latin typeface="Adobe Clean UX" panose="020B0503020404020204" pitchFamily="34" charset="0"/>
+                        <a:rPr lang="en-VN">
+                          <a:solidFill>
+                            <a:srgbClr val="002150"/>
+                          </a:solidFill>
                         </a:rPr>
-                        <a:t>MIMED</a:t>
+                        <a:t>4-class</a:t>
                       </a:r>
                     </a:p>
                   </a:txBody>
-                  <a:tcPr marL="126218" marR="126218" marT="126218" marB="126218" anchor="ctr">
-                    <a:lnL w="9525" cap="flat" cmpd="sng" algn="ctr">
+                  <a:tcPr anchor="ctr">
+                    <a:lnT w="12700" cap="flat" cmpd="sng" algn="ctr">
                       <a:solidFill>
-                        <a:srgbClr val="DDDDDD"/>
-                      </a:solidFill>
-                      <a:prstDash val="solid"/>
-                      <a:round/>
-                      <a:headEnd type="none" w="med" len="med"/>
-                      <a:tailEnd type="none" w="med" len="med"/>
-                    </a:lnL>
-                    <a:lnR w="9525" cap="flat" cmpd="sng" algn="ctr">
-                      <a:solidFill>
-                        <a:srgbClr val="DDDDDD"/>
-                      </a:solidFill>
-                      <a:prstDash val="solid"/>
-                      <a:round/>
-                      <a:headEnd type="none" w="med" len="med"/>
-                      <a:tailEnd type="none" w="med" len="med"/>
-                    </a:lnR>
-                    <a:lnT w="9525" cap="flat" cmpd="sng" algn="ctr">
-                      <a:solidFill>
-                        <a:srgbClr val="DDDDDD"/>
+                        <a:schemeClr val="tx1"/>
                       </a:solidFill>
                       <a:prstDash val="solid"/>
                       <a:round/>
                       <a:headEnd type="none" w="med" len="med"/>
                       <a:tailEnd type="none" w="med" len="med"/>
                     </a:lnT>
-                    <a:lnB w="9525" cap="flat" cmpd="sng" algn="ctr">
+                    <a:lnB w="12700" cap="flat" cmpd="sng" algn="ctr">
                       <a:solidFill>
-                        <a:srgbClr val="DDDDDD"/>
+                        <a:schemeClr val="tx1"/>
                       </a:solidFill>
                       <a:prstDash val="solid"/>
                       <a:round/>
                       <a:headEnd type="none" w="med" len="med"/>
                       <a:tailEnd type="none" w="med" len="med"/>
                     </a:lnB>
-                    <a:noFill/>
                   </a:tcPr>
                 </a:tc>
                 <a:tc>
@@ -6494,54 +8386,45 @@
                     <a:bodyPr/>
                     <a:lstStyle/>
                     <a:p>
-                      <a:pPr algn="ctr"/>
+                      <a:pPr algn="l"/>
                       <a:r>
-                        <a:rPr lang="en-US" sz="2600">
+                        <a:rPr lang="en-US" sz="1800" b="0" i="0" kern="1200">
+                          <a:solidFill>
+                            <a:srgbClr val="002150"/>
+                          </a:solidFill>
                           <a:effectLst/>
-                          <a:latin typeface="Adobe Clean UX" panose="020B0503020404020204" pitchFamily="34" charset="0"/>
+                          <a:latin typeface="+mn-lt"/>
+                          <a:ea typeface="+mn-ea"/>
+                          <a:cs typeface="+mn-cs"/>
                         </a:rPr>
-                        <a:t>Within-subject</a:t>
+                        <a:t>5-fold CV</a:t>
                       </a:r>
+                      <a:endParaRPr lang="en-VN">
+                        <a:solidFill>
+                          <a:srgbClr val="002150"/>
+                        </a:solidFill>
+                      </a:endParaRPr>
                     </a:p>
                   </a:txBody>
-                  <a:tcPr marL="126218" marR="126218" marT="126218" marB="126218" anchor="ctr">
-                    <a:lnL w="9525" cap="flat" cmpd="sng" algn="ctr">
+                  <a:tcPr anchor="ctr">
+                    <a:lnT w="12700" cap="flat" cmpd="sng" algn="ctr">
                       <a:solidFill>
-                        <a:srgbClr val="DDDDDD"/>
-                      </a:solidFill>
-                      <a:prstDash val="solid"/>
-                      <a:round/>
-                      <a:headEnd type="none" w="med" len="med"/>
-                      <a:tailEnd type="none" w="med" len="med"/>
-                    </a:lnL>
-                    <a:lnR w="9525" cap="flat" cmpd="sng" algn="ctr">
-                      <a:solidFill>
-                        <a:srgbClr val="DDDDDD"/>
-                      </a:solidFill>
-                      <a:prstDash val="solid"/>
-                      <a:round/>
-                      <a:headEnd type="none" w="med" len="med"/>
-                      <a:tailEnd type="none" w="med" len="med"/>
-                    </a:lnR>
-                    <a:lnT w="9525" cap="flat" cmpd="sng" algn="ctr">
-                      <a:solidFill>
-                        <a:srgbClr val="DDDDDD"/>
+                        <a:schemeClr val="tx1"/>
                       </a:solidFill>
                       <a:prstDash val="solid"/>
                       <a:round/>
                       <a:headEnd type="none" w="med" len="med"/>
                       <a:tailEnd type="none" w="med" len="med"/>
                     </a:lnT>
-                    <a:lnB w="9525" cap="flat" cmpd="sng" algn="ctr">
+                    <a:lnB w="12700" cap="flat" cmpd="sng" algn="ctr">
                       <a:solidFill>
-                        <a:srgbClr val="DDDDDD"/>
+                        <a:schemeClr val="tx1"/>
                       </a:solidFill>
                       <a:prstDash val="solid"/>
                       <a:round/>
                       <a:headEnd type="none" w="med" len="med"/>
                       <a:tailEnd type="none" w="med" len="med"/>
                     </a:lnB>
-                    <a:noFill/>
                   </a:tcPr>
                 </a:tc>
                 <a:tc>
@@ -6549,59 +8432,388 @@
                     <a:bodyPr/>
                     <a:lstStyle/>
                     <a:p>
-                      <a:pPr algn="ctr"/>
+                      <a:pPr algn="l"/>
                       <a:r>
-                        <a:rPr lang="en-VN" sz="2600">
+                        <a:rPr lang="en-VN" sz="1800" b="0" i="0" kern="1200">
+                          <a:solidFill>
+                            <a:srgbClr val="002150"/>
+                          </a:solidFill>
                           <a:effectLst/>
-                          <a:latin typeface="Adobe Clean UX" panose="020B0503020404020204" pitchFamily="34" charset="0"/>
+                          <a:latin typeface="+mn-lt"/>
+                          <a:ea typeface="+mn-ea"/>
+                          <a:cs typeface="+mn-cs"/>
                         </a:rPr>
-                        <a:t>42.1%</a:t>
+                        <a:t>61.44%</a:t>
                       </a:r>
+                      <a:endParaRPr lang="en-VN">
+                        <a:solidFill>
+                          <a:srgbClr val="002150"/>
+                        </a:solidFill>
+                      </a:endParaRPr>
                     </a:p>
                   </a:txBody>
-                  <a:tcPr marL="126218" marR="126218" marT="126218" marB="126218" anchor="ctr">
-                    <a:lnL w="9525" cap="flat" cmpd="sng" algn="ctr">
+                  <a:tcPr anchor="ctr">
+                    <a:lnT w="12700" cap="flat" cmpd="sng" algn="ctr">
                       <a:solidFill>
-                        <a:srgbClr val="DDDDDD"/>
-                      </a:solidFill>
-                      <a:prstDash val="solid"/>
-                      <a:round/>
-                      <a:headEnd type="none" w="med" len="med"/>
-                      <a:tailEnd type="none" w="med" len="med"/>
-                    </a:lnL>
-                    <a:lnR w="9525" cap="flat" cmpd="sng" algn="ctr">
-                      <a:solidFill>
-                        <a:srgbClr val="DDDDDD"/>
-                      </a:solidFill>
-                      <a:prstDash val="solid"/>
-                      <a:round/>
-                      <a:headEnd type="none" w="med" len="med"/>
-                      <a:tailEnd type="none" w="med" len="med"/>
-                    </a:lnR>
-                    <a:lnT w="9525" cap="flat" cmpd="sng" algn="ctr">
-                      <a:solidFill>
-                        <a:srgbClr val="DDDDDD"/>
+                        <a:schemeClr val="tx1"/>
                       </a:solidFill>
                       <a:prstDash val="solid"/>
                       <a:round/>
                       <a:headEnd type="none" w="med" len="med"/>
                       <a:tailEnd type="none" w="med" len="med"/>
                     </a:lnT>
-                    <a:lnB w="9525" cap="flat" cmpd="sng" algn="ctr">
+                    <a:lnB w="12700" cap="flat" cmpd="sng" algn="ctr">
                       <a:solidFill>
-                        <a:srgbClr val="DDDDDD"/>
+                        <a:schemeClr val="tx1"/>
                       </a:solidFill>
                       <a:prstDash val="solid"/>
                       <a:round/>
                       <a:headEnd type="none" w="med" len="med"/>
                       <a:tailEnd type="none" w="med" len="med"/>
                     </a:lnB>
-                    <a:noFill/>
                   </a:tcPr>
                 </a:tc>
                 <a:extLst>
                   <a:ext uri="{0D108BD9-81ED-4DB2-BD59-A6C34878D82A}">
-                    <a16:rowId xmlns:a16="http://schemas.microsoft.com/office/drawing/2014/main" val="3372024158"/>
+                    <a16:rowId xmlns:a16="http://schemas.microsoft.com/office/drawing/2014/main" val="313414534"/>
+                  </a:ext>
+                </a:extLst>
+              </a:tr>
+              <a:tr h="744405">
+                <a:tc>
+                  <a:txBody>
+                    <a:bodyPr/>
+                    <a:lstStyle/>
+                    <a:p>
+                      <a:pPr marL="0" marR="0" lvl="0" indent="0" algn="l" defTabSz="914400" rtl="0" eaLnBrk="1" fontAlgn="auto" latinLnBrk="0" hangingPunct="1">
+                        <a:lnSpc>
+                          <a:spcPct val="100000"/>
+                        </a:lnSpc>
+                        <a:spcBef>
+                          <a:spcPts val="0"/>
+                        </a:spcBef>
+                        <a:spcAft>
+                          <a:spcPts val="0"/>
+                        </a:spcAft>
+                        <a:buClrTx/>
+                        <a:buSzTx/>
+                        <a:buFontTx/>
+                        <a:buNone/>
+                        <a:tabLst/>
+                        <a:defRPr/>
+                      </a:pPr>
+                      <a:r>
+                        <a:rPr lang="en-VN">
+                          <a:solidFill>
+                            <a:srgbClr val="002150"/>
+                          </a:solidFill>
+                        </a:rPr>
+                        <a:t>EEGNet + MIMED</a:t>
+                      </a:r>
+                    </a:p>
+                  </a:txBody>
+                  <a:tcPr anchor="ctr">
+                    <a:lnT w="12700" cap="flat" cmpd="sng" algn="ctr">
+                      <a:solidFill>
+                        <a:schemeClr val="tx1"/>
+                      </a:solidFill>
+                      <a:prstDash val="solid"/>
+                      <a:round/>
+                      <a:headEnd type="none" w="med" len="med"/>
+                      <a:tailEnd type="none" w="med" len="med"/>
+                    </a:lnT>
+                    <a:lnB w="12700" cap="flat" cmpd="sng" algn="ctr">
+                      <a:solidFill>
+                        <a:schemeClr val="tx1"/>
+                      </a:solidFill>
+                      <a:prstDash val="solid"/>
+                      <a:round/>
+                      <a:headEnd type="none" w="med" len="med"/>
+                      <a:tailEnd type="none" w="med" len="med"/>
+                    </a:lnB>
+                  </a:tcPr>
+                </a:tc>
+                <a:tc>
+                  <a:txBody>
+                    <a:bodyPr/>
+                    <a:lstStyle/>
+                    <a:p>
+                      <a:pPr marL="0" marR="0" lvl="0" indent="0" algn="l" defTabSz="914400" rtl="0" eaLnBrk="1" fontAlgn="auto" latinLnBrk="0" hangingPunct="1">
+                        <a:lnSpc>
+                          <a:spcPct val="100000"/>
+                        </a:lnSpc>
+                        <a:spcBef>
+                          <a:spcPts val="0"/>
+                        </a:spcBef>
+                        <a:spcAft>
+                          <a:spcPts val="0"/>
+                        </a:spcAft>
+                        <a:buClrTx/>
+                        <a:buSzTx/>
+                        <a:buFontTx/>
+                        <a:buNone/>
+                        <a:tabLst/>
+                        <a:defRPr/>
+                      </a:pPr>
+                      <a:r>
+                        <a:rPr lang="en-VN">
+                          <a:solidFill>
+                            <a:srgbClr val="002150"/>
+                          </a:solidFill>
+                        </a:rPr>
+                        <a:t>2-class</a:t>
+                      </a:r>
+                    </a:p>
+                  </a:txBody>
+                  <a:tcPr anchor="ctr">
+                    <a:lnT w="12700" cap="flat" cmpd="sng" algn="ctr">
+                      <a:solidFill>
+                        <a:schemeClr val="tx1"/>
+                      </a:solidFill>
+                      <a:prstDash val="solid"/>
+                      <a:round/>
+                      <a:headEnd type="none" w="med" len="med"/>
+                      <a:tailEnd type="none" w="med" len="med"/>
+                    </a:lnT>
+                    <a:lnB w="12700" cap="flat" cmpd="sng" algn="ctr">
+                      <a:solidFill>
+                        <a:schemeClr val="tx1"/>
+                      </a:solidFill>
+                      <a:prstDash val="solid"/>
+                      <a:round/>
+                      <a:headEnd type="none" w="med" len="med"/>
+                      <a:tailEnd type="none" w="med" len="med"/>
+                    </a:lnB>
+                  </a:tcPr>
+                </a:tc>
+                <a:tc>
+                  <a:txBody>
+                    <a:bodyPr/>
+                    <a:lstStyle/>
+                    <a:p>
+                      <a:pPr algn="l"/>
+                      <a:r>
+                        <a:rPr lang="en-VN">
+                          <a:solidFill>
+                            <a:srgbClr val="002150"/>
+                          </a:solidFill>
+                        </a:rPr>
+                        <a:t>LOTO</a:t>
+                      </a:r>
+                    </a:p>
+                  </a:txBody>
+                  <a:tcPr anchor="ctr">
+                    <a:lnT w="12700" cap="flat" cmpd="sng" algn="ctr">
+                      <a:solidFill>
+                        <a:schemeClr val="tx1"/>
+                      </a:solidFill>
+                      <a:prstDash val="solid"/>
+                      <a:round/>
+                      <a:headEnd type="none" w="med" len="med"/>
+                      <a:tailEnd type="none" w="med" len="med"/>
+                    </a:lnT>
+                    <a:lnB w="12700" cap="flat" cmpd="sng" algn="ctr">
+                      <a:solidFill>
+                        <a:schemeClr val="tx1"/>
+                      </a:solidFill>
+                      <a:prstDash val="solid"/>
+                      <a:round/>
+                      <a:headEnd type="none" w="med" len="med"/>
+                      <a:tailEnd type="none" w="med" len="med"/>
+                    </a:lnB>
+                  </a:tcPr>
+                </a:tc>
+                <a:tc>
+                  <a:txBody>
+                    <a:bodyPr/>
+                    <a:lstStyle/>
+                    <a:p>
+                      <a:pPr algn="l"/>
+                      <a:r>
+                        <a:rPr lang="en-VN">
+                          <a:solidFill>
+                            <a:srgbClr val="002150"/>
+                          </a:solidFill>
+                        </a:rPr>
+                        <a:t>71.67%</a:t>
+                      </a:r>
+                    </a:p>
+                  </a:txBody>
+                  <a:tcPr anchor="ctr">
+                    <a:lnT w="12700" cap="flat" cmpd="sng" algn="ctr">
+                      <a:solidFill>
+                        <a:schemeClr val="tx1"/>
+                      </a:solidFill>
+                      <a:prstDash val="solid"/>
+                      <a:round/>
+                      <a:headEnd type="none" w="med" len="med"/>
+                      <a:tailEnd type="none" w="med" len="med"/>
+                    </a:lnT>
+                    <a:lnB w="12700" cap="flat" cmpd="sng" algn="ctr">
+                      <a:solidFill>
+                        <a:schemeClr val="tx1"/>
+                      </a:solidFill>
+                      <a:prstDash val="solid"/>
+                      <a:round/>
+                      <a:headEnd type="none" w="med" len="med"/>
+                      <a:tailEnd type="none" w="med" len="med"/>
+                    </a:lnB>
+                  </a:tcPr>
+                </a:tc>
+                <a:extLst>
+                  <a:ext uri="{0D108BD9-81ED-4DB2-BD59-A6C34878D82A}">
+                    <a16:rowId xmlns:a16="http://schemas.microsoft.com/office/drawing/2014/main" val="2357774600"/>
+                  </a:ext>
+                </a:extLst>
+              </a:tr>
+              <a:tr h="572554">
+                <a:tc>
+                  <a:txBody>
+                    <a:bodyPr/>
+                    <a:lstStyle/>
+                    <a:p>
+                      <a:pPr marL="0" marR="0" lvl="0" indent="0" algn="l" defTabSz="914400" rtl="0" eaLnBrk="1" fontAlgn="auto" latinLnBrk="0" hangingPunct="1">
+                        <a:lnSpc>
+                          <a:spcPct val="100000"/>
+                        </a:lnSpc>
+                        <a:spcBef>
+                          <a:spcPts val="0"/>
+                        </a:spcBef>
+                        <a:spcAft>
+                          <a:spcPts val="0"/>
+                        </a:spcAft>
+                        <a:buClrTx/>
+                        <a:buSzTx/>
+                        <a:buFontTx/>
+                        <a:buNone/>
+                        <a:tabLst/>
+                        <a:defRPr/>
+                      </a:pPr>
+                      <a:r>
+                        <a:rPr lang="en-VN">
+                          <a:solidFill>
+                            <a:srgbClr val="002150"/>
+                          </a:solidFill>
+                        </a:rPr>
+                        <a:t>EEGNet + BCI IV 2a then finetuned on MIMED</a:t>
+                      </a:r>
+                    </a:p>
+                  </a:txBody>
+                  <a:tcPr anchor="ctr">
+                    <a:lnT w="12700" cap="flat" cmpd="sng" algn="ctr">
+                      <a:solidFill>
+                        <a:schemeClr val="tx1"/>
+                      </a:solidFill>
+                      <a:prstDash val="solid"/>
+                      <a:round/>
+                      <a:headEnd type="none" w="med" len="med"/>
+                      <a:tailEnd type="none" w="med" len="med"/>
+                    </a:lnT>
+                  </a:tcPr>
+                </a:tc>
+                <a:tc>
+                  <a:txBody>
+                    <a:bodyPr/>
+                    <a:lstStyle/>
+                    <a:p>
+                      <a:pPr marL="0" marR="0" lvl="0" indent="0" algn="l" defTabSz="914400" rtl="0" eaLnBrk="1" fontAlgn="auto" latinLnBrk="0" hangingPunct="1">
+                        <a:lnSpc>
+                          <a:spcPct val="100000"/>
+                        </a:lnSpc>
+                        <a:spcBef>
+                          <a:spcPts val="0"/>
+                        </a:spcBef>
+                        <a:spcAft>
+                          <a:spcPts val="0"/>
+                        </a:spcAft>
+                        <a:buClrTx/>
+                        <a:buSzTx/>
+                        <a:buFontTx/>
+                        <a:buNone/>
+                        <a:tabLst/>
+                        <a:defRPr/>
+                      </a:pPr>
+                      <a:r>
+                        <a:rPr lang="en-VN">
+                          <a:solidFill>
+                            <a:srgbClr val="002150"/>
+                          </a:solidFill>
+                        </a:rPr>
+                        <a:t>2-class</a:t>
+                      </a:r>
+                    </a:p>
+                  </a:txBody>
+                  <a:tcPr anchor="ctr">
+                    <a:lnT w="12700" cap="flat" cmpd="sng" algn="ctr">
+                      <a:solidFill>
+                        <a:schemeClr val="tx1"/>
+                      </a:solidFill>
+                      <a:prstDash val="solid"/>
+                      <a:round/>
+                      <a:headEnd type="none" w="med" len="med"/>
+                      <a:tailEnd type="none" w="med" len="med"/>
+                    </a:lnT>
+                  </a:tcPr>
+                </a:tc>
+                <a:tc>
+                  <a:txBody>
+                    <a:bodyPr/>
+                    <a:lstStyle/>
+                    <a:p>
+                      <a:pPr algn="l"/>
+                      <a:r>
+                        <a:rPr lang="en-VN">
+                          <a:solidFill>
+                            <a:srgbClr val="002150"/>
+                          </a:solidFill>
+                        </a:rPr>
+                        <a:t>LOTO</a:t>
+                      </a:r>
+                    </a:p>
+                  </a:txBody>
+                  <a:tcPr anchor="ctr">
+                    <a:lnT w="12700" cap="flat" cmpd="sng" algn="ctr">
+                      <a:solidFill>
+                        <a:schemeClr val="tx1"/>
+                      </a:solidFill>
+                      <a:prstDash val="solid"/>
+                      <a:round/>
+                      <a:headEnd type="none" w="med" len="med"/>
+                      <a:tailEnd type="none" w="med" len="med"/>
+                    </a:lnT>
+                  </a:tcPr>
+                </a:tc>
+                <a:tc>
+                  <a:txBody>
+                    <a:bodyPr/>
+                    <a:lstStyle/>
+                    <a:p>
+                      <a:pPr algn="l"/>
+                      <a:r>
+                        <a:rPr lang="en-VN">
+                          <a:solidFill>
+                            <a:srgbClr val="002150"/>
+                          </a:solidFill>
+                        </a:rPr>
+                        <a:t>72.08%</a:t>
+                      </a:r>
+                    </a:p>
+                  </a:txBody>
+                  <a:tcPr anchor="ctr">
+                    <a:lnT w="12700" cap="flat" cmpd="sng" algn="ctr">
+                      <a:solidFill>
+                        <a:schemeClr val="tx1"/>
+                      </a:solidFill>
+                      <a:prstDash val="solid"/>
+                      <a:round/>
+                      <a:headEnd type="none" w="med" len="med"/>
+                      <a:tailEnd type="none" w="med" len="med"/>
+                    </a:lnT>
+                  </a:tcPr>
+                </a:tc>
+                <a:extLst>
+                  <a:ext uri="{0D108BD9-81ED-4DB2-BD59-A6C34878D82A}">
+                    <a16:rowId xmlns:a16="http://schemas.microsoft.com/office/drawing/2014/main" val="3740803259"/>
                   </a:ext>
                 </a:extLst>
               </a:tr>
@@ -6612,7 +8824,7 @@
     </p:spTree>
     <p:extLst>
       <p:ext uri="{BB962C8B-B14F-4D97-AF65-F5344CB8AC3E}">
-        <p14:creationId xmlns:p14="http://schemas.microsoft.com/office/powerpoint/2010/main" val="1679380640"/>
+        <p14:creationId xmlns:p14="http://schemas.microsoft.com/office/powerpoint/2010/main" val="861480267"/>
       </p:ext>
     </p:extLst>
   </p:cSld>
@@ -6622,7 +8834,1337 @@
 </p:sld>
 </file>
 
-<file path=ppt/slides/slide5.xml><?xml version="1.0" encoding="utf-8"?>
+<file path=ppt/slides/slide6.xml><?xml version="1.0" encoding="utf-8"?>
+<p:sld xmlns:a="http://schemas.openxmlformats.org/drawingml/2006/main" xmlns:r="http://schemas.openxmlformats.org/officeDocument/2006/relationships" xmlns:p="http://schemas.openxmlformats.org/presentationml/2006/main">
+  <p:cSld>
+    <p:spTree>
+      <p:nvGrpSpPr>
+        <p:cNvPr id="1" name="">
+          <a:extLst>
+            <a:ext uri="{FF2B5EF4-FFF2-40B4-BE49-F238E27FC236}">
+              <a16:creationId xmlns:a16="http://schemas.microsoft.com/office/drawing/2014/main" id="{CB2F2E2F-44A3-CB29-46A7-0AF49A7413B5}"/>
+            </a:ext>
+          </a:extLst>
+        </p:cNvPr>
+        <p:cNvGrpSpPr/>
+        <p:nvPr/>
+      </p:nvGrpSpPr>
+      <p:grpSpPr>
+        <a:xfrm>
+          <a:off x="0" y="0"/>
+          <a:ext cx="0" cy="0"/>
+          <a:chOff x="0" y="0"/>
+          <a:chExt cx="0" cy="0"/>
+        </a:xfrm>
+      </p:grpSpPr>
+      <p:sp>
+        <p:nvSpPr>
+          <p:cNvPr id="22" name="TextBox 22">
+            <a:extLst>
+              <a:ext uri="{FF2B5EF4-FFF2-40B4-BE49-F238E27FC236}">
+                <a16:creationId xmlns:a16="http://schemas.microsoft.com/office/drawing/2014/main" id="{93B19A55-FAE7-2DC7-12EE-BBD573D8FE3F}"/>
+              </a:ext>
+            </a:extLst>
+          </p:cNvPr>
+          <p:cNvSpPr txBox="1"/>
+          <p:nvPr/>
+        </p:nvSpPr>
+        <p:spPr>
+          <a:xfrm>
+            <a:off x="1104903" y="1589147"/>
+            <a:ext cx="5197969" cy="663195"/>
+          </a:xfrm>
+          <a:prstGeom prst="rect">
+            <a:avLst/>
+          </a:prstGeom>
+        </p:spPr>
+        <p:txBody>
+          <a:bodyPr wrap="square" lIns="0" tIns="0" rIns="0" bIns="0" rtlCol="0" anchor="t">
+            <a:spAutoFit/>
+          </a:bodyPr>
+          <a:lstStyle/>
+          <a:p>
+            <a:pPr marL="0" lvl="0" indent="0" algn="l">
+              <a:lnSpc>
+                <a:spcPts val="4601"/>
+              </a:lnSpc>
+            </a:pPr>
+            <a:r>
+              <a:rPr lang="en-US" sz="6000" b="1" spc="-77">
+                <a:solidFill>
+                  <a:srgbClr val="002150"/>
+                </a:solidFill>
+                <a:latin typeface="League Spartan"/>
+                <a:ea typeface="League Spartan"/>
+                <a:cs typeface="League Spartan"/>
+                <a:sym typeface="League Spartan"/>
+              </a:rPr>
+              <a:t>I. Finished tasks</a:t>
+            </a:r>
+          </a:p>
+        </p:txBody>
+      </p:sp>
+      <p:sp>
+        <p:nvSpPr>
+          <p:cNvPr id="26" name="AutoShape 26">
+            <a:extLst>
+              <a:ext uri="{FF2B5EF4-FFF2-40B4-BE49-F238E27FC236}">
+                <a16:creationId xmlns:a16="http://schemas.microsoft.com/office/drawing/2014/main" id="{570DC90E-7232-4EC8-E3AF-B1912D39565C}"/>
+              </a:ext>
+            </a:extLst>
+          </p:cNvPr>
+          <p:cNvSpPr/>
+          <p:nvPr/>
+        </p:nvSpPr>
+        <p:spPr>
+          <a:xfrm flipV="1">
+            <a:off x="11947020" y="1194282"/>
+            <a:ext cx="0" cy="2116120"/>
+          </a:xfrm>
+          <a:prstGeom prst="line">
+            <a:avLst/>
+          </a:prstGeom>
+          <a:ln w="9525" cap="flat">
+            <a:solidFill>
+              <a:srgbClr val="F7E7D7"/>
+            </a:solidFill>
+            <a:prstDash val="sysDot"/>
+            <a:headEnd type="none" w="sm" len="sm"/>
+            <a:tailEnd type="none" w="sm" len="sm"/>
+          </a:ln>
+        </p:spPr>
+        <p:txBody>
+          <a:bodyPr/>
+          <a:lstStyle/>
+          <a:p>
+            <a:endParaRPr lang="en-VN"/>
+          </a:p>
+        </p:txBody>
+      </p:sp>
+      <p:grpSp>
+        <p:nvGrpSpPr>
+          <p:cNvPr id="28" name="Group 28">
+            <a:extLst>
+              <a:ext uri="{FF2B5EF4-FFF2-40B4-BE49-F238E27FC236}">
+                <a16:creationId xmlns:a16="http://schemas.microsoft.com/office/drawing/2014/main" id="{8814EACA-3159-E13E-A693-C9DAB110EDC5}"/>
+              </a:ext>
+            </a:extLst>
+          </p:cNvPr>
+          <p:cNvGrpSpPr>
+            <a:grpSpLocks/>
+          </p:cNvGrpSpPr>
+          <p:nvPr/>
+        </p:nvGrpSpPr>
+        <p:grpSpPr>
+          <a:xfrm>
+            <a:off x="0" y="-719504"/>
+            <a:ext cx="6768300" cy="1330380"/>
+            <a:chOff x="0" y="-38100"/>
+            <a:chExt cx="1782597" cy="383810"/>
+          </a:xfrm>
+        </p:grpSpPr>
+        <p:sp>
+          <p:nvSpPr>
+            <p:cNvPr id="29" name="Freeform 29">
+              <a:extLst>
+                <a:ext uri="{FF2B5EF4-FFF2-40B4-BE49-F238E27FC236}">
+                  <a16:creationId xmlns:a16="http://schemas.microsoft.com/office/drawing/2014/main" id="{78F85B52-1460-D766-BA9B-757252EEE1BE}"/>
+                </a:ext>
+              </a:extLst>
+            </p:cNvPr>
+            <p:cNvSpPr>
+              <a:spLocks/>
+            </p:cNvSpPr>
+            <p:nvPr/>
+          </p:nvSpPr>
+          <p:spPr>
+            <a:xfrm>
+              <a:off x="0" y="-38100"/>
+              <a:ext cx="1782597" cy="383810"/>
+            </a:xfrm>
+            <a:custGeom>
+              <a:avLst/>
+              <a:gdLst/>
+              <a:ahLst/>
+              <a:cxnLst/>
+              <a:rect l="l" t="t" r="r" b="b"/>
+              <a:pathLst>
+                <a:path w="1782597" h="345710">
+                  <a:moveTo>
+                    <a:pt x="0" y="0"/>
+                  </a:moveTo>
+                  <a:lnTo>
+                    <a:pt x="1782597" y="0"/>
+                  </a:lnTo>
+                  <a:lnTo>
+                    <a:pt x="1782597" y="345710"/>
+                  </a:lnTo>
+                  <a:lnTo>
+                    <a:pt x="0" y="345710"/>
+                  </a:lnTo>
+                  <a:close/>
+                </a:path>
+              </a:pathLst>
+            </a:custGeom>
+            <a:solidFill>
+              <a:srgbClr val="002250"/>
+            </a:solidFill>
+          </p:spPr>
+          <p:txBody>
+            <a:bodyPr/>
+            <a:lstStyle/>
+            <a:p>
+              <a:endParaRPr lang="en-VN"/>
+            </a:p>
+          </p:txBody>
+        </p:sp>
+        <p:sp>
+          <p:nvSpPr>
+            <p:cNvPr id="30" name="TextBox 30">
+              <a:extLst>
+                <a:ext uri="{FF2B5EF4-FFF2-40B4-BE49-F238E27FC236}">
+                  <a16:creationId xmlns:a16="http://schemas.microsoft.com/office/drawing/2014/main" id="{E33C9693-4F25-D316-5C21-4DC4185977A3}"/>
+                </a:ext>
+              </a:extLst>
+            </p:cNvPr>
+            <p:cNvSpPr txBox="1">
+              <a:spLocks/>
+            </p:cNvSpPr>
+            <p:nvPr/>
+          </p:nvSpPr>
+          <p:spPr>
+            <a:xfrm>
+              <a:off x="0" y="-38100"/>
+              <a:ext cx="1782597" cy="383810"/>
+            </a:xfrm>
+            <a:prstGeom prst="rect">
+              <a:avLst/>
+            </a:prstGeom>
+          </p:spPr>
+          <p:txBody>
+            <a:bodyPr lIns="50800" tIns="50800" rIns="50800" bIns="50800" rtlCol="0" anchor="ctr"/>
+            <a:lstStyle/>
+            <a:p>
+              <a:pPr algn="ctr">
+                <a:lnSpc>
+                  <a:spcPts val="2659"/>
+                </a:lnSpc>
+              </a:pPr>
+              <a:endParaRPr/>
+            </a:p>
+          </p:txBody>
+        </p:sp>
+      </p:grpSp>
+      <p:pic>
+        <p:nvPicPr>
+          <p:cNvPr id="41" name="Picture 40">
+            <a:extLst>
+              <a:ext uri="{FF2B5EF4-FFF2-40B4-BE49-F238E27FC236}">
+                <a16:creationId xmlns:a16="http://schemas.microsoft.com/office/drawing/2014/main" id="{6425F83A-BBF2-2F89-3134-DAE7D552DCE6}"/>
+              </a:ext>
+            </a:extLst>
+          </p:cNvPr>
+          <p:cNvPicPr>
+            <a:picLocks noChangeAspect="1"/>
+          </p:cNvPicPr>
+          <p:nvPr/>
+        </p:nvPicPr>
+        <p:blipFill>
+          <a:blip r:embed="rId3">
+            <a:extLst>
+              <a:ext uri="{28A0092B-C50C-407E-A947-70E740481C1C}">
+                <a14:useLocalDpi xmlns:a14="http://schemas.microsoft.com/office/drawing/2010/main" val="0"/>
+              </a:ext>
+            </a:extLst>
+          </a:blip>
+          <a:stretch>
+            <a:fillRect/>
+          </a:stretch>
+        </p:blipFill>
+        <p:spPr>
+          <a:xfrm>
+            <a:off x="6768300" y="-748114"/>
+            <a:ext cx="11519700" cy="1358990"/>
+          </a:xfrm>
+          <a:prstGeom prst="rect">
+            <a:avLst/>
+          </a:prstGeom>
+        </p:spPr>
+      </p:pic>
+      <p:sp>
+        <p:nvSpPr>
+          <p:cNvPr id="4" name="TextBox 3">
+            <a:extLst>
+              <a:ext uri="{FF2B5EF4-FFF2-40B4-BE49-F238E27FC236}">
+                <a16:creationId xmlns:a16="http://schemas.microsoft.com/office/drawing/2014/main" id="{E4EF5788-6DCA-A4C6-5DAC-51DBC4D99CD8}"/>
+              </a:ext>
+            </a:extLst>
+          </p:cNvPr>
+          <p:cNvSpPr txBox="1"/>
+          <p:nvPr/>
+        </p:nvSpPr>
+        <p:spPr>
+          <a:xfrm>
+            <a:off x="1730872" y="2400190"/>
+            <a:ext cx="9144000" cy="667234"/>
+          </a:xfrm>
+          <a:prstGeom prst="rect">
+            <a:avLst/>
+          </a:prstGeom>
+          <a:noFill/>
+        </p:spPr>
+        <p:txBody>
+          <a:bodyPr wrap="square">
+            <a:spAutoFit/>
+          </a:bodyPr>
+          <a:lstStyle/>
+          <a:p>
+            <a:pPr marL="0" lvl="0" indent="0" algn="l">
+              <a:lnSpc>
+                <a:spcPts val="4601"/>
+              </a:lnSpc>
+            </a:pPr>
+            <a:r>
+              <a:rPr lang="en-US" sz="3200" b="1" spc="-77">
+                <a:solidFill>
+                  <a:srgbClr val="002150"/>
+                </a:solidFill>
+                <a:latin typeface="League Spartan SemiBold" pitchFamily="2" charset="77"/>
+                <a:ea typeface="League Spartan"/>
+                <a:cs typeface="League Spartan"/>
+                <a:sym typeface="League Spartan"/>
+              </a:rPr>
+              <a:t>2. Traditional Calibrating Method Design </a:t>
+            </a:r>
+            <a:r>
+              <a:rPr lang="en-US" sz="3200" b="1" spc="-77" baseline="30000">
+                <a:solidFill>
+                  <a:srgbClr val="002150"/>
+                </a:solidFill>
+                <a:latin typeface="League Spartan SemiBold" pitchFamily="2" charset="77"/>
+                <a:ea typeface="League Spartan"/>
+                <a:cs typeface="League Spartan"/>
+                <a:sym typeface="League Spartan"/>
+              </a:rPr>
+              <a:t>[STP11] </a:t>
+            </a:r>
+            <a:r>
+              <a:rPr lang="en-US" sz="3200" b="1" spc="-77">
+                <a:solidFill>
+                  <a:srgbClr val="002150"/>
+                </a:solidFill>
+                <a:latin typeface="League Spartan SemiBold" pitchFamily="2" charset="77"/>
+                <a:ea typeface="League Spartan"/>
+                <a:cs typeface="League Spartan"/>
+                <a:sym typeface="League Spartan"/>
+              </a:rPr>
+              <a:t> - 100%</a:t>
+            </a:r>
+            <a:endParaRPr lang="en-US" sz="3200" b="1" spc="-77" baseline="30000">
+              <a:solidFill>
+                <a:srgbClr val="002150"/>
+              </a:solidFill>
+              <a:latin typeface="League Spartan SemiBold" pitchFamily="2" charset="77"/>
+              <a:ea typeface="League Spartan"/>
+              <a:cs typeface="League Spartan"/>
+              <a:sym typeface="League Spartan"/>
+            </a:endParaRPr>
+          </a:p>
+        </p:txBody>
+      </p:sp>
+      <p:sp>
+        <p:nvSpPr>
+          <p:cNvPr id="8" name="TextBox 7">
+            <a:extLst>
+              <a:ext uri="{FF2B5EF4-FFF2-40B4-BE49-F238E27FC236}">
+                <a16:creationId xmlns:a16="http://schemas.microsoft.com/office/drawing/2014/main" id="{72C6C1B7-4A9F-6BA8-38A5-E4C41770F446}"/>
+              </a:ext>
+            </a:extLst>
+          </p:cNvPr>
+          <p:cNvSpPr txBox="1"/>
+          <p:nvPr/>
+        </p:nvSpPr>
+        <p:spPr>
+          <a:xfrm>
+            <a:off x="1730871" y="3361411"/>
+            <a:ext cx="14575927" cy="2929456"/>
+          </a:xfrm>
+          <a:prstGeom prst="rect">
+            <a:avLst/>
+          </a:prstGeom>
+          <a:noFill/>
+        </p:spPr>
+        <p:txBody>
+          <a:bodyPr wrap="square" rtlCol="0">
+            <a:spAutoFit/>
+          </a:bodyPr>
+          <a:lstStyle/>
+          <a:p>
+            <a:pPr marL="457200" indent="-457200">
+              <a:lnSpc>
+                <a:spcPct val="120000"/>
+              </a:lnSpc>
+              <a:buFontTx/>
+              <a:buChar char="-"/>
+            </a:pPr>
+            <a:r>
+              <a:rPr lang="en-US" sz="2600" spc="-64">
+                <a:solidFill>
+                  <a:srgbClr val="002250"/>
+                </a:solidFill>
+                <a:latin typeface="Adobe Clean UX" panose="020B0503020404020204" pitchFamily="34" charset="0"/>
+              </a:rPr>
+              <a:t>I have implemented 2 desktop applications to support the experimental pipeline</a:t>
+            </a:r>
+          </a:p>
+          <a:p>
+            <a:pPr marL="457200" indent="-457200">
+              <a:lnSpc>
+                <a:spcPct val="120000"/>
+              </a:lnSpc>
+              <a:buFontTx/>
+              <a:buChar char="-"/>
+            </a:pPr>
+            <a:r>
+              <a:rPr lang="en-US" sz="2600" spc="-64">
+                <a:solidFill>
+                  <a:srgbClr val="002250"/>
+                </a:solidFill>
+                <a:latin typeface="Adobe Clean UX" panose="020B0503020404020204" pitchFamily="34" charset="0"/>
+              </a:rPr>
+              <a:t>The</a:t>
+            </a:r>
+            <a:r>
+              <a:rPr lang="en-US" sz="2600" b="1" spc="-64">
+                <a:solidFill>
+                  <a:srgbClr val="002250"/>
+                </a:solidFill>
+                <a:latin typeface="Adobe Clean UX" panose="020B0503020404020204" pitchFamily="34" charset="0"/>
+              </a:rPr>
+              <a:t> Data Collection Tool </a:t>
+            </a:r>
+            <a:r>
+              <a:rPr lang="en-US" sz="2600" spc="-64">
+                <a:solidFill>
+                  <a:srgbClr val="002250"/>
+                </a:solidFill>
+                <a:latin typeface="Adobe Clean UX" panose="020B0503020404020204" pitchFamily="34" charset="0"/>
+              </a:rPr>
+              <a:t>guides participants through a cued EEG recording protocol across configurable blocks and trials, automatically saving labeled data for model training. </a:t>
+            </a:r>
+          </a:p>
+          <a:p>
+            <a:pPr marL="457200" indent="-457200">
+              <a:lnSpc>
+                <a:spcPct val="120000"/>
+              </a:lnSpc>
+              <a:buFontTx/>
+              <a:buChar char="-"/>
+            </a:pPr>
+            <a:r>
+              <a:rPr lang="en-US" sz="2600" spc="-64">
+                <a:solidFill>
+                  <a:srgbClr val="002250"/>
+                </a:solidFill>
+                <a:latin typeface="Adobe Clean UX" panose="020B0503020404020204" pitchFamily="34" charset="0"/>
+              </a:rPr>
+              <a:t>The </a:t>
+            </a:r>
+            <a:r>
+              <a:rPr lang="en-US" sz="2600" b="1" spc="-64">
+                <a:solidFill>
+                  <a:srgbClr val="002250"/>
+                </a:solidFill>
+                <a:latin typeface="Adobe Clean UX" panose="020B0503020404020204" pitchFamily="34" charset="0"/>
+              </a:rPr>
+              <a:t>Live Monitor Tool </a:t>
+            </a:r>
+            <a:r>
+              <a:rPr lang="en-US" sz="2600" spc="-64">
+                <a:solidFill>
+                  <a:srgbClr val="002250"/>
+                </a:solidFill>
+                <a:latin typeface="Adobe Clean UX" panose="020B0503020404020204" pitchFamily="34" charset="0"/>
+              </a:rPr>
+              <a:t>performs real-time motor imagery classification by streaming EEG data into a sliding 4-second window and continuously displaying predictions.</a:t>
+            </a:r>
+            <a:br>
+              <a:rPr lang="en-US" sz="2600" spc="-64">
+                <a:solidFill>
+                  <a:srgbClr val="002250"/>
+                </a:solidFill>
+                <a:latin typeface="Adobe Clean UX" panose="020B0503020404020204" pitchFamily="34" charset="0"/>
+              </a:rPr>
+            </a:br>
+            <a:endParaRPr lang="en-US" sz="2600" spc="-64">
+              <a:solidFill>
+                <a:srgbClr val="002250"/>
+              </a:solidFill>
+              <a:latin typeface="Adobe Clean UX" panose="020B0503020404020204" pitchFamily="34" charset="0"/>
+            </a:endParaRPr>
+          </a:p>
+        </p:txBody>
+      </p:sp>
+    </p:spTree>
+    <p:extLst>
+      <p:ext uri="{BB962C8B-B14F-4D97-AF65-F5344CB8AC3E}">
+        <p14:creationId xmlns:p14="http://schemas.microsoft.com/office/powerpoint/2010/main" val="712619066"/>
+      </p:ext>
+    </p:extLst>
+  </p:cSld>
+  <p:clrMapOvr>
+    <a:masterClrMapping/>
+  </p:clrMapOvr>
+</p:sld>
+</file>
+
+<file path=ppt/slides/slide7.xml><?xml version="1.0" encoding="utf-8"?>
+<p:sld xmlns:a="http://schemas.openxmlformats.org/drawingml/2006/main" xmlns:r="http://schemas.openxmlformats.org/officeDocument/2006/relationships" xmlns:p="http://schemas.openxmlformats.org/presentationml/2006/main">
+  <p:cSld>
+    <p:spTree>
+      <p:nvGrpSpPr>
+        <p:cNvPr id="1" name="">
+          <a:extLst>
+            <a:ext uri="{FF2B5EF4-FFF2-40B4-BE49-F238E27FC236}">
+              <a16:creationId xmlns:a16="http://schemas.microsoft.com/office/drawing/2014/main" id="{B85F11A2-ADA8-CE17-05B4-544FC378CF1D}"/>
+            </a:ext>
+          </a:extLst>
+        </p:cNvPr>
+        <p:cNvGrpSpPr/>
+        <p:nvPr/>
+      </p:nvGrpSpPr>
+      <p:grpSpPr>
+        <a:xfrm>
+          <a:off x="0" y="0"/>
+          <a:ext cx="0" cy="0"/>
+          <a:chOff x="0" y="0"/>
+          <a:chExt cx="0" cy="0"/>
+        </a:xfrm>
+      </p:grpSpPr>
+      <p:sp>
+        <p:nvSpPr>
+          <p:cNvPr id="22" name="TextBox 22">
+            <a:extLst>
+              <a:ext uri="{FF2B5EF4-FFF2-40B4-BE49-F238E27FC236}">
+                <a16:creationId xmlns:a16="http://schemas.microsoft.com/office/drawing/2014/main" id="{0D3DAB13-4A6B-D5C7-C9FF-E06E2739074D}"/>
+              </a:ext>
+            </a:extLst>
+          </p:cNvPr>
+          <p:cNvSpPr txBox="1"/>
+          <p:nvPr/>
+        </p:nvSpPr>
+        <p:spPr>
+          <a:xfrm>
+            <a:off x="1104903" y="1589147"/>
+            <a:ext cx="5197969" cy="663195"/>
+          </a:xfrm>
+          <a:prstGeom prst="rect">
+            <a:avLst/>
+          </a:prstGeom>
+        </p:spPr>
+        <p:txBody>
+          <a:bodyPr wrap="square" lIns="0" tIns="0" rIns="0" bIns="0" rtlCol="0" anchor="t">
+            <a:spAutoFit/>
+          </a:bodyPr>
+          <a:lstStyle/>
+          <a:p>
+            <a:pPr marL="0" lvl="0" indent="0" algn="l">
+              <a:lnSpc>
+                <a:spcPts val="4601"/>
+              </a:lnSpc>
+            </a:pPr>
+            <a:r>
+              <a:rPr lang="en-US" sz="6000" b="1" spc="-77">
+                <a:solidFill>
+                  <a:srgbClr val="002150"/>
+                </a:solidFill>
+                <a:latin typeface="League Spartan"/>
+                <a:ea typeface="League Spartan"/>
+                <a:cs typeface="League Spartan"/>
+                <a:sym typeface="League Spartan"/>
+              </a:rPr>
+              <a:t>I. Finished tasks</a:t>
+            </a:r>
+          </a:p>
+        </p:txBody>
+      </p:sp>
+      <p:sp>
+        <p:nvSpPr>
+          <p:cNvPr id="26" name="AutoShape 26">
+            <a:extLst>
+              <a:ext uri="{FF2B5EF4-FFF2-40B4-BE49-F238E27FC236}">
+                <a16:creationId xmlns:a16="http://schemas.microsoft.com/office/drawing/2014/main" id="{944AC377-A73C-B274-F00A-BA8E35883FC5}"/>
+              </a:ext>
+            </a:extLst>
+          </p:cNvPr>
+          <p:cNvSpPr/>
+          <p:nvPr/>
+        </p:nvSpPr>
+        <p:spPr>
+          <a:xfrm flipV="1">
+            <a:off x="11947020" y="1194282"/>
+            <a:ext cx="0" cy="2116120"/>
+          </a:xfrm>
+          <a:prstGeom prst="line">
+            <a:avLst/>
+          </a:prstGeom>
+          <a:ln w="9525" cap="flat">
+            <a:solidFill>
+              <a:srgbClr val="F7E7D7"/>
+            </a:solidFill>
+            <a:prstDash val="sysDot"/>
+            <a:headEnd type="none" w="sm" len="sm"/>
+            <a:tailEnd type="none" w="sm" len="sm"/>
+          </a:ln>
+        </p:spPr>
+        <p:txBody>
+          <a:bodyPr/>
+          <a:lstStyle/>
+          <a:p>
+            <a:endParaRPr lang="en-VN"/>
+          </a:p>
+        </p:txBody>
+      </p:sp>
+      <p:grpSp>
+        <p:nvGrpSpPr>
+          <p:cNvPr id="28" name="Group 28">
+            <a:extLst>
+              <a:ext uri="{FF2B5EF4-FFF2-40B4-BE49-F238E27FC236}">
+                <a16:creationId xmlns:a16="http://schemas.microsoft.com/office/drawing/2014/main" id="{2A27D053-45CD-0004-A7C5-9AC3141B01C1}"/>
+              </a:ext>
+            </a:extLst>
+          </p:cNvPr>
+          <p:cNvGrpSpPr>
+            <a:grpSpLocks/>
+          </p:cNvGrpSpPr>
+          <p:nvPr/>
+        </p:nvGrpSpPr>
+        <p:grpSpPr>
+          <a:xfrm>
+            <a:off x="0" y="-719504"/>
+            <a:ext cx="6768300" cy="1330380"/>
+            <a:chOff x="0" y="-38100"/>
+            <a:chExt cx="1782597" cy="383810"/>
+          </a:xfrm>
+        </p:grpSpPr>
+        <p:sp>
+          <p:nvSpPr>
+            <p:cNvPr id="29" name="Freeform 29">
+              <a:extLst>
+                <a:ext uri="{FF2B5EF4-FFF2-40B4-BE49-F238E27FC236}">
+                  <a16:creationId xmlns:a16="http://schemas.microsoft.com/office/drawing/2014/main" id="{5E9F8D55-06C8-A7C7-0469-28E5E4BFF3F9}"/>
+                </a:ext>
+              </a:extLst>
+            </p:cNvPr>
+            <p:cNvSpPr>
+              <a:spLocks/>
+            </p:cNvSpPr>
+            <p:nvPr/>
+          </p:nvSpPr>
+          <p:spPr>
+            <a:xfrm>
+              <a:off x="0" y="-38100"/>
+              <a:ext cx="1782597" cy="383810"/>
+            </a:xfrm>
+            <a:custGeom>
+              <a:avLst/>
+              <a:gdLst/>
+              <a:ahLst/>
+              <a:cxnLst/>
+              <a:rect l="l" t="t" r="r" b="b"/>
+              <a:pathLst>
+                <a:path w="1782597" h="345710">
+                  <a:moveTo>
+                    <a:pt x="0" y="0"/>
+                  </a:moveTo>
+                  <a:lnTo>
+                    <a:pt x="1782597" y="0"/>
+                  </a:lnTo>
+                  <a:lnTo>
+                    <a:pt x="1782597" y="345710"/>
+                  </a:lnTo>
+                  <a:lnTo>
+                    <a:pt x="0" y="345710"/>
+                  </a:lnTo>
+                  <a:close/>
+                </a:path>
+              </a:pathLst>
+            </a:custGeom>
+            <a:solidFill>
+              <a:srgbClr val="002250"/>
+            </a:solidFill>
+          </p:spPr>
+          <p:txBody>
+            <a:bodyPr/>
+            <a:lstStyle/>
+            <a:p>
+              <a:endParaRPr lang="en-VN"/>
+            </a:p>
+          </p:txBody>
+        </p:sp>
+        <p:sp>
+          <p:nvSpPr>
+            <p:cNvPr id="30" name="TextBox 30">
+              <a:extLst>
+                <a:ext uri="{FF2B5EF4-FFF2-40B4-BE49-F238E27FC236}">
+                  <a16:creationId xmlns:a16="http://schemas.microsoft.com/office/drawing/2014/main" id="{7B81B1A8-2386-8605-FAF2-2B494A4BAB3D}"/>
+                </a:ext>
+              </a:extLst>
+            </p:cNvPr>
+            <p:cNvSpPr txBox="1">
+              <a:spLocks/>
+            </p:cNvSpPr>
+            <p:nvPr/>
+          </p:nvSpPr>
+          <p:spPr>
+            <a:xfrm>
+              <a:off x="0" y="-38100"/>
+              <a:ext cx="1782597" cy="383810"/>
+            </a:xfrm>
+            <a:prstGeom prst="rect">
+              <a:avLst/>
+            </a:prstGeom>
+          </p:spPr>
+          <p:txBody>
+            <a:bodyPr lIns="50800" tIns="50800" rIns="50800" bIns="50800" rtlCol="0" anchor="ctr"/>
+            <a:lstStyle/>
+            <a:p>
+              <a:pPr algn="ctr">
+                <a:lnSpc>
+                  <a:spcPts val="2659"/>
+                </a:lnSpc>
+              </a:pPr>
+              <a:endParaRPr/>
+            </a:p>
+          </p:txBody>
+        </p:sp>
+      </p:grpSp>
+      <p:pic>
+        <p:nvPicPr>
+          <p:cNvPr id="41" name="Picture 40">
+            <a:extLst>
+              <a:ext uri="{FF2B5EF4-FFF2-40B4-BE49-F238E27FC236}">
+                <a16:creationId xmlns:a16="http://schemas.microsoft.com/office/drawing/2014/main" id="{4AE333AA-EF51-94F7-E843-C5BCA25DFF8A}"/>
+              </a:ext>
+            </a:extLst>
+          </p:cNvPr>
+          <p:cNvPicPr>
+            <a:picLocks noChangeAspect="1"/>
+          </p:cNvPicPr>
+          <p:nvPr/>
+        </p:nvPicPr>
+        <p:blipFill>
+          <a:blip r:embed="rId3">
+            <a:extLst>
+              <a:ext uri="{28A0092B-C50C-407E-A947-70E740481C1C}">
+                <a14:useLocalDpi xmlns:a14="http://schemas.microsoft.com/office/drawing/2010/main" val="0"/>
+              </a:ext>
+            </a:extLst>
+          </a:blip>
+          <a:stretch>
+            <a:fillRect/>
+          </a:stretch>
+        </p:blipFill>
+        <p:spPr>
+          <a:xfrm>
+            <a:off x="6768300" y="-748114"/>
+            <a:ext cx="11519700" cy="1358990"/>
+          </a:xfrm>
+          <a:prstGeom prst="rect">
+            <a:avLst/>
+          </a:prstGeom>
+        </p:spPr>
+      </p:pic>
+      <p:sp>
+        <p:nvSpPr>
+          <p:cNvPr id="4" name="TextBox 3">
+            <a:extLst>
+              <a:ext uri="{FF2B5EF4-FFF2-40B4-BE49-F238E27FC236}">
+                <a16:creationId xmlns:a16="http://schemas.microsoft.com/office/drawing/2014/main" id="{EDBFF015-369B-C746-2042-732D2AEEABFE}"/>
+              </a:ext>
+            </a:extLst>
+          </p:cNvPr>
+          <p:cNvSpPr txBox="1"/>
+          <p:nvPr/>
+        </p:nvSpPr>
+        <p:spPr>
+          <a:xfrm>
+            <a:off x="1730872" y="2400190"/>
+            <a:ext cx="9144000" cy="667234"/>
+          </a:xfrm>
+          <a:prstGeom prst="rect">
+            <a:avLst/>
+          </a:prstGeom>
+          <a:noFill/>
+        </p:spPr>
+        <p:txBody>
+          <a:bodyPr wrap="square">
+            <a:spAutoFit/>
+          </a:bodyPr>
+          <a:lstStyle/>
+          <a:p>
+            <a:pPr marL="0" lvl="0" indent="0" algn="l">
+              <a:lnSpc>
+                <a:spcPts val="4601"/>
+              </a:lnSpc>
+            </a:pPr>
+            <a:r>
+              <a:rPr lang="en-US" sz="3200" b="1" spc="-77">
+                <a:solidFill>
+                  <a:srgbClr val="002150"/>
+                </a:solidFill>
+                <a:latin typeface="League Spartan SemiBold" pitchFamily="2" charset="77"/>
+                <a:ea typeface="League Spartan"/>
+                <a:cs typeface="League Spartan"/>
+                <a:sym typeface="League Spartan"/>
+              </a:rPr>
+              <a:t>2. Traditional Calibrating Method Design </a:t>
+            </a:r>
+            <a:r>
+              <a:rPr lang="en-US" sz="3200" b="1" spc="-77" baseline="30000">
+                <a:solidFill>
+                  <a:srgbClr val="002150"/>
+                </a:solidFill>
+                <a:latin typeface="League Spartan SemiBold" pitchFamily="2" charset="77"/>
+                <a:ea typeface="League Spartan"/>
+                <a:cs typeface="League Spartan"/>
+                <a:sym typeface="League Spartan"/>
+              </a:rPr>
+              <a:t>[STP11] </a:t>
+            </a:r>
+            <a:r>
+              <a:rPr lang="en-US" sz="3200" b="1" spc="-77">
+                <a:solidFill>
+                  <a:srgbClr val="002150"/>
+                </a:solidFill>
+                <a:latin typeface="League Spartan SemiBold" pitchFamily="2" charset="77"/>
+                <a:ea typeface="League Spartan"/>
+                <a:cs typeface="League Spartan"/>
+                <a:sym typeface="League Spartan"/>
+              </a:rPr>
+              <a:t> - 100%</a:t>
+            </a:r>
+            <a:endParaRPr lang="en-US" sz="3200" b="1" spc="-77" baseline="30000">
+              <a:solidFill>
+                <a:srgbClr val="002150"/>
+              </a:solidFill>
+              <a:latin typeface="League Spartan SemiBold" pitchFamily="2" charset="77"/>
+              <a:ea typeface="League Spartan"/>
+              <a:cs typeface="League Spartan"/>
+              <a:sym typeface="League Spartan"/>
+            </a:endParaRPr>
+          </a:p>
+        </p:txBody>
+      </p:sp>
+      <p:pic>
+        <p:nvPicPr>
+          <p:cNvPr id="3" name="Picture 2" descr="A screenshot of a computer&#10;&#10;Description automatically generated">
+            <a:extLst>
+              <a:ext uri="{FF2B5EF4-FFF2-40B4-BE49-F238E27FC236}">
+                <a16:creationId xmlns:a16="http://schemas.microsoft.com/office/drawing/2014/main" id="{BE8D0B61-44DC-1823-E996-E37FF2323CB1}"/>
+              </a:ext>
+            </a:extLst>
+          </p:cNvPr>
+          <p:cNvPicPr>
+            <a:picLocks noChangeAspect="1"/>
+          </p:cNvPicPr>
+          <p:nvPr/>
+        </p:nvPicPr>
+        <p:blipFill>
+          <a:blip r:embed="rId4">
+            <a:extLst>
+              <a:ext uri="{28A0092B-C50C-407E-A947-70E740481C1C}">
+                <a14:useLocalDpi xmlns:a14="http://schemas.microsoft.com/office/drawing/2010/main" val="0"/>
+              </a:ext>
+            </a:extLst>
+          </a:blip>
+          <a:stretch>
+            <a:fillRect/>
+          </a:stretch>
+        </p:blipFill>
+        <p:spPr>
+          <a:xfrm>
+            <a:off x="1103044" y="3067424"/>
+            <a:ext cx="8595082" cy="6623895"/>
+          </a:xfrm>
+          <a:prstGeom prst="rect">
+            <a:avLst/>
+          </a:prstGeom>
+        </p:spPr>
+      </p:pic>
+      <p:pic>
+        <p:nvPicPr>
+          <p:cNvPr id="6" name="Picture 5" descr="A screenshot of a video recorder&#10;&#10;Description automatically generated">
+            <a:extLst>
+              <a:ext uri="{FF2B5EF4-FFF2-40B4-BE49-F238E27FC236}">
+                <a16:creationId xmlns:a16="http://schemas.microsoft.com/office/drawing/2014/main" id="{37112C30-426E-274E-ACA7-697EA3D9D384}"/>
+              </a:ext>
+            </a:extLst>
+          </p:cNvPr>
+          <p:cNvPicPr>
+            <a:picLocks noChangeAspect="1"/>
+          </p:cNvPicPr>
+          <p:nvPr/>
+        </p:nvPicPr>
+        <p:blipFill>
+          <a:blip r:embed="rId5">
+            <a:extLst>
+              <a:ext uri="{28A0092B-C50C-407E-A947-70E740481C1C}">
+                <a14:useLocalDpi xmlns:a14="http://schemas.microsoft.com/office/drawing/2010/main" val="0"/>
+              </a:ext>
+            </a:extLst>
+          </a:blip>
+          <a:stretch>
+            <a:fillRect/>
+          </a:stretch>
+        </p:blipFill>
+        <p:spPr>
+          <a:xfrm>
+            <a:off x="9244023" y="2933705"/>
+            <a:ext cx="8996923" cy="7023289"/>
+          </a:xfrm>
+          <a:prstGeom prst="rect">
+            <a:avLst/>
+          </a:prstGeom>
+        </p:spPr>
+      </p:pic>
+    </p:spTree>
+    <p:extLst>
+      <p:ext uri="{BB962C8B-B14F-4D97-AF65-F5344CB8AC3E}">
+        <p14:creationId xmlns:p14="http://schemas.microsoft.com/office/powerpoint/2010/main" val="783229794"/>
+      </p:ext>
+    </p:extLst>
+  </p:cSld>
+  <p:clrMapOvr>
+    <a:masterClrMapping/>
+  </p:clrMapOvr>
+</p:sld>
+</file>
+
+<file path=ppt/slides/slide8.xml><?xml version="1.0" encoding="utf-8"?>
+<p:sld xmlns:a="http://schemas.openxmlformats.org/drawingml/2006/main" xmlns:r="http://schemas.openxmlformats.org/officeDocument/2006/relationships" xmlns:p="http://schemas.openxmlformats.org/presentationml/2006/main">
+  <p:cSld>
+    <p:spTree>
+      <p:nvGrpSpPr>
+        <p:cNvPr id="1" name="">
+          <a:extLst>
+            <a:ext uri="{FF2B5EF4-FFF2-40B4-BE49-F238E27FC236}">
+              <a16:creationId xmlns:a16="http://schemas.microsoft.com/office/drawing/2014/main" id="{85FF7943-81F6-D11C-AB3E-E2ABC6975860}"/>
+            </a:ext>
+          </a:extLst>
+        </p:cNvPr>
+        <p:cNvGrpSpPr/>
+        <p:nvPr/>
+      </p:nvGrpSpPr>
+      <p:grpSpPr>
+        <a:xfrm>
+          <a:off x="0" y="0"/>
+          <a:ext cx="0" cy="0"/>
+          <a:chOff x="0" y="0"/>
+          <a:chExt cx="0" cy="0"/>
+        </a:xfrm>
+      </p:grpSpPr>
+      <p:sp>
+        <p:nvSpPr>
+          <p:cNvPr id="22" name="TextBox 22">
+            <a:extLst>
+              <a:ext uri="{FF2B5EF4-FFF2-40B4-BE49-F238E27FC236}">
+                <a16:creationId xmlns:a16="http://schemas.microsoft.com/office/drawing/2014/main" id="{EE939795-488B-6404-6FEF-6B5741FEBEF4}"/>
+              </a:ext>
+            </a:extLst>
+          </p:cNvPr>
+          <p:cNvSpPr txBox="1"/>
+          <p:nvPr/>
+        </p:nvSpPr>
+        <p:spPr>
+          <a:xfrm>
+            <a:off x="1104903" y="1589147"/>
+            <a:ext cx="5197969" cy="663195"/>
+          </a:xfrm>
+          <a:prstGeom prst="rect">
+            <a:avLst/>
+          </a:prstGeom>
+        </p:spPr>
+        <p:txBody>
+          <a:bodyPr wrap="square" lIns="0" tIns="0" rIns="0" bIns="0" rtlCol="0" anchor="t">
+            <a:spAutoFit/>
+          </a:bodyPr>
+          <a:lstStyle/>
+          <a:p>
+            <a:pPr marL="0" lvl="0" indent="0" algn="l">
+              <a:lnSpc>
+                <a:spcPts val="4601"/>
+              </a:lnSpc>
+            </a:pPr>
+            <a:r>
+              <a:rPr lang="en-US" sz="6000" b="1" spc="-77">
+                <a:solidFill>
+                  <a:srgbClr val="002150"/>
+                </a:solidFill>
+                <a:latin typeface="League Spartan"/>
+                <a:ea typeface="League Spartan"/>
+                <a:cs typeface="League Spartan"/>
+                <a:sym typeface="League Spartan"/>
+              </a:rPr>
+              <a:t>I. Finished tasks</a:t>
+            </a:r>
+          </a:p>
+        </p:txBody>
+      </p:sp>
+      <p:sp>
+        <p:nvSpPr>
+          <p:cNvPr id="26" name="AutoShape 26">
+            <a:extLst>
+              <a:ext uri="{FF2B5EF4-FFF2-40B4-BE49-F238E27FC236}">
+                <a16:creationId xmlns:a16="http://schemas.microsoft.com/office/drawing/2014/main" id="{23813453-6FBA-3F46-0CBF-7B0710883BC8}"/>
+              </a:ext>
+            </a:extLst>
+          </p:cNvPr>
+          <p:cNvSpPr/>
+          <p:nvPr/>
+        </p:nvSpPr>
+        <p:spPr>
+          <a:xfrm flipV="1">
+            <a:off x="11947020" y="1194282"/>
+            <a:ext cx="0" cy="2116120"/>
+          </a:xfrm>
+          <a:prstGeom prst="line">
+            <a:avLst/>
+          </a:prstGeom>
+          <a:ln w="9525" cap="flat">
+            <a:solidFill>
+              <a:srgbClr val="F7E7D7"/>
+            </a:solidFill>
+            <a:prstDash val="sysDot"/>
+            <a:headEnd type="none" w="sm" len="sm"/>
+            <a:tailEnd type="none" w="sm" len="sm"/>
+          </a:ln>
+        </p:spPr>
+        <p:txBody>
+          <a:bodyPr/>
+          <a:lstStyle/>
+          <a:p>
+            <a:endParaRPr lang="en-VN"/>
+          </a:p>
+        </p:txBody>
+      </p:sp>
+      <p:grpSp>
+        <p:nvGrpSpPr>
+          <p:cNvPr id="28" name="Group 28">
+            <a:extLst>
+              <a:ext uri="{FF2B5EF4-FFF2-40B4-BE49-F238E27FC236}">
+                <a16:creationId xmlns:a16="http://schemas.microsoft.com/office/drawing/2014/main" id="{DABE7AF0-0910-AA3D-0EE0-FBC8F6187900}"/>
+              </a:ext>
+            </a:extLst>
+          </p:cNvPr>
+          <p:cNvGrpSpPr>
+            <a:grpSpLocks/>
+          </p:cNvGrpSpPr>
+          <p:nvPr/>
+        </p:nvGrpSpPr>
+        <p:grpSpPr>
+          <a:xfrm>
+            <a:off x="0" y="-719504"/>
+            <a:ext cx="6768300" cy="1330380"/>
+            <a:chOff x="0" y="-38100"/>
+            <a:chExt cx="1782597" cy="383810"/>
+          </a:xfrm>
+        </p:grpSpPr>
+        <p:sp>
+          <p:nvSpPr>
+            <p:cNvPr id="29" name="Freeform 29">
+              <a:extLst>
+                <a:ext uri="{FF2B5EF4-FFF2-40B4-BE49-F238E27FC236}">
+                  <a16:creationId xmlns:a16="http://schemas.microsoft.com/office/drawing/2014/main" id="{9002E124-3710-F728-7395-8489CC55BE07}"/>
+                </a:ext>
+              </a:extLst>
+            </p:cNvPr>
+            <p:cNvSpPr>
+              <a:spLocks/>
+            </p:cNvSpPr>
+            <p:nvPr/>
+          </p:nvSpPr>
+          <p:spPr>
+            <a:xfrm>
+              <a:off x="0" y="-38100"/>
+              <a:ext cx="1782597" cy="383810"/>
+            </a:xfrm>
+            <a:custGeom>
+              <a:avLst/>
+              <a:gdLst/>
+              <a:ahLst/>
+              <a:cxnLst/>
+              <a:rect l="l" t="t" r="r" b="b"/>
+              <a:pathLst>
+                <a:path w="1782597" h="345710">
+                  <a:moveTo>
+                    <a:pt x="0" y="0"/>
+                  </a:moveTo>
+                  <a:lnTo>
+                    <a:pt x="1782597" y="0"/>
+                  </a:lnTo>
+                  <a:lnTo>
+                    <a:pt x="1782597" y="345710"/>
+                  </a:lnTo>
+                  <a:lnTo>
+                    <a:pt x="0" y="345710"/>
+                  </a:lnTo>
+                  <a:close/>
+                </a:path>
+              </a:pathLst>
+            </a:custGeom>
+            <a:solidFill>
+              <a:srgbClr val="002250"/>
+            </a:solidFill>
+          </p:spPr>
+          <p:txBody>
+            <a:bodyPr/>
+            <a:lstStyle/>
+            <a:p>
+              <a:endParaRPr lang="en-VN"/>
+            </a:p>
+          </p:txBody>
+        </p:sp>
+        <p:sp>
+          <p:nvSpPr>
+            <p:cNvPr id="30" name="TextBox 30">
+              <a:extLst>
+                <a:ext uri="{FF2B5EF4-FFF2-40B4-BE49-F238E27FC236}">
+                  <a16:creationId xmlns:a16="http://schemas.microsoft.com/office/drawing/2014/main" id="{3ECDF343-015F-BFAD-1450-FB0C3C033A15}"/>
+                </a:ext>
+              </a:extLst>
+            </p:cNvPr>
+            <p:cNvSpPr txBox="1">
+              <a:spLocks/>
+            </p:cNvSpPr>
+            <p:nvPr/>
+          </p:nvSpPr>
+          <p:spPr>
+            <a:xfrm>
+              <a:off x="0" y="-38100"/>
+              <a:ext cx="1782597" cy="383810"/>
+            </a:xfrm>
+            <a:prstGeom prst="rect">
+              <a:avLst/>
+            </a:prstGeom>
+          </p:spPr>
+          <p:txBody>
+            <a:bodyPr lIns="50800" tIns="50800" rIns="50800" bIns="50800" rtlCol="0" anchor="ctr"/>
+            <a:lstStyle/>
+            <a:p>
+              <a:pPr algn="ctr">
+                <a:lnSpc>
+                  <a:spcPts val="2659"/>
+                </a:lnSpc>
+              </a:pPr>
+              <a:endParaRPr/>
+            </a:p>
+          </p:txBody>
+        </p:sp>
+      </p:grpSp>
+      <p:pic>
+        <p:nvPicPr>
+          <p:cNvPr id="41" name="Picture 40">
+            <a:extLst>
+              <a:ext uri="{FF2B5EF4-FFF2-40B4-BE49-F238E27FC236}">
+                <a16:creationId xmlns:a16="http://schemas.microsoft.com/office/drawing/2014/main" id="{4295BEB4-61DC-3C75-1970-336BBBBE0A50}"/>
+              </a:ext>
+            </a:extLst>
+          </p:cNvPr>
+          <p:cNvPicPr>
+            <a:picLocks noChangeAspect="1"/>
+          </p:cNvPicPr>
+          <p:nvPr/>
+        </p:nvPicPr>
+        <p:blipFill>
+          <a:blip r:embed="rId3">
+            <a:extLst>
+              <a:ext uri="{28A0092B-C50C-407E-A947-70E740481C1C}">
+                <a14:useLocalDpi xmlns:a14="http://schemas.microsoft.com/office/drawing/2010/main" val="0"/>
+              </a:ext>
+            </a:extLst>
+          </a:blip>
+          <a:stretch>
+            <a:fillRect/>
+          </a:stretch>
+        </p:blipFill>
+        <p:spPr>
+          <a:xfrm>
+            <a:off x="6768300" y="-748114"/>
+            <a:ext cx="11519700" cy="1358990"/>
+          </a:xfrm>
+          <a:prstGeom prst="rect">
+            <a:avLst/>
+          </a:prstGeom>
+        </p:spPr>
+      </p:pic>
+      <p:sp>
+        <p:nvSpPr>
+          <p:cNvPr id="4" name="TextBox 3">
+            <a:extLst>
+              <a:ext uri="{FF2B5EF4-FFF2-40B4-BE49-F238E27FC236}">
+                <a16:creationId xmlns:a16="http://schemas.microsoft.com/office/drawing/2014/main" id="{94256ECF-4650-43B1-35CD-C2875E72B693}"/>
+              </a:ext>
+            </a:extLst>
+          </p:cNvPr>
+          <p:cNvSpPr txBox="1"/>
+          <p:nvPr/>
+        </p:nvSpPr>
+        <p:spPr>
+          <a:xfrm>
+            <a:off x="1730872" y="2400190"/>
+            <a:ext cx="9144000" cy="667234"/>
+          </a:xfrm>
+          <a:prstGeom prst="rect">
+            <a:avLst/>
+          </a:prstGeom>
+          <a:noFill/>
+        </p:spPr>
+        <p:txBody>
+          <a:bodyPr wrap="square">
+            <a:spAutoFit/>
+          </a:bodyPr>
+          <a:lstStyle/>
+          <a:p>
+            <a:pPr marL="0" lvl="0" indent="0" algn="l">
+              <a:lnSpc>
+                <a:spcPts val="4601"/>
+              </a:lnSpc>
+            </a:pPr>
+            <a:r>
+              <a:rPr lang="en-US" sz="3200" b="1" spc="-77">
+                <a:solidFill>
+                  <a:srgbClr val="002150"/>
+                </a:solidFill>
+                <a:latin typeface="League Spartan SemiBold" pitchFamily="2" charset="77"/>
+                <a:ea typeface="League Spartan"/>
+                <a:cs typeface="League Spartan"/>
+                <a:sym typeface="League Spartan"/>
+              </a:rPr>
+              <a:t>2. Traditional Calibrating Method Design </a:t>
+            </a:r>
+            <a:r>
+              <a:rPr lang="en-US" sz="3200" b="1" spc="-77" baseline="30000">
+                <a:solidFill>
+                  <a:srgbClr val="002150"/>
+                </a:solidFill>
+                <a:latin typeface="League Spartan SemiBold" pitchFamily="2" charset="77"/>
+                <a:ea typeface="League Spartan"/>
+                <a:cs typeface="League Spartan"/>
+                <a:sym typeface="League Spartan"/>
+              </a:rPr>
+              <a:t>[STP11] </a:t>
+            </a:r>
+            <a:r>
+              <a:rPr lang="en-US" sz="3200" b="1" spc="-77">
+                <a:solidFill>
+                  <a:srgbClr val="002150"/>
+                </a:solidFill>
+                <a:latin typeface="League Spartan SemiBold" pitchFamily="2" charset="77"/>
+                <a:ea typeface="League Spartan"/>
+                <a:cs typeface="League Spartan"/>
+                <a:sym typeface="League Spartan"/>
+              </a:rPr>
+              <a:t> - 100%</a:t>
+            </a:r>
+            <a:endParaRPr lang="en-US" sz="3200" b="1" spc="-77" baseline="30000">
+              <a:solidFill>
+                <a:srgbClr val="002150"/>
+              </a:solidFill>
+              <a:latin typeface="League Spartan SemiBold" pitchFamily="2" charset="77"/>
+              <a:ea typeface="League Spartan"/>
+              <a:cs typeface="League Spartan"/>
+              <a:sym typeface="League Spartan"/>
+            </a:endParaRPr>
+          </a:p>
+        </p:txBody>
+      </p:sp>
+      <p:pic>
+        <p:nvPicPr>
+          <p:cNvPr id="5" name="Picture 4" descr="A screenshot of a computer&#10;&#10;Description automatically generated">
+            <a:extLst>
+              <a:ext uri="{FF2B5EF4-FFF2-40B4-BE49-F238E27FC236}">
+                <a16:creationId xmlns:a16="http://schemas.microsoft.com/office/drawing/2014/main" id="{D7D74DEC-3D75-A9D1-2456-CE74181138AC}"/>
+              </a:ext>
+            </a:extLst>
+          </p:cNvPr>
+          <p:cNvPicPr>
+            <a:picLocks noChangeAspect="1"/>
+          </p:cNvPicPr>
+          <p:nvPr/>
+        </p:nvPicPr>
+        <p:blipFill>
+          <a:blip r:embed="rId4">
+            <a:extLst>
+              <a:ext uri="{28A0092B-C50C-407E-A947-70E740481C1C}">
+                <a14:useLocalDpi xmlns:a14="http://schemas.microsoft.com/office/drawing/2010/main" val="0"/>
+              </a:ext>
+            </a:extLst>
+          </a:blip>
+          <a:stretch>
+            <a:fillRect/>
+          </a:stretch>
+        </p:blipFill>
+        <p:spPr>
+          <a:xfrm>
+            <a:off x="1009592" y="2920194"/>
+            <a:ext cx="8877986" cy="6941634"/>
+          </a:xfrm>
+          <a:prstGeom prst="rect">
+            <a:avLst/>
+          </a:prstGeom>
+        </p:spPr>
+      </p:pic>
+      <p:pic>
+        <p:nvPicPr>
+          <p:cNvPr id="8" name="Picture 7" descr="A screenshot of a computer&#10;&#10;Description automatically generated">
+            <a:extLst>
+              <a:ext uri="{FF2B5EF4-FFF2-40B4-BE49-F238E27FC236}">
+                <a16:creationId xmlns:a16="http://schemas.microsoft.com/office/drawing/2014/main" id="{54279328-1EB6-4942-342F-285DDC5C259F}"/>
+              </a:ext>
+            </a:extLst>
+          </p:cNvPr>
+          <p:cNvPicPr>
+            <a:picLocks noChangeAspect="1"/>
+          </p:cNvPicPr>
+          <p:nvPr/>
+        </p:nvPicPr>
+        <p:blipFill>
+          <a:blip r:embed="rId5">
+            <a:extLst>
+              <a:ext uri="{28A0092B-C50C-407E-A947-70E740481C1C}">
+                <a14:useLocalDpi xmlns:a14="http://schemas.microsoft.com/office/drawing/2010/main" val="0"/>
+              </a:ext>
+            </a:extLst>
+          </a:blip>
+          <a:stretch>
+            <a:fillRect/>
+          </a:stretch>
+        </p:blipFill>
+        <p:spPr>
+          <a:xfrm>
+            <a:off x="9166298" y="2920194"/>
+            <a:ext cx="8877984" cy="6941634"/>
+          </a:xfrm>
+          <a:prstGeom prst="rect">
+            <a:avLst/>
+          </a:prstGeom>
+        </p:spPr>
+      </p:pic>
+    </p:spTree>
+    <p:extLst>
+      <p:ext uri="{BB962C8B-B14F-4D97-AF65-F5344CB8AC3E}">
+        <p14:creationId xmlns:p14="http://schemas.microsoft.com/office/powerpoint/2010/main" val="3714160906"/>
+      </p:ext>
+    </p:extLst>
+  </p:cSld>
+  <p:clrMapOvr>
+    <a:masterClrMapping/>
+  </p:clrMapOvr>
+</p:sld>
+</file>
+
+<file path=ppt/slides/slide9.xml><?xml version="1.0" encoding="utf-8"?>
 <p:sld xmlns:a="http://schemas.openxmlformats.org/drawingml/2006/main" xmlns:r="http://schemas.openxmlformats.org/officeDocument/2006/relationships" xmlns:p="http://schemas.openxmlformats.org/presentationml/2006/main">
   <p:cSld>
     <p:spTree>
@@ -6843,121 +10385,6 @@
           </p:txBody>
         </p:sp>
       </p:grpSp>
-      <p:sp>
-        <p:nvSpPr>
-          <p:cNvPr id="34" name="TextBox 33">
-            <a:extLst>
-              <a:ext uri="{FF2B5EF4-FFF2-40B4-BE49-F238E27FC236}">
-                <a16:creationId xmlns:a16="http://schemas.microsoft.com/office/drawing/2014/main" id="{C37ACD65-14B0-7446-9E2D-4BE3D41ED26A}"/>
-              </a:ext>
-            </a:extLst>
-          </p:cNvPr>
-          <p:cNvSpPr txBox="1"/>
-          <p:nvPr/>
-        </p:nvSpPr>
-        <p:spPr>
-          <a:xfrm>
-            <a:off x="1401507" y="4076700"/>
-            <a:ext cx="14592298" cy="1489062"/>
-          </a:xfrm>
-          <a:prstGeom prst="rect">
-            <a:avLst/>
-          </a:prstGeom>
-          <a:noFill/>
-        </p:spPr>
-        <p:txBody>
-          <a:bodyPr wrap="square" rtlCol="0">
-            <a:spAutoFit/>
-          </a:bodyPr>
-          <a:lstStyle/>
-          <a:p>
-            <a:pPr marL="342900" indent="-342900">
-              <a:lnSpc>
-                <a:spcPct val="120000"/>
-              </a:lnSpc>
-              <a:buFont typeface="System Font Regular"/>
-              <a:buChar char="⎯"/>
-            </a:pPr>
-            <a:r>
-              <a:rPr lang="en-US" sz="2600" spc="-64">
-                <a:solidFill>
-                  <a:srgbClr val="002250"/>
-                </a:solidFill>
-                <a:latin typeface="Adobe Clean UX" panose="020B0503020404020204" pitchFamily="34" charset="0"/>
-              </a:rPr>
-              <a:t>Try to train more models using a bigger dataset, then evaluate them</a:t>
-            </a:r>
-          </a:p>
-          <a:p>
-            <a:pPr marL="342900" indent="-342900">
-              <a:lnSpc>
-                <a:spcPct val="120000"/>
-              </a:lnSpc>
-              <a:buFont typeface="System Font Regular"/>
-              <a:buChar char="⎯"/>
-            </a:pPr>
-            <a:r>
-              <a:rPr lang="en-US" sz="2600" spc="-64">
-                <a:solidFill>
-                  <a:srgbClr val="002150"/>
-                </a:solidFill>
-                <a:latin typeface="Adobe Clean UX" panose="020B0503020404020204" pitchFamily="34" charset="0"/>
-                <a:hlinkClick r:id="rId3">
-                  <a:extLst>
-                    <a:ext uri="{A12FA001-AC4F-418D-AE19-62706E023703}">
-                      <ahyp:hlinkClr xmlns:ahyp="http://schemas.microsoft.com/office/drawing/2018/hyperlinkcolor" val="tx"/>
-                    </a:ext>
-                  </a:extLst>
-                </a:hlinkClick>
-              </a:rPr>
-              <a:t>PhysioNet EEGMMIDB</a:t>
-            </a:r>
-            <a:r>
-              <a:rPr lang="en-US" sz="2600" spc="-64">
-                <a:solidFill>
-                  <a:srgbClr val="002150"/>
-                </a:solidFill>
-                <a:latin typeface="Adobe Clean UX" panose="020B0503020404020204" pitchFamily="34" charset="0"/>
-              </a:rPr>
-              <a:t> (2009): 64-channel, 109 subjects, ~9800 trials total, widely used benchmark</a:t>
-            </a:r>
-          </a:p>
-          <a:p>
-            <a:pPr marL="342900" indent="-342900">
-              <a:lnSpc>
-                <a:spcPct val="120000"/>
-              </a:lnSpc>
-              <a:buFont typeface="System Font Regular"/>
-              <a:buChar char="⎯"/>
-            </a:pPr>
-            <a:r>
-              <a:rPr lang="en-US" sz="2600" spc="-64">
-                <a:solidFill>
-                  <a:srgbClr val="002150"/>
-                </a:solidFill>
-                <a:latin typeface="Adobe Clean UX" panose="020B0503020404020204" pitchFamily="34" charset="0"/>
-                <a:hlinkClick r:id="rId4">
-                  <a:extLst>
-                    <a:ext uri="{A12FA001-AC4F-418D-AE19-62706E023703}">
-                      <ahyp:hlinkClr xmlns:ahyp="http://schemas.microsoft.com/office/drawing/2018/hyperlinkcolor" val="tx"/>
-                    </a:ext>
-                  </a:extLst>
-                </a:hlinkClick>
-              </a:rPr>
-              <a:t>OpenBMI</a:t>
-            </a:r>
-            <a:r>
-              <a:rPr lang="en-US" sz="2600" spc="-64">
-                <a:solidFill>
-                  <a:srgbClr val="002150"/>
-                </a:solidFill>
-                <a:latin typeface="Adobe Clean UX" panose="020B0503020404020204" pitchFamily="34" charset="0"/>
-              </a:rPr>
-              <a:t> (2019): 62-channel, 54 subjects, 10800 trials total, very large (~200GB)</a:t>
-            </a:r>
-          </a:p>
-        </p:txBody>
-      </p:sp>
       <p:pic>
         <p:nvPicPr>
           <p:cNvPr id="41" name="Picture 40">
@@ -6973,7 +10400,7 @@
           <p:nvPr/>
         </p:nvPicPr>
         <p:blipFill>
-          <a:blip r:embed="rId5">
+          <a:blip r:embed="rId3">
             <a:extLst>
               <a:ext uri="{28A0092B-C50C-407E-A947-70E740481C1C}">
                 <a14:useLocalDpi xmlns:a14="http://schemas.microsoft.com/office/drawing/2010/main" val="0"/>
@@ -6996,221 +10423,6 @@
       </p:pic>
       <p:sp>
         <p:nvSpPr>
-          <p:cNvPr id="3" name="TextBox 2">
-            <a:extLst>
-              <a:ext uri="{FF2B5EF4-FFF2-40B4-BE49-F238E27FC236}">
-                <a16:creationId xmlns:a16="http://schemas.microsoft.com/office/drawing/2014/main" id="{D362B5EC-D5E9-EC30-81A7-69E7E68F3989}"/>
-              </a:ext>
-            </a:extLst>
-          </p:cNvPr>
-          <p:cNvSpPr txBox="1"/>
-          <p:nvPr/>
-        </p:nvSpPr>
-        <p:spPr>
-          <a:xfrm>
-            <a:off x="1401507" y="3314700"/>
-            <a:ext cx="9144000" cy="649345"/>
-          </a:xfrm>
-          <a:prstGeom prst="rect">
-            <a:avLst/>
-          </a:prstGeom>
-          <a:noFill/>
-        </p:spPr>
-        <p:txBody>
-          <a:bodyPr wrap="square">
-            <a:spAutoFit/>
-          </a:bodyPr>
-          <a:lstStyle/>
-          <a:p>
-            <a:pPr algn="just">
-              <a:lnSpc>
-                <a:spcPct val="140000"/>
-              </a:lnSpc>
-            </a:pPr>
-            <a:r>
-              <a:rPr lang="en-VN" sz="3000" spc="-64">
-                <a:solidFill>
-                  <a:srgbClr val="002250"/>
-                </a:solidFill>
-                <a:latin typeface="Gotham Bold"/>
-                <a:cs typeface="Gotham Bold"/>
-              </a:rPr>
-              <a:t>Solution A: </a:t>
-            </a:r>
-          </a:p>
-        </p:txBody>
-      </p:sp>
-      <p:sp>
-        <p:nvSpPr>
-          <p:cNvPr id="4" name="TextBox 3">
-            <a:extLst>
-              <a:ext uri="{FF2B5EF4-FFF2-40B4-BE49-F238E27FC236}">
-                <a16:creationId xmlns:a16="http://schemas.microsoft.com/office/drawing/2014/main" id="{FCA12E44-4CF2-19AA-33BE-2332EA29AD9B}"/>
-              </a:ext>
-            </a:extLst>
-          </p:cNvPr>
-          <p:cNvSpPr txBox="1"/>
-          <p:nvPr/>
-        </p:nvSpPr>
-        <p:spPr>
-          <a:xfrm>
-            <a:off x="1401507" y="6246755"/>
-            <a:ext cx="9144000" cy="649345"/>
-          </a:xfrm>
-          <a:prstGeom prst="rect">
-            <a:avLst/>
-          </a:prstGeom>
-          <a:noFill/>
-        </p:spPr>
-        <p:txBody>
-          <a:bodyPr wrap="square">
-            <a:spAutoFit/>
-          </a:bodyPr>
-          <a:lstStyle/>
-          <a:p>
-            <a:pPr algn="just">
-              <a:lnSpc>
-                <a:spcPct val="140000"/>
-              </a:lnSpc>
-            </a:pPr>
-            <a:r>
-              <a:rPr lang="en-VN" sz="3000" spc="-64">
-                <a:solidFill>
-                  <a:srgbClr val="002250"/>
-                </a:solidFill>
-                <a:latin typeface="Gotham Bold"/>
-                <a:cs typeface="Gotham Bold"/>
-              </a:rPr>
-              <a:t>Solution B: </a:t>
-            </a:r>
-          </a:p>
-        </p:txBody>
-      </p:sp>
-      <p:sp>
-        <p:nvSpPr>
-          <p:cNvPr id="5" name="TextBox 4">
-            <a:extLst>
-              <a:ext uri="{FF2B5EF4-FFF2-40B4-BE49-F238E27FC236}">
-                <a16:creationId xmlns:a16="http://schemas.microsoft.com/office/drawing/2014/main" id="{6B9A223A-CF43-DC66-B6EE-E438A6789229}"/>
-              </a:ext>
-            </a:extLst>
-          </p:cNvPr>
-          <p:cNvSpPr txBox="1"/>
-          <p:nvPr/>
-        </p:nvSpPr>
-        <p:spPr>
-          <a:xfrm>
-            <a:off x="1401507" y="6972300"/>
-            <a:ext cx="14592298" cy="1969193"/>
-          </a:xfrm>
-          <a:prstGeom prst="rect">
-            <a:avLst/>
-          </a:prstGeom>
-          <a:noFill/>
-        </p:spPr>
-        <p:txBody>
-          <a:bodyPr wrap="square" rtlCol="0">
-            <a:spAutoFit/>
-          </a:bodyPr>
-          <a:lstStyle/>
-          <a:p>
-            <a:pPr marL="342900" indent="-342900">
-              <a:lnSpc>
-                <a:spcPct val="120000"/>
-              </a:lnSpc>
-              <a:buFont typeface="System Font Regular"/>
-              <a:buChar char="⎯"/>
-            </a:pPr>
-            <a:r>
-              <a:rPr lang="en-US" sz="2600" spc="-64">
-                <a:solidFill>
-                  <a:srgbClr val="002250"/>
-                </a:solidFill>
-                <a:latin typeface="Adobe Clean UX" panose="020B0503020404020204" pitchFamily="34" charset="0"/>
-              </a:rPr>
-              <a:t>Use a pretrained model </a:t>
-            </a:r>
-            <a:r>
-              <a:rPr lang="en-US" sz="2600" spc="-64">
-                <a:solidFill>
-                  <a:srgbClr val="002150"/>
-                </a:solidFill>
-                <a:latin typeface="Adobe Clean UX" panose="020B0503020404020204" pitchFamily="34" charset="0"/>
-                <a:hlinkClick r:id="rId6">
-                  <a:extLst>
-                    <a:ext uri="{A12FA001-AC4F-418D-AE19-62706E023703}">
-                      <ahyp:hlinkClr xmlns:ahyp="http://schemas.microsoft.com/office/drawing/2018/hyperlinkcolor" val="tx"/>
-                    </a:ext>
-                  </a:extLst>
-                </a:hlinkClick>
-              </a:rPr>
-              <a:t>EEGNetv4</a:t>
-            </a:r>
-            <a:r>
-              <a:rPr lang="en-US" sz="2600" spc="-64">
-                <a:solidFill>
-                  <a:srgbClr val="002150"/>
-                </a:solidFill>
-                <a:latin typeface="Adobe Clean UX" panose="020B0503020404020204" pitchFamily="34" charset="0"/>
-              </a:rPr>
-              <a:t>, trained on large-scale EEG benchmark data</a:t>
-            </a:r>
-          </a:p>
-          <a:p>
-            <a:pPr marL="342900" indent="-342900">
-              <a:lnSpc>
-                <a:spcPct val="120000"/>
-              </a:lnSpc>
-              <a:buFont typeface="System Font Regular"/>
-              <a:buChar char="⎯"/>
-            </a:pPr>
-            <a:r>
-              <a:rPr lang="en-US" sz="2600" spc="-64">
-                <a:solidFill>
-                  <a:srgbClr val="002150"/>
-                </a:solidFill>
-                <a:latin typeface="Adobe Clean UX" panose="020B0503020404020204" pitchFamily="34" charset="0"/>
-              </a:rPr>
-              <a:t>Fine-tune using data collected with EMOTIV Epoc X</a:t>
-            </a:r>
-          </a:p>
-          <a:p>
-            <a:pPr marL="342900" indent="-342900">
-              <a:lnSpc>
-                <a:spcPct val="120000"/>
-              </a:lnSpc>
-              <a:buFont typeface="System Font Regular"/>
-              <a:buChar char="⎯"/>
-            </a:pPr>
-            <a:r>
-              <a:rPr lang="en-US" sz="2600" spc="-64">
-                <a:solidFill>
-                  <a:srgbClr val="002150"/>
-                </a:solidFill>
-                <a:latin typeface="Adobe Clean UX" panose="020B0503020404020204" pitchFamily="34" charset="0"/>
-              </a:rPr>
-              <a:t>But I am not sure if this way is fine for the Honours Project or any publication</a:t>
-            </a:r>
-          </a:p>
-          <a:p>
-            <a:pPr marL="342900" indent="-342900">
-              <a:lnSpc>
-                <a:spcPct val="120000"/>
-              </a:lnSpc>
-              <a:buFont typeface="System Font Regular"/>
-              <a:buChar char="⎯"/>
-            </a:pPr>
-            <a:endParaRPr lang="en-US" sz="2600" spc="-64">
-              <a:solidFill>
-                <a:srgbClr val="002150"/>
-              </a:solidFill>
-              <a:latin typeface="Adobe Clean UX" panose="020B0503020404020204" pitchFamily="34" charset="0"/>
-            </a:endParaRPr>
-          </a:p>
-        </p:txBody>
-      </p:sp>
-      <p:sp>
-        <p:nvSpPr>
           <p:cNvPr id="8" name="TextBox 7">
             <a:extLst>
               <a:ext uri="{FF2B5EF4-FFF2-40B4-BE49-F238E27FC236}">
@@ -7224,7 +10436,7 @@
         <p:spPr>
           <a:xfrm>
             <a:off x="1401507" y="2472100"/>
-            <a:ext cx="14592298" cy="528799"/>
+            <a:ext cx="14592298" cy="1969193"/>
           </a:xfrm>
           <a:prstGeom prst="rect">
             <a:avLst/>
@@ -7249,7 +10461,52 @@
                 </a:solidFill>
                 <a:latin typeface="Adobe Clean UX" panose="020B0503020404020204" pitchFamily="34" charset="0"/>
               </a:rPr>
-              <a:t>Current dataset: MIMED, EMOTIV Epoc X, 14-channel, 30 subjects, 240 trials total</a:t>
+              <a:t>- The full-text deadline for BME conference</a:t>
+            </a:r>
+          </a:p>
+          <a:p>
+            <a:pPr>
+              <a:lnSpc>
+                <a:spcPct val="120000"/>
+              </a:lnSpc>
+            </a:pPr>
+            <a:r>
+              <a:rPr lang="en-US" sz="2600" spc="-64">
+                <a:solidFill>
+                  <a:srgbClr val="002150"/>
+                </a:solidFill>
+                <a:latin typeface="Adobe Clean UX" panose="020B0503020404020204" pitchFamily="34" charset="0"/>
+              </a:rPr>
+              <a:t>- Game idea </a:t>
+            </a:r>
+          </a:p>
+          <a:p>
+            <a:pPr>
+              <a:lnSpc>
+                <a:spcPct val="120000"/>
+              </a:lnSpc>
+            </a:pPr>
+            <a:endParaRPr lang="en-US" sz="2600" spc="-64">
+              <a:solidFill>
+                <a:srgbClr val="002150"/>
+              </a:solidFill>
+              <a:latin typeface="Adobe Clean UX" panose="020B0503020404020204" pitchFamily="34" charset="0"/>
+            </a:endParaRPr>
+          </a:p>
+          <a:p>
+            <a:pPr>
+              <a:lnSpc>
+                <a:spcPct val="120000"/>
+              </a:lnSpc>
+            </a:pPr>
+            <a:r>
+              <a:rPr lang="en-US" sz="2600" spc="-64">
+                <a:solidFill>
+                  <a:srgbClr val="002150"/>
+                </a:solidFill>
+                <a:latin typeface="Adobe Clean UX" panose="020B0503020404020204" pitchFamily="34" charset="0"/>
+              </a:rPr>
+              <a:t> </a:t>
             </a:r>
           </a:p>
         </p:txBody>
@@ -7258,369 +10515,6 @@
     <p:extLst>
       <p:ext uri="{BB962C8B-B14F-4D97-AF65-F5344CB8AC3E}">
         <p14:creationId xmlns:p14="http://schemas.microsoft.com/office/powerpoint/2010/main" val="1101220743"/>
-      </p:ext>
-    </p:extLst>
-  </p:cSld>
-  <p:clrMapOvr>
-    <a:masterClrMapping/>
-  </p:clrMapOvr>
-</p:sld>
-</file>
-
-<file path=ppt/slides/slide6.xml><?xml version="1.0" encoding="utf-8"?>
-<p:sld xmlns:a="http://schemas.openxmlformats.org/drawingml/2006/main" xmlns:r="http://schemas.openxmlformats.org/officeDocument/2006/relationships" xmlns:p="http://schemas.openxmlformats.org/presentationml/2006/main">
-  <p:cSld>
-    <p:bg>
-      <p:bgPr>
-        <a:solidFill>
-          <a:srgbClr val="002150"/>
-        </a:solidFill>
-        <a:effectLst/>
-      </p:bgPr>
-    </p:bg>
-    <p:spTree>
-      <p:nvGrpSpPr>
-        <p:cNvPr id="1" name="">
-          <a:extLst>
-            <a:ext uri="{FF2B5EF4-FFF2-40B4-BE49-F238E27FC236}">
-              <a16:creationId xmlns:a16="http://schemas.microsoft.com/office/drawing/2014/main" id="{76004016-496C-AE22-2465-EADD53784ED6}"/>
-            </a:ext>
-          </a:extLst>
-        </p:cNvPr>
-        <p:cNvGrpSpPr/>
-        <p:nvPr/>
-      </p:nvGrpSpPr>
-      <p:grpSpPr>
-        <a:xfrm>
-          <a:off x="0" y="0"/>
-          <a:ext cx="0" cy="0"/>
-          <a:chOff x="0" y="0"/>
-          <a:chExt cx="0" cy="0"/>
-        </a:xfrm>
-      </p:grpSpPr>
-      <p:pic>
-        <p:nvPicPr>
-          <p:cNvPr id="11" name="Picture 10">
-            <a:extLst>
-              <a:ext uri="{FF2B5EF4-FFF2-40B4-BE49-F238E27FC236}">
-                <a16:creationId xmlns:a16="http://schemas.microsoft.com/office/drawing/2014/main" id="{C87A2D41-C0FD-8B6D-0383-C9F201443221}"/>
-              </a:ext>
-            </a:extLst>
-          </p:cNvPr>
-          <p:cNvPicPr>
-            <a:picLocks noChangeAspect="1"/>
-          </p:cNvPicPr>
-          <p:nvPr/>
-        </p:nvPicPr>
-        <p:blipFill>
-          <a:blip r:embed="rId3"/>
-          <a:srcRect l="39520" b="4709"/>
-          <a:stretch/>
-        </p:blipFill>
-        <p:spPr>
-          <a:xfrm>
-            <a:off x="-1" y="1373683"/>
-            <a:ext cx="6970530" cy="8913317"/>
-          </a:xfrm>
-          <a:prstGeom prst="rect">
-            <a:avLst/>
-          </a:prstGeom>
-        </p:spPr>
-      </p:pic>
-      <p:sp>
-        <p:nvSpPr>
-          <p:cNvPr id="7" name="TextBox 7">
-            <a:extLst>
-              <a:ext uri="{FF2B5EF4-FFF2-40B4-BE49-F238E27FC236}">
-                <a16:creationId xmlns:a16="http://schemas.microsoft.com/office/drawing/2014/main" id="{1D23C974-625B-104F-F03C-016C40E6AE1D}"/>
-              </a:ext>
-            </a:extLst>
-          </p:cNvPr>
-          <p:cNvSpPr txBox="1"/>
-          <p:nvPr/>
-        </p:nvSpPr>
-        <p:spPr>
-          <a:xfrm>
-            <a:off x="838200" y="8274134"/>
-            <a:ext cx="5551714" cy="831766"/>
-          </a:xfrm>
-          <a:prstGeom prst="rect">
-            <a:avLst/>
-          </a:prstGeom>
-        </p:spPr>
-        <p:txBody>
-          <a:bodyPr wrap="square" lIns="0" tIns="0" rIns="0" bIns="0" rtlCol="0" anchor="t">
-            <a:spAutoFit/>
-          </a:bodyPr>
-          <a:lstStyle/>
-          <a:p>
-            <a:pPr algn="l">
-              <a:lnSpc>
-                <a:spcPts val="7488"/>
-              </a:lnSpc>
-            </a:pPr>
-            <a:r>
-              <a:rPr lang="en-US" sz="3000" b="1" spc="-39">
-                <a:solidFill>
-                  <a:srgbClr val="FAF2EC"/>
-                </a:solidFill>
-                <a:latin typeface="League Spartan SemiBold" pitchFamily="2" charset="77"/>
-                <a:ea typeface="League Spartan"/>
-                <a:cs typeface="Segoe UI" panose="020F0502020204030204" pitchFamily="34" charset="0"/>
-                <a:sym typeface="League Spartan"/>
-              </a:rPr>
-              <a:t>Individual Honours Project</a:t>
-            </a:r>
-          </a:p>
-        </p:txBody>
-      </p:sp>
-      <p:pic>
-        <p:nvPicPr>
-          <p:cNvPr id="10" name="Picture 9" descr="A white lion with a black background&#10;&#10;Description automatically generated">
-            <a:extLst>
-              <a:ext uri="{FF2B5EF4-FFF2-40B4-BE49-F238E27FC236}">
-                <a16:creationId xmlns:a16="http://schemas.microsoft.com/office/drawing/2014/main" id="{B54BC935-F322-DF78-714D-F95F888D85CB}"/>
-              </a:ext>
-            </a:extLst>
-          </p:cNvPr>
-          <p:cNvPicPr>
-            <a:picLocks noChangeAspect="1"/>
-          </p:cNvPicPr>
-          <p:nvPr/>
-        </p:nvPicPr>
-        <p:blipFill>
-          <a:blip r:embed="rId4">
-            <a:duotone>
-              <a:prstClr val="black"/>
-              <a:srgbClr val="FAF2EC">
-                <a:tint val="45000"/>
-                <a:satMod val="400000"/>
-              </a:srgbClr>
-            </a:duotone>
-            <a:extLst>
-              <a:ext uri="{28A0092B-C50C-407E-A947-70E740481C1C}">
-                <a14:useLocalDpi xmlns:a14="http://schemas.microsoft.com/office/drawing/2010/main" val="0"/>
-              </a:ext>
-            </a:extLst>
-          </a:blip>
-          <a:stretch>
-            <a:fillRect/>
-          </a:stretch>
-        </p:blipFill>
-        <p:spPr>
-          <a:xfrm>
-            <a:off x="8970647" y="3009900"/>
-            <a:ext cx="1270000" cy="1270000"/>
-          </a:xfrm>
-          <a:prstGeom prst="rect">
-            <a:avLst/>
-          </a:prstGeom>
-        </p:spPr>
-      </p:pic>
-      <p:pic>
-        <p:nvPicPr>
-          <p:cNvPr id="12" name="Picture 11" descr="A white logo with a black background&#10;&#10;Description automatically generated">
-            <a:extLst>
-              <a:ext uri="{FF2B5EF4-FFF2-40B4-BE49-F238E27FC236}">
-                <a16:creationId xmlns:a16="http://schemas.microsoft.com/office/drawing/2014/main" id="{B12364C6-3778-ECB0-4A1E-DBC15203834F}"/>
-              </a:ext>
-            </a:extLst>
-          </p:cNvPr>
-          <p:cNvPicPr>
-            <a:picLocks noChangeAspect="1"/>
-          </p:cNvPicPr>
-          <p:nvPr/>
-        </p:nvPicPr>
-        <p:blipFill>
-          <a:blip r:embed="rId5">
-            <a:duotone>
-              <a:prstClr val="black"/>
-              <a:srgbClr val="FAF2EC">
-                <a:tint val="45000"/>
-                <a:satMod val="400000"/>
-              </a:srgbClr>
-            </a:duotone>
-            <a:extLst>
-              <a:ext uri="{28A0092B-C50C-407E-A947-70E740481C1C}">
-                <a14:useLocalDpi xmlns:a14="http://schemas.microsoft.com/office/drawing/2010/main" val="0"/>
-              </a:ext>
-            </a:extLst>
-          </a:blip>
-          <a:stretch>
-            <a:fillRect/>
-          </a:stretch>
-        </p:blipFill>
-        <p:spPr>
-          <a:xfrm>
-            <a:off x="7957686" y="3009900"/>
-            <a:ext cx="1270000" cy="1270000"/>
-          </a:xfrm>
-          <a:prstGeom prst="rect">
-            <a:avLst/>
-          </a:prstGeom>
-        </p:spPr>
-      </p:pic>
-      <p:sp>
-        <p:nvSpPr>
-          <p:cNvPr id="20" name="TextBox 19">
-            <a:extLst>
-              <a:ext uri="{FF2B5EF4-FFF2-40B4-BE49-F238E27FC236}">
-                <a16:creationId xmlns:a16="http://schemas.microsoft.com/office/drawing/2014/main" id="{B03E0354-D0F3-48F4-F63D-40EB60B225EF}"/>
-              </a:ext>
-            </a:extLst>
-          </p:cNvPr>
-          <p:cNvSpPr txBox="1"/>
-          <p:nvPr/>
-        </p:nvSpPr>
-        <p:spPr>
-          <a:xfrm>
-            <a:off x="744086" y="9029700"/>
-            <a:ext cx="7848600" cy="923330"/>
-          </a:xfrm>
-          <a:prstGeom prst="rect">
-            <a:avLst/>
-          </a:prstGeom>
-          <a:noFill/>
-        </p:spPr>
-        <p:txBody>
-          <a:bodyPr wrap="square">
-            <a:spAutoFit/>
-          </a:bodyPr>
-          <a:lstStyle/>
-          <a:p>
-            <a:r>
-              <a:rPr lang="en-US" b="1" spc="-39">
-                <a:solidFill>
-                  <a:srgbClr val="FAF2EC"/>
-                </a:solidFill>
-                <a:latin typeface="League Spartan SemiBold" pitchFamily="2" charset="77"/>
-              </a:rPr>
-              <a:t>Dang Khoa Cao - Supervisor: PhD. Chi Thanh Vi</a:t>
-            </a:r>
-          </a:p>
-          <a:p>
-            <a:r>
-              <a:rPr lang="en-US" b="1" spc="-39">
-                <a:solidFill>
-                  <a:srgbClr val="FAF2EC"/>
-                </a:solidFill>
-                <a:latin typeface="League Spartan SemiBold" pitchFamily="2" charset="77"/>
-              </a:rPr>
-              <a:t>UIT ID: 23560023 | BCU ID: 25195675</a:t>
-            </a:r>
-          </a:p>
-          <a:p>
-            <a:r>
-              <a:rPr lang="en-US" b="1" spc="-39">
-                <a:solidFill>
-                  <a:srgbClr val="FAF2EC"/>
-                </a:solidFill>
-                <a:latin typeface="League Spartan SemiBold" pitchFamily="2" charset="77"/>
-              </a:rPr>
-              <a:t>23560023@gm.uit.edu.vn | dang.cao@mail.bcu.ac.uk</a:t>
-            </a:r>
-          </a:p>
-        </p:txBody>
-      </p:sp>
-      <p:sp>
-        <p:nvSpPr>
-          <p:cNvPr id="6" name="TextBox 7">
-            <a:extLst>
-              <a:ext uri="{FF2B5EF4-FFF2-40B4-BE49-F238E27FC236}">
-                <a16:creationId xmlns:a16="http://schemas.microsoft.com/office/drawing/2014/main" id="{C23A1498-366D-AFFC-972A-3A3C7ED41DF3}"/>
-              </a:ext>
-            </a:extLst>
-          </p:cNvPr>
-          <p:cNvSpPr txBox="1"/>
-          <p:nvPr/>
-        </p:nvSpPr>
-        <p:spPr>
-          <a:xfrm>
-            <a:off x="3589375" y="4153964"/>
-            <a:ext cx="11109249" cy="1973232"/>
-          </a:xfrm>
-          <a:prstGeom prst="rect">
-            <a:avLst/>
-          </a:prstGeom>
-        </p:spPr>
-        <p:txBody>
-          <a:bodyPr wrap="square" lIns="0" tIns="0" rIns="0" bIns="0" rtlCol="0" anchor="t">
-            <a:spAutoFit/>
-          </a:bodyPr>
-          <a:lstStyle/>
-          <a:p>
-            <a:pPr algn="ctr">
-              <a:lnSpc>
-                <a:spcPts val="7488"/>
-              </a:lnSpc>
-            </a:pPr>
-            <a:r>
-              <a:rPr lang="en-US" sz="7000" spc="-39">
-                <a:solidFill>
-                  <a:srgbClr val="FAF2EC"/>
-                </a:solidFill>
-                <a:latin typeface="League Spartan ExtraBold" pitchFamily="2" charset="77"/>
-                <a:ea typeface="League Spartan"/>
-                <a:cs typeface="Segoe UI" panose="020F0502020204030204" pitchFamily="34" charset="0"/>
-                <a:sym typeface="League Spartan"/>
-              </a:rPr>
-              <a:t>THANK YOU</a:t>
-            </a:r>
-          </a:p>
-          <a:p>
-            <a:pPr algn="ctr">
-              <a:lnSpc>
-                <a:spcPts val="7488"/>
-              </a:lnSpc>
-            </a:pPr>
-            <a:r>
-              <a:rPr lang="en-US" sz="7000" spc="-39">
-                <a:solidFill>
-                  <a:srgbClr val="FAF2EC"/>
-                </a:solidFill>
-                <a:latin typeface="League Spartan ExtraBold" pitchFamily="2" charset="77"/>
-                <a:ea typeface="League Spartan"/>
-                <a:cs typeface="Segoe UI" panose="020F0502020204030204" pitchFamily="34" charset="0"/>
-                <a:sym typeface="League Spartan"/>
-              </a:rPr>
-              <a:t>FOR READING!</a:t>
-            </a:r>
-          </a:p>
-        </p:txBody>
-      </p:sp>
-      <p:pic>
-        <p:nvPicPr>
-          <p:cNvPr id="16" name="Picture 15">
-            <a:extLst>
-              <a:ext uri="{FF2B5EF4-FFF2-40B4-BE49-F238E27FC236}">
-                <a16:creationId xmlns:a16="http://schemas.microsoft.com/office/drawing/2014/main" id="{BE9548F2-93D6-3772-8F0F-39AB66FE8F95}"/>
-              </a:ext>
-            </a:extLst>
-          </p:cNvPr>
-          <p:cNvPicPr>
-            <a:picLocks noChangeAspect="1"/>
-          </p:cNvPicPr>
-          <p:nvPr/>
-        </p:nvPicPr>
-        <p:blipFill>
-          <a:blip r:embed="rId6"/>
-          <a:srcRect r="32464"/>
-          <a:stretch/>
-        </p:blipFill>
-        <p:spPr>
-          <a:xfrm>
-            <a:off x="11782871" y="1340663"/>
-            <a:ext cx="6505129" cy="8787143"/>
-          </a:xfrm>
-          <a:prstGeom prst="rect">
-            <a:avLst/>
-          </a:prstGeom>
-        </p:spPr>
-      </p:pic>
-    </p:spTree>
-    <p:extLst>
-      <p:ext uri="{BB962C8B-B14F-4D97-AF65-F5344CB8AC3E}">
-        <p14:creationId xmlns:p14="http://schemas.microsoft.com/office/powerpoint/2010/main" val="2793671517"/>
       </p:ext>
     </p:extLst>
   </p:cSld>
